--- a/공강플래너.pptx
+++ b/공강플래너.pptx
@@ -332,6 +332,11 @@
       </a:defRPr>
     </a:lvl9pPr>
   </p:defaultTextStyle>
+  <p:extLst>
+    <p:ext uri="{EFAFB233-063F-42B5-8137-9DF3F51BA10A}">
+      <p15:sldGuideLst xmlns:p15="http://schemas.microsoft.com/office/powerpoint/2012/main"/>
+    </p:ext>
+  </p:extLst>
 </p:presentation>
 </file>
 
@@ -651,7 +656,7 @@
           </a:ln>
           <a:extLst>
             <a:ext uri="{C572A759-6A51-4108-AA02-DFA0A04FC94B}">
-              <ma14:wrappingTextBoxFlag xmlns:ma14="http://schemas.microsoft.com/office/mac/drawingml/2011/main" xmlns:a14="http://schemas.microsoft.com/office/drawing/2010/main" xmlns:m="http://schemas.openxmlformats.org/officeDocument/2006/math" xmlns="" val="1"/>
+              <ma14:wrappingTextBoxFlag xmlns="" xmlns:m="http://schemas.openxmlformats.org/officeDocument/2006/math" xmlns:a14="http://schemas.microsoft.com/office/drawing/2010/main" xmlns:ma14="http://schemas.microsoft.com/office/mac/drawingml/2011/main" val="1"/>
             </a:ext>
           </a:extLst>
         </p:spPr>
@@ -688,7 +693,7 @@
           </a:ln>
           <a:extLst>
             <a:ext uri="{C572A759-6A51-4108-AA02-DFA0A04FC94B}">
-              <ma14:wrappingTextBoxFlag xmlns:ma14="http://schemas.microsoft.com/office/mac/drawingml/2011/main" xmlns:a14="http://schemas.microsoft.com/office/drawing/2010/main" xmlns:m="http://schemas.openxmlformats.org/officeDocument/2006/math" xmlns="" val="1"/>
+              <ma14:wrappingTextBoxFlag xmlns="" xmlns:m="http://schemas.openxmlformats.org/officeDocument/2006/math" xmlns:a14="http://schemas.microsoft.com/office/drawing/2010/main" xmlns:ma14="http://schemas.microsoft.com/office/mac/drawingml/2011/main" val="1"/>
             </a:ext>
           </a:extLst>
         </p:spPr>
@@ -1568,7 +1573,7 @@
           </a:ln>
           <a:extLst>
             <a:ext uri="{C572A759-6A51-4108-AA02-DFA0A04FC94B}">
-              <ma14:wrappingTextBoxFlag xmlns:ma14="http://schemas.microsoft.com/office/mac/drawingml/2011/main" xmlns:a14="http://schemas.microsoft.com/office/drawing/2010/main" xmlns:m="http://schemas.openxmlformats.org/officeDocument/2006/math" xmlns="" val="1"/>
+              <ma14:wrappingTextBoxFlag xmlns="" xmlns:m="http://schemas.openxmlformats.org/officeDocument/2006/math" xmlns:a14="http://schemas.microsoft.com/office/drawing/2010/main" xmlns:ma14="http://schemas.microsoft.com/office/mac/drawingml/2011/main" val="1"/>
             </a:ext>
           </a:extLst>
         </p:spPr>
@@ -1615,7 +1620,7 @@
           </a:ln>
           <a:extLst>
             <a:ext uri="{C572A759-6A51-4108-AA02-DFA0A04FC94B}">
-              <ma14:wrappingTextBoxFlag xmlns:ma14="http://schemas.microsoft.com/office/mac/drawingml/2011/main" xmlns:a14="http://schemas.microsoft.com/office/drawing/2010/main" xmlns:m="http://schemas.openxmlformats.org/officeDocument/2006/math" xmlns="" val="1"/>
+              <ma14:wrappingTextBoxFlag xmlns="" xmlns:m="http://schemas.openxmlformats.org/officeDocument/2006/math" xmlns:a14="http://schemas.microsoft.com/office/drawing/2010/main" xmlns:ma14="http://schemas.microsoft.com/office/mac/drawingml/2011/main" val="1"/>
             </a:ext>
           </a:extLst>
         </p:spPr>
@@ -1726,7 +1731,7 @@
           </a:ln>
           <a:extLst>
             <a:ext uri="{C572A759-6A51-4108-AA02-DFA0A04FC94B}">
-              <ma14:wrappingTextBoxFlag xmlns:ma14="http://schemas.microsoft.com/office/mac/drawingml/2011/main" xmlns:a14="http://schemas.microsoft.com/office/drawing/2010/main" xmlns:m="http://schemas.openxmlformats.org/officeDocument/2006/math" xmlns="" val="1"/>
+              <ma14:wrappingTextBoxFlag xmlns="" xmlns:m="http://schemas.openxmlformats.org/officeDocument/2006/math" xmlns:a14="http://schemas.microsoft.com/office/drawing/2010/main" xmlns:ma14="http://schemas.microsoft.com/office/mac/drawingml/2011/main" val="1"/>
             </a:ext>
           </a:extLst>
         </p:spPr>
@@ -1881,7 +1886,7 @@
           </a:ln>
           <a:extLst>
             <a:ext uri="{C572A759-6A51-4108-AA02-DFA0A04FC94B}">
-              <ma14:wrappingTextBoxFlag xmlns:ma14="http://schemas.microsoft.com/office/mac/drawingml/2011/main" xmlns:a14="http://schemas.microsoft.com/office/drawing/2010/main" xmlns:m="http://schemas.openxmlformats.org/officeDocument/2006/math" xmlns="" val="1"/>
+              <ma14:wrappingTextBoxFlag xmlns="" xmlns:m="http://schemas.openxmlformats.org/officeDocument/2006/math" xmlns:a14="http://schemas.microsoft.com/office/drawing/2010/main" xmlns:ma14="http://schemas.microsoft.com/office/mac/drawingml/2011/main" val="1"/>
             </a:ext>
           </a:extLst>
         </p:spPr>
@@ -1943,7 +1948,7 @@
           </a:ln>
           <a:extLst>
             <a:ext uri="{C572A759-6A51-4108-AA02-DFA0A04FC94B}">
-              <ma14:wrappingTextBoxFlag xmlns:ma14="http://schemas.microsoft.com/office/mac/drawingml/2011/main" xmlns:a14="http://schemas.microsoft.com/office/drawing/2010/main" xmlns:m="http://schemas.openxmlformats.org/officeDocument/2006/math" xmlns="" val="1"/>
+              <ma14:wrappingTextBoxFlag xmlns="" xmlns:m="http://schemas.openxmlformats.org/officeDocument/2006/math" xmlns:a14="http://schemas.microsoft.com/office/drawing/2010/main" xmlns:ma14="http://schemas.microsoft.com/office/mac/drawingml/2011/main" val="1"/>
             </a:ext>
           </a:extLst>
         </p:spPr>
@@ -2034,7 +2039,7 @@
           </a:ln>
           <a:extLst>
             <a:ext uri="{C572A759-6A51-4108-AA02-DFA0A04FC94B}">
-              <ma14:wrappingTextBoxFlag xmlns:ma14="http://schemas.microsoft.com/office/mac/drawingml/2011/main" xmlns:a14="http://schemas.microsoft.com/office/drawing/2010/main" xmlns:m="http://schemas.openxmlformats.org/officeDocument/2006/math" xmlns="" val="1"/>
+              <ma14:wrappingTextBoxFlag xmlns="" xmlns:m="http://schemas.openxmlformats.org/officeDocument/2006/math" xmlns:a14="http://schemas.microsoft.com/office/drawing/2010/main" xmlns:ma14="http://schemas.microsoft.com/office/mac/drawingml/2011/main" val="1"/>
             </a:ext>
           </a:extLst>
         </p:spPr>
@@ -2122,7 +2127,7 @@
           </a:ln>
           <a:extLst>
             <a:ext uri="{C572A759-6A51-4108-AA02-DFA0A04FC94B}">
-              <ma14:wrappingTextBoxFlag xmlns:ma14="http://schemas.microsoft.com/office/mac/drawingml/2011/main" xmlns:a14="http://schemas.microsoft.com/office/drawing/2010/main" xmlns:m="http://schemas.openxmlformats.org/officeDocument/2006/math" xmlns="" val="1"/>
+              <ma14:wrappingTextBoxFlag xmlns="" xmlns:m="http://schemas.openxmlformats.org/officeDocument/2006/math" xmlns:a14="http://schemas.microsoft.com/office/drawing/2010/main" xmlns:ma14="http://schemas.microsoft.com/office/mac/drawingml/2011/main" val="1"/>
             </a:ext>
           </a:extLst>
         </p:spPr>
@@ -2210,7 +2215,7 @@
           </a:ln>
           <a:extLst>
             <a:ext uri="{C572A759-6A51-4108-AA02-DFA0A04FC94B}">
-              <ma14:wrappingTextBoxFlag xmlns:ma14="http://schemas.microsoft.com/office/mac/drawingml/2011/main" xmlns:a14="http://schemas.microsoft.com/office/drawing/2010/main" xmlns:m="http://schemas.openxmlformats.org/officeDocument/2006/math" xmlns="" val="1"/>
+              <ma14:wrappingTextBoxFlag xmlns="" xmlns:m="http://schemas.openxmlformats.org/officeDocument/2006/math" xmlns:a14="http://schemas.microsoft.com/office/drawing/2010/main" xmlns:ma14="http://schemas.microsoft.com/office/mac/drawingml/2011/main" val="1"/>
             </a:ext>
           </a:extLst>
         </p:spPr>
@@ -2298,7 +2303,7 @@
           </a:ln>
           <a:extLst>
             <a:ext uri="{C572A759-6A51-4108-AA02-DFA0A04FC94B}">
-              <ma14:wrappingTextBoxFlag xmlns:ma14="http://schemas.microsoft.com/office/mac/drawingml/2011/main" xmlns:a14="http://schemas.microsoft.com/office/drawing/2010/main" xmlns:m="http://schemas.openxmlformats.org/officeDocument/2006/math" xmlns="" val="1"/>
+              <ma14:wrappingTextBoxFlag xmlns="" xmlns:m="http://schemas.openxmlformats.org/officeDocument/2006/math" xmlns:a14="http://schemas.microsoft.com/office/drawing/2010/main" xmlns:ma14="http://schemas.microsoft.com/office/mac/drawingml/2011/main" val="1"/>
             </a:ext>
           </a:extLst>
         </p:spPr>
@@ -2345,7 +2350,7 @@
           </a:ln>
           <a:extLst>
             <a:ext uri="{C572A759-6A51-4108-AA02-DFA0A04FC94B}">
-              <ma14:wrappingTextBoxFlag xmlns:ma14="http://schemas.microsoft.com/office/mac/drawingml/2011/main" xmlns:a14="http://schemas.microsoft.com/office/drawing/2010/main" xmlns:m="http://schemas.openxmlformats.org/officeDocument/2006/math" xmlns="" val="1"/>
+              <ma14:wrappingTextBoxFlag xmlns="" xmlns:m="http://schemas.openxmlformats.org/officeDocument/2006/math" xmlns:a14="http://schemas.microsoft.com/office/drawing/2010/main" xmlns:ma14="http://schemas.microsoft.com/office/mac/drawingml/2011/main" val="1"/>
             </a:ext>
           </a:extLst>
         </p:spPr>
@@ -2515,7 +2520,7 @@
           </a:ln>
           <a:extLst>
             <a:ext uri="{C572A759-6A51-4108-AA02-DFA0A04FC94B}">
-              <ma14:wrappingTextBoxFlag xmlns:ma14="http://schemas.microsoft.com/office/mac/drawingml/2011/main" xmlns:a14="http://schemas.microsoft.com/office/drawing/2010/main" xmlns:m="http://schemas.openxmlformats.org/officeDocument/2006/math" xmlns="" val="1"/>
+              <ma14:wrappingTextBoxFlag xmlns="" xmlns:m="http://schemas.openxmlformats.org/officeDocument/2006/math" xmlns:a14="http://schemas.microsoft.com/office/drawing/2010/main" xmlns:ma14="http://schemas.microsoft.com/office/mac/drawingml/2011/main" val="1"/>
             </a:ext>
           </a:extLst>
         </p:spPr>
@@ -2562,7 +2567,7 @@
           </a:ln>
           <a:extLst>
             <a:ext uri="{C572A759-6A51-4108-AA02-DFA0A04FC94B}">
-              <ma14:wrappingTextBoxFlag xmlns:ma14="http://schemas.microsoft.com/office/mac/drawingml/2011/main" xmlns:a14="http://schemas.microsoft.com/office/drawing/2010/main" xmlns:m="http://schemas.openxmlformats.org/officeDocument/2006/math" xmlns="" val="1"/>
+              <ma14:wrappingTextBoxFlag xmlns="" xmlns:m="http://schemas.openxmlformats.org/officeDocument/2006/math" xmlns:a14="http://schemas.microsoft.com/office/drawing/2010/main" xmlns:ma14="http://schemas.microsoft.com/office/mac/drawingml/2011/main" val="1"/>
             </a:ext>
           </a:extLst>
         </p:spPr>
@@ -2609,7 +2614,7 @@
           </a:ln>
           <a:extLst>
             <a:ext uri="{C572A759-6A51-4108-AA02-DFA0A04FC94B}">
-              <ma14:wrappingTextBoxFlag xmlns:ma14="http://schemas.microsoft.com/office/mac/drawingml/2011/main" xmlns:a14="http://schemas.microsoft.com/office/drawing/2010/main" xmlns:m="http://schemas.openxmlformats.org/officeDocument/2006/math" xmlns="" val="1"/>
+              <ma14:wrappingTextBoxFlag xmlns="" xmlns:m="http://schemas.openxmlformats.org/officeDocument/2006/math" xmlns:a14="http://schemas.microsoft.com/office/drawing/2010/main" xmlns:ma14="http://schemas.microsoft.com/office/mac/drawingml/2011/main" val="1"/>
             </a:ext>
           </a:extLst>
         </p:spPr>
@@ -2744,7 +2749,7 @@
           </a:ln>
           <a:extLst>
             <a:ext uri="{C572A759-6A51-4108-AA02-DFA0A04FC94B}">
-              <ma14:wrappingTextBoxFlag xmlns:ma14="http://schemas.microsoft.com/office/mac/drawingml/2011/main" xmlns:a14="http://schemas.microsoft.com/office/drawing/2010/main" xmlns:m="http://schemas.openxmlformats.org/officeDocument/2006/math" xmlns="" val="1"/>
+              <ma14:wrappingTextBoxFlag xmlns="" xmlns:m="http://schemas.openxmlformats.org/officeDocument/2006/math" xmlns:a14="http://schemas.microsoft.com/office/drawing/2010/main" xmlns:ma14="http://schemas.microsoft.com/office/mac/drawingml/2011/main" val="1"/>
             </a:ext>
           </a:extLst>
         </p:spPr>
@@ -2799,7 +2804,7 @@
           </a:ln>
           <a:extLst>
             <a:ext uri="{C572A759-6A51-4108-AA02-DFA0A04FC94B}">
-              <ma14:wrappingTextBoxFlag xmlns:ma14="http://schemas.microsoft.com/office/mac/drawingml/2011/main" xmlns:a14="http://schemas.microsoft.com/office/drawing/2010/main" xmlns:m="http://schemas.openxmlformats.org/officeDocument/2006/math" xmlns="" val="1"/>
+              <ma14:wrappingTextBoxFlag xmlns="" xmlns:m="http://schemas.openxmlformats.org/officeDocument/2006/math" xmlns:a14="http://schemas.microsoft.com/office/drawing/2010/main" xmlns:ma14="http://schemas.microsoft.com/office/mac/drawingml/2011/main" val="1"/>
             </a:ext>
           </a:extLst>
         </p:spPr>
@@ -2887,7 +2892,7 @@
           </a:ln>
           <a:extLst>
             <a:ext uri="{C572A759-6A51-4108-AA02-DFA0A04FC94B}">
-              <ma14:wrappingTextBoxFlag xmlns:ma14="http://schemas.microsoft.com/office/mac/drawingml/2011/main" xmlns:a14="http://schemas.microsoft.com/office/drawing/2010/main" xmlns:m="http://schemas.openxmlformats.org/officeDocument/2006/math" xmlns="" val="1"/>
+              <ma14:wrappingTextBoxFlag xmlns="" xmlns:m="http://schemas.openxmlformats.org/officeDocument/2006/math" xmlns:a14="http://schemas.microsoft.com/office/drawing/2010/main" xmlns:ma14="http://schemas.microsoft.com/office/mac/drawingml/2011/main" val="1"/>
             </a:ext>
           </a:extLst>
         </p:spPr>
@@ -2945,7 +2950,7 @@
           </a:ln>
           <a:extLst>
             <a:ext uri="{C572A759-6A51-4108-AA02-DFA0A04FC94B}">
-              <ma14:wrappingTextBoxFlag xmlns:ma14="http://schemas.microsoft.com/office/mac/drawingml/2011/main" xmlns:a14="http://schemas.microsoft.com/office/drawing/2010/main" xmlns:m="http://schemas.openxmlformats.org/officeDocument/2006/math" xmlns="" val="1"/>
+              <ma14:wrappingTextBoxFlag xmlns="" xmlns:m="http://schemas.openxmlformats.org/officeDocument/2006/math" xmlns:a14="http://schemas.microsoft.com/office/drawing/2010/main" xmlns:ma14="http://schemas.microsoft.com/office/mac/drawingml/2011/main" val="1"/>
             </a:ext>
           </a:extLst>
         </p:spPr>
@@ -3065,7 +3070,7 @@
           </a:ln>
           <a:extLst>
             <a:ext uri="{C572A759-6A51-4108-AA02-DFA0A04FC94B}">
-              <ma14:wrappingTextBoxFlag xmlns:ma14="http://schemas.microsoft.com/office/mac/drawingml/2011/main" xmlns:a14="http://schemas.microsoft.com/office/drawing/2010/main" xmlns:m="http://schemas.openxmlformats.org/officeDocument/2006/math" xmlns="" val="1"/>
+              <ma14:wrappingTextBoxFlag xmlns="" xmlns:m="http://schemas.openxmlformats.org/officeDocument/2006/math" xmlns:a14="http://schemas.microsoft.com/office/drawing/2010/main" xmlns:ma14="http://schemas.microsoft.com/office/mac/drawingml/2011/main" val="1"/>
             </a:ext>
           </a:extLst>
         </p:spPr>
@@ -3115,7 +3120,7 @@
           </a:ln>
           <a:extLst>
             <a:ext uri="{C572A759-6A51-4108-AA02-DFA0A04FC94B}">
-              <ma14:wrappingTextBoxFlag xmlns:ma14="http://schemas.microsoft.com/office/mac/drawingml/2011/main" xmlns:a14="http://schemas.microsoft.com/office/drawing/2010/main" xmlns:m="http://schemas.openxmlformats.org/officeDocument/2006/math" xmlns="" val="1"/>
+              <ma14:wrappingTextBoxFlag xmlns="" xmlns:m="http://schemas.openxmlformats.org/officeDocument/2006/math" xmlns:a14="http://schemas.microsoft.com/office/drawing/2010/main" xmlns:ma14="http://schemas.microsoft.com/office/mac/drawingml/2011/main" val="1"/>
             </a:ext>
           </a:extLst>
         </p:spPr>
@@ -3206,7 +3211,7 @@
           </a:ln>
           <a:extLst>
             <a:ext uri="{C572A759-6A51-4108-AA02-DFA0A04FC94B}">
-              <ma14:wrappingTextBoxFlag xmlns:ma14="http://schemas.microsoft.com/office/mac/drawingml/2011/main" xmlns:a14="http://schemas.microsoft.com/office/drawing/2010/main" xmlns:m="http://schemas.openxmlformats.org/officeDocument/2006/math" xmlns="" val="1"/>
+              <ma14:wrappingTextBoxFlag xmlns="" xmlns:m="http://schemas.openxmlformats.org/officeDocument/2006/math" xmlns:a14="http://schemas.microsoft.com/office/drawing/2010/main" xmlns:ma14="http://schemas.microsoft.com/office/mac/drawingml/2011/main" val="1"/>
             </a:ext>
           </a:extLst>
         </p:spPr>
@@ -3256,7 +3261,7 @@
           </a:ln>
           <a:extLst>
             <a:ext uri="{C572A759-6A51-4108-AA02-DFA0A04FC94B}">
-              <ma14:wrappingTextBoxFlag xmlns:ma14="http://schemas.microsoft.com/office/mac/drawingml/2011/main" xmlns:a14="http://schemas.microsoft.com/office/drawing/2010/main" xmlns:m="http://schemas.openxmlformats.org/officeDocument/2006/math" xmlns="" val="1"/>
+              <ma14:wrappingTextBoxFlag xmlns="" xmlns:m="http://schemas.openxmlformats.org/officeDocument/2006/math" xmlns:a14="http://schemas.microsoft.com/office/drawing/2010/main" xmlns:ma14="http://schemas.microsoft.com/office/mac/drawingml/2011/main" val="1"/>
             </a:ext>
           </a:extLst>
         </p:spPr>
@@ -3359,7 +3364,7 @@
           </a:ln>
           <a:extLst>
             <a:ext uri="{C572A759-6A51-4108-AA02-DFA0A04FC94B}">
-              <ma14:wrappingTextBoxFlag xmlns:ma14="http://schemas.microsoft.com/office/mac/drawingml/2011/main" xmlns:a14="http://schemas.microsoft.com/office/drawing/2010/main" xmlns:m="http://schemas.openxmlformats.org/officeDocument/2006/math" xmlns="" val="1"/>
+              <ma14:wrappingTextBoxFlag xmlns="" xmlns:m="http://schemas.openxmlformats.org/officeDocument/2006/math" xmlns:a14="http://schemas.microsoft.com/office/drawing/2010/main" xmlns:ma14="http://schemas.microsoft.com/office/mac/drawingml/2011/main" val="1"/>
             </a:ext>
           </a:extLst>
         </p:spPr>
@@ -3409,7 +3414,7 @@
           </a:ln>
           <a:extLst>
             <a:ext uri="{C572A759-6A51-4108-AA02-DFA0A04FC94B}">
-              <ma14:wrappingTextBoxFlag xmlns:ma14="http://schemas.microsoft.com/office/mac/drawingml/2011/main" xmlns:a14="http://schemas.microsoft.com/office/drawing/2010/main" xmlns:m="http://schemas.openxmlformats.org/officeDocument/2006/math" xmlns="" val="1"/>
+              <ma14:wrappingTextBoxFlag xmlns="" xmlns:m="http://schemas.openxmlformats.org/officeDocument/2006/math" xmlns:a14="http://schemas.microsoft.com/office/drawing/2010/main" xmlns:ma14="http://schemas.microsoft.com/office/mac/drawingml/2011/main" val="1"/>
             </a:ext>
           </a:extLst>
         </p:spPr>
@@ -3456,7 +3461,7 @@
           </a:ln>
           <a:extLst>
             <a:ext uri="{C572A759-6A51-4108-AA02-DFA0A04FC94B}">
-              <ma14:wrappingTextBoxFlag xmlns:ma14="http://schemas.microsoft.com/office/mac/drawingml/2011/main" xmlns:a14="http://schemas.microsoft.com/office/drawing/2010/main" xmlns:m="http://schemas.openxmlformats.org/officeDocument/2006/math" xmlns="" val="1"/>
+              <ma14:wrappingTextBoxFlag xmlns="" xmlns:m="http://schemas.openxmlformats.org/officeDocument/2006/math" xmlns:a14="http://schemas.microsoft.com/office/drawing/2010/main" xmlns:ma14="http://schemas.microsoft.com/office/mac/drawingml/2011/main" val="1"/>
             </a:ext>
           </a:extLst>
         </p:spPr>
@@ -3503,7 +3508,7 @@
           </a:ln>
           <a:extLst>
             <a:ext uri="{C572A759-6A51-4108-AA02-DFA0A04FC94B}">
-              <ma14:wrappingTextBoxFlag xmlns:ma14="http://schemas.microsoft.com/office/mac/drawingml/2011/main" xmlns:a14="http://schemas.microsoft.com/office/drawing/2010/main" xmlns:m="http://schemas.openxmlformats.org/officeDocument/2006/math" xmlns="" val="1"/>
+              <ma14:wrappingTextBoxFlag xmlns="" xmlns:m="http://schemas.openxmlformats.org/officeDocument/2006/math" xmlns:a14="http://schemas.microsoft.com/office/drawing/2010/main" xmlns:ma14="http://schemas.microsoft.com/office/mac/drawingml/2011/main" val="1"/>
             </a:ext>
           </a:extLst>
         </p:spPr>
@@ -3679,7 +3684,7 @@
           </a:ln>
           <a:extLst>
             <a:ext uri="{C572A759-6A51-4108-AA02-DFA0A04FC94B}">
-              <ma14:wrappingTextBoxFlag xmlns:ma14="http://schemas.microsoft.com/office/mac/drawingml/2011/main" xmlns:a14="http://schemas.microsoft.com/office/drawing/2010/main" xmlns:m="http://schemas.openxmlformats.org/officeDocument/2006/math" xmlns="" val="1"/>
+              <ma14:wrappingTextBoxFlag xmlns="" xmlns:m="http://schemas.openxmlformats.org/officeDocument/2006/math" xmlns:a14="http://schemas.microsoft.com/office/drawing/2010/main" xmlns:ma14="http://schemas.microsoft.com/office/mac/drawingml/2011/main" val="1"/>
             </a:ext>
           </a:extLst>
         </p:spPr>
@@ -3726,7 +3731,7 @@
           </a:ln>
           <a:extLst>
             <a:ext uri="{C572A759-6A51-4108-AA02-DFA0A04FC94B}">
-              <ma14:wrappingTextBoxFlag xmlns:ma14="http://schemas.microsoft.com/office/mac/drawingml/2011/main" xmlns:a14="http://schemas.microsoft.com/office/drawing/2010/main" xmlns:m="http://schemas.openxmlformats.org/officeDocument/2006/math" xmlns="" val="1"/>
+              <ma14:wrappingTextBoxFlag xmlns="" xmlns:m="http://schemas.openxmlformats.org/officeDocument/2006/math" xmlns:a14="http://schemas.microsoft.com/office/drawing/2010/main" xmlns:ma14="http://schemas.microsoft.com/office/mac/drawingml/2011/main" val="1"/>
             </a:ext>
           </a:extLst>
         </p:spPr>
@@ -3773,7 +3778,7 @@
           </a:ln>
           <a:extLst>
             <a:ext uri="{C572A759-6A51-4108-AA02-DFA0A04FC94B}">
-              <ma14:wrappingTextBoxFlag xmlns:ma14="http://schemas.microsoft.com/office/mac/drawingml/2011/main" xmlns:a14="http://schemas.microsoft.com/office/drawing/2010/main" xmlns:m="http://schemas.openxmlformats.org/officeDocument/2006/math" xmlns="" val="1"/>
+              <ma14:wrappingTextBoxFlag xmlns="" xmlns:m="http://schemas.openxmlformats.org/officeDocument/2006/math" xmlns:a14="http://schemas.microsoft.com/office/drawing/2010/main" xmlns:ma14="http://schemas.microsoft.com/office/mac/drawingml/2011/main" val="1"/>
             </a:ext>
           </a:extLst>
         </p:spPr>
@@ -3908,7 +3913,7 @@
           </a:ln>
           <a:extLst>
             <a:ext uri="{C572A759-6A51-4108-AA02-DFA0A04FC94B}">
-              <ma14:wrappingTextBoxFlag xmlns:ma14="http://schemas.microsoft.com/office/mac/drawingml/2011/main" xmlns:a14="http://schemas.microsoft.com/office/drawing/2010/main" xmlns:m="http://schemas.openxmlformats.org/officeDocument/2006/math" xmlns="" val="1"/>
+              <ma14:wrappingTextBoxFlag xmlns="" xmlns:m="http://schemas.openxmlformats.org/officeDocument/2006/math" xmlns:a14="http://schemas.microsoft.com/office/drawing/2010/main" xmlns:ma14="http://schemas.microsoft.com/office/mac/drawingml/2011/main" val="1"/>
             </a:ext>
           </a:extLst>
         </p:spPr>
@@ -3963,7 +3968,7 @@
           </a:ln>
           <a:extLst>
             <a:ext uri="{C572A759-6A51-4108-AA02-DFA0A04FC94B}">
-              <ma14:wrappingTextBoxFlag xmlns:ma14="http://schemas.microsoft.com/office/mac/drawingml/2011/main" xmlns:a14="http://schemas.microsoft.com/office/drawing/2010/main" xmlns:m="http://schemas.openxmlformats.org/officeDocument/2006/math" xmlns="" val="1"/>
+              <ma14:wrappingTextBoxFlag xmlns="" xmlns:m="http://schemas.openxmlformats.org/officeDocument/2006/math" xmlns:a14="http://schemas.microsoft.com/office/drawing/2010/main" xmlns:ma14="http://schemas.microsoft.com/office/mac/drawingml/2011/main" val="1"/>
             </a:ext>
           </a:extLst>
         </p:spPr>
@@ -4051,7 +4056,7 @@
           </a:ln>
           <a:extLst>
             <a:ext uri="{C572A759-6A51-4108-AA02-DFA0A04FC94B}">
-              <ma14:wrappingTextBoxFlag xmlns:ma14="http://schemas.microsoft.com/office/mac/drawingml/2011/main" xmlns:a14="http://schemas.microsoft.com/office/drawing/2010/main" xmlns:m="http://schemas.openxmlformats.org/officeDocument/2006/math" xmlns="" val="1"/>
+              <ma14:wrappingTextBoxFlag xmlns="" xmlns:m="http://schemas.openxmlformats.org/officeDocument/2006/math" xmlns:a14="http://schemas.microsoft.com/office/drawing/2010/main" xmlns:ma14="http://schemas.microsoft.com/office/mac/drawingml/2011/main" val="1"/>
             </a:ext>
           </a:extLst>
         </p:spPr>
@@ -4098,7 +4103,7 @@
           </a:ln>
           <a:extLst>
             <a:ext uri="{C572A759-6A51-4108-AA02-DFA0A04FC94B}">
-              <ma14:wrappingTextBoxFlag xmlns:ma14="http://schemas.microsoft.com/office/mac/drawingml/2011/main" xmlns:a14="http://schemas.microsoft.com/office/drawing/2010/main" xmlns:m="http://schemas.openxmlformats.org/officeDocument/2006/math" xmlns="" val="1"/>
+              <ma14:wrappingTextBoxFlag xmlns="" xmlns:m="http://schemas.openxmlformats.org/officeDocument/2006/math" xmlns:a14="http://schemas.microsoft.com/office/drawing/2010/main" xmlns:ma14="http://schemas.microsoft.com/office/mac/drawingml/2011/main" val="1"/>
             </a:ext>
           </a:extLst>
         </p:spPr>
@@ -4194,7 +4199,7 @@
           </a:ln>
           <a:extLst>
             <a:ext uri="{C572A759-6A51-4108-AA02-DFA0A04FC94B}">
-              <ma14:wrappingTextBoxFlag xmlns:ma14="http://schemas.microsoft.com/office/mac/drawingml/2011/main" xmlns:a14="http://schemas.microsoft.com/office/drawing/2010/main" xmlns:m="http://schemas.openxmlformats.org/officeDocument/2006/math" xmlns="" val="1"/>
+              <ma14:wrappingTextBoxFlag xmlns="" xmlns:m="http://schemas.openxmlformats.org/officeDocument/2006/math" xmlns:a14="http://schemas.microsoft.com/office/drawing/2010/main" xmlns:ma14="http://schemas.microsoft.com/office/mac/drawingml/2011/main" val="1"/>
             </a:ext>
           </a:extLst>
         </p:spPr>
@@ -4244,7 +4249,7 @@
           </a:ln>
           <a:extLst>
             <a:ext uri="{C572A759-6A51-4108-AA02-DFA0A04FC94B}">
-              <ma14:wrappingTextBoxFlag xmlns:ma14="http://schemas.microsoft.com/office/mac/drawingml/2011/main" xmlns:a14="http://schemas.microsoft.com/office/drawing/2010/main" xmlns:m="http://schemas.openxmlformats.org/officeDocument/2006/math" xmlns="" val="1"/>
+              <ma14:wrappingTextBoxFlag xmlns="" xmlns:m="http://schemas.openxmlformats.org/officeDocument/2006/math" xmlns:a14="http://schemas.microsoft.com/office/drawing/2010/main" xmlns:ma14="http://schemas.microsoft.com/office/mac/drawingml/2011/main" val="1"/>
             </a:ext>
           </a:extLst>
         </p:spPr>
@@ -4335,7 +4340,7 @@
           </a:ln>
           <a:extLst>
             <a:ext uri="{C572A759-6A51-4108-AA02-DFA0A04FC94B}">
-              <ma14:wrappingTextBoxFlag xmlns:ma14="http://schemas.microsoft.com/office/mac/drawingml/2011/main" xmlns:a14="http://schemas.microsoft.com/office/drawing/2010/main" xmlns:m="http://schemas.openxmlformats.org/officeDocument/2006/math" xmlns="" val="1"/>
+              <ma14:wrappingTextBoxFlag xmlns="" xmlns:m="http://schemas.openxmlformats.org/officeDocument/2006/math" xmlns:a14="http://schemas.microsoft.com/office/drawing/2010/main" xmlns:ma14="http://schemas.microsoft.com/office/mac/drawingml/2011/main" val="1"/>
             </a:ext>
           </a:extLst>
         </p:spPr>
@@ -4385,7 +4390,7 @@
           </a:ln>
           <a:extLst>
             <a:ext uri="{C572A759-6A51-4108-AA02-DFA0A04FC94B}">
-              <ma14:wrappingTextBoxFlag xmlns:ma14="http://schemas.microsoft.com/office/mac/drawingml/2011/main" xmlns:a14="http://schemas.microsoft.com/office/drawing/2010/main" xmlns:m="http://schemas.openxmlformats.org/officeDocument/2006/math" xmlns="" val="1"/>
+              <ma14:wrappingTextBoxFlag xmlns="" xmlns:m="http://schemas.openxmlformats.org/officeDocument/2006/math" xmlns:a14="http://schemas.microsoft.com/office/drawing/2010/main" xmlns:ma14="http://schemas.microsoft.com/office/mac/drawingml/2011/main" val="1"/>
             </a:ext>
           </a:extLst>
         </p:spPr>
@@ -4473,7 +4478,7 @@
           </a:ln>
           <a:extLst>
             <a:ext uri="{C572A759-6A51-4108-AA02-DFA0A04FC94B}">
-              <ma14:wrappingTextBoxFlag xmlns:ma14="http://schemas.microsoft.com/office/mac/drawingml/2011/main" xmlns:a14="http://schemas.microsoft.com/office/drawing/2010/main" xmlns:m="http://schemas.openxmlformats.org/officeDocument/2006/math" xmlns="" val="1"/>
+              <ma14:wrappingTextBoxFlag xmlns="" xmlns:m="http://schemas.openxmlformats.org/officeDocument/2006/math" xmlns:a14="http://schemas.microsoft.com/office/drawing/2010/main" xmlns:ma14="http://schemas.microsoft.com/office/mac/drawingml/2011/main" val="1"/>
             </a:ext>
           </a:extLst>
         </p:spPr>
@@ -4523,7 +4528,7 @@
           </a:ln>
           <a:extLst>
             <a:ext uri="{C572A759-6A51-4108-AA02-DFA0A04FC94B}">
-              <ma14:wrappingTextBoxFlag xmlns:ma14="http://schemas.microsoft.com/office/mac/drawingml/2011/main" xmlns:a14="http://schemas.microsoft.com/office/drawing/2010/main" xmlns:m="http://schemas.openxmlformats.org/officeDocument/2006/math" xmlns="" val="1"/>
+              <ma14:wrappingTextBoxFlag xmlns="" xmlns:m="http://schemas.openxmlformats.org/officeDocument/2006/math" xmlns:a14="http://schemas.microsoft.com/office/drawing/2010/main" xmlns:ma14="http://schemas.microsoft.com/office/mac/drawingml/2011/main" val="1"/>
             </a:ext>
           </a:extLst>
         </p:spPr>
@@ -4570,7 +4575,7 @@
           </a:ln>
           <a:extLst>
             <a:ext uri="{C572A759-6A51-4108-AA02-DFA0A04FC94B}">
-              <ma14:wrappingTextBoxFlag xmlns:ma14="http://schemas.microsoft.com/office/mac/drawingml/2011/main" xmlns:a14="http://schemas.microsoft.com/office/drawing/2010/main" xmlns:m="http://schemas.openxmlformats.org/officeDocument/2006/math" xmlns="" val="1"/>
+              <ma14:wrappingTextBoxFlag xmlns="" xmlns:m="http://schemas.openxmlformats.org/officeDocument/2006/math" xmlns:a14="http://schemas.microsoft.com/office/drawing/2010/main" xmlns:ma14="http://schemas.microsoft.com/office/mac/drawingml/2011/main" val="1"/>
             </a:ext>
           </a:extLst>
         </p:spPr>
@@ -4644,7 +4649,7 @@
           </a:ln>
           <a:extLst>
             <a:ext uri="{C572A759-6A51-4108-AA02-DFA0A04FC94B}">
-              <ma14:wrappingTextBoxFlag xmlns:ma14="http://schemas.microsoft.com/office/mac/drawingml/2011/main" xmlns:a14="http://schemas.microsoft.com/office/drawing/2010/main" xmlns:m="http://schemas.openxmlformats.org/officeDocument/2006/math" xmlns="" val="1"/>
+              <ma14:wrappingTextBoxFlag xmlns="" xmlns:m="http://schemas.openxmlformats.org/officeDocument/2006/math" xmlns:a14="http://schemas.microsoft.com/office/drawing/2010/main" xmlns:ma14="http://schemas.microsoft.com/office/mac/drawingml/2011/main" val="1"/>
             </a:ext>
           </a:extLst>
         </p:spPr>
@@ -4764,7 +4769,7 @@
           </a:ln>
           <a:extLst>
             <a:ext uri="{C572A759-6A51-4108-AA02-DFA0A04FC94B}">
-              <ma14:wrappingTextBoxFlag xmlns:ma14="http://schemas.microsoft.com/office/mac/drawingml/2011/main" xmlns:a14="http://schemas.microsoft.com/office/drawing/2010/main" xmlns:m="http://schemas.openxmlformats.org/officeDocument/2006/math" xmlns="" val="1"/>
+              <ma14:wrappingTextBoxFlag xmlns="" xmlns:m="http://schemas.openxmlformats.org/officeDocument/2006/math" xmlns:a14="http://schemas.microsoft.com/office/drawing/2010/main" xmlns:ma14="http://schemas.microsoft.com/office/mac/drawingml/2011/main" val="1"/>
             </a:ext>
           </a:extLst>
         </p:spPr>
@@ -4811,7 +4816,7 @@
           </a:ln>
           <a:extLst>
             <a:ext uri="{C572A759-6A51-4108-AA02-DFA0A04FC94B}">
-              <ma14:wrappingTextBoxFlag xmlns:ma14="http://schemas.microsoft.com/office/mac/drawingml/2011/main" xmlns:a14="http://schemas.microsoft.com/office/drawing/2010/main" xmlns:m="http://schemas.openxmlformats.org/officeDocument/2006/math" xmlns="" val="1"/>
+              <ma14:wrappingTextBoxFlag xmlns="" xmlns:m="http://schemas.openxmlformats.org/officeDocument/2006/math" xmlns:a14="http://schemas.microsoft.com/office/drawing/2010/main" xmlns:ma14="http://schemas.microsoft.com/office/mac/drawingml/2011/main" val="1"/>
             </a:ext>
           </a:extLst>
         </p:spPr>
@@ -4858,7 +4863,7 @@
           </a:ln>
           <a:extLst>
             <a:ext uri="{C572A759-6A51-4108-AA02-DFA0A04FC94B}">
-              <ma14:wrappingTextBoxFlag xmlns:ma14="http://schemas.microsoft.com/office/mac/drawingml/2011/main" xmlns:a14="http://schemas.microsoft.com/office/drawing/2010/main" xmlns:m="http://schemas.openxmlformats.org/officeDocument/2006/math" xmlns="" val="1"/>
+              <ma14:wrappingTextBoxFlag xmlns="" xmlns:m="http://schemas.openxmlformats.org/officeDocument/2006/math" xmlns:a14="http://schemas.microsoft.com/office/drawing/2010/main" xmlns:ma14="http://schemas.microsoft.com/office/mac/drawingml/2011/main" val="1"/>
             </a:ext>
           </a:extLst>
         </p:spPr>
@@ -4993,7 +4998,7 @@
           </a:ln>
           <a:extLst>
             <a:ext uri="{C572A759-6A51-4108-AA02-DFA0A04FC94B}">
-              <ma14:wrappingTextBoxFlag xmlns:ma14="http://schemas.microsoft.com/office/mac/drawingml/2011/main" xmlns:a14="http://schemas.microsoft.com/office/drawing/2010/main" xmlns:m="http://schemas.openxmlformats.org/officeDocument/2006/math" xmlns="" val="1"/>
+              <ma14:wrappingTextBoxFlag xmlns="" xmlns:m="http://schemas.openxmlformats.org/officeDocument/2006/math" xmlns:a14="http://schemas.microsoft.com/office/drawing/2010/main" xmlns:ma14="http://schemas.microsoft.com/office/mac/drawingml/2011/main" val="1"/>
             </a:ext>
           </a:extLst>
         </p:spPr>
@@ -5048,7 +5053,7 @@
           </a:ln>
           <a:extLst>
             <a:ext uri="{C572A759-6A51-4108-AA02-DFA0A04FC94B}">
-              <ma14:wrappingTextBoxFlag xmlns:ma14="http://schemas.microsoft.com/office/mac/drawingml/2011/main" xmlns:a14="http://schemas.microsoft.com/office/drawing/2010/main" xmlns:m="http://schemas.openxmlformats.org/officeDocument/2006/math" xmlns="" val="1"/>
+              <ma14:wrappingTextBoxFlag xmlns="" xmlns:m="http://schemas.openxmlformats.org/officeDocument/2006/math" xmlns:a14="http://schemas.microsoft.com/office/drawing/2010/main" xmlns:ma14="http://schemas.microsoft.com/office/mac/drawingml/2011/main" val="1"/>
             </a:ext>
           </a:extLst>
         </p:spPr>
@@ -5136,7 +5141,7 @@
           </a:ln>
           <a:extLst>
             <a:ext uri="{C572A759-6A51-4108-AA02-DFA0A04FC94B}">
-              <ma14:wrappingTextBoxFlag xmlns:ma14="http://schemas.microsoft.com/office/mac/drawingml/2011/main" xmlns:a14="http://schemas.microsoft.com/office/drawing/2010/main" xmlns:m="http://schemas.openxmlformats.org/officeDocument/2006/math" xmlns="" val="1"/>
+              <ma14:wrappingTextBoxFlag xmlns="" xmlns:m="http://schemas.openxmlformats.org/officeDocument/2006/math" xmlns:a14="http://schemas.microsoft.com/office/drawing/2010/main" xmlns:ma14="http://schemas.microsoft.com/office/mac/drawingml/2011/main" val="1"/>
             </a:ext>
           </a:extLst>
         </p:spPr>
@@ -5194,7 +5199,7 @@
           </a:ln>
           <a:extLst>
             <a:ext uri="{C572A759-6A51-4108-AA02-DFA0A04FC94B}">
-              <ma14:wrappingTextBoxFlag xmlns:ma14="http://schemas.microsoft.com/office/mac/drawingml/2011/main" xmlns:a14="http://schemas.microsoft.com/office/drawing/2010/main" xmlns:m="http://schemas.openxmlformats.org/officeDocument/2006/math" xmlns="" val="1"/>
+              <ma14:wrappingTextBoxFlag xmlns="" xmlns:m="http://schemas.openxmlformats.org/officeDocument/2006/math" xmlns:a14="http://schemas.microsoft.com/office/drawing/2010/main" xmlns:ma14="http://schemas.microsoft.com/office/mac/drawingml/2011/main" val="1"/>
             </a:ext>
           </a:extLst>
         </p:spPr>
@@ -5290,7 +5295,7 @@
           </a:ln>
           <a:extLst>
             <a:ext uri="{C572A759-6A51-4108-AA02-DFA0A04FC94B}">
-              <ma14:wrappingTextBoxFlag xmlns:ma14="http://schemas.microsoft.com/office/mac/drawingml/2011/main" xmlns:a14="http://schemas.microsoft.com/office/drawing/2010/main" xmlns:m="http://schemas.openxmlformats.org/officeDocument/2006/math" xmlns="" val="1"/>
+              <ma14:wrappingTextBoxFlag xmlns="" xmlns:m="http://schemas.openxmlformats.org/officeDocument/2006/math" xmlns:a14="http://schemas.microsoft.com/office/drawing/2010/main" xmlns:ma14="http://schemas.microsoft.com/office/mac/drawingml/2011/main" val="1"/>
             </a:ext>
           </a:extLst>
         </p:spPr>
@@ -5340,7 +5345,7 @@
           </a:ln>
           <a:extLst>
             <a:ext uri="{C572A759-6A51-4108-AA02-DFA0A04FC94B}">
-              <ma14:wrappingTextBoxFlag xmlns:ma14="http://schemas.microsoft.com/office/mac/drawingml/2011/main" xmlns:a14="http://schemas.microsoft.com/office/drawing/2010/main" xmlns:m="http://schemas.openxmlformats.org/officeDocument/2006/math" xmlns="" val="1"/>
+              <ma14:wrappingTextBoxFlag xmlns="" xmlns:m="http://schemas.openxmlformats.org/officeDocument/2006/math" xmlns:a14="http://schemas.microsoft.com/office/drawing/2010/main" xmlns:ma14="http://schemas.microsoft.com/office/mac/drawingml/2011/main" val="1"/>
             </a:ext>
           </a:extLst>
         </p:spPr>
@@ -5431,7 +5436,7 @@
           </a:ln>
           <a:extLst>
             <a:ext uri="{C572A759-6A51-4108-AA02-DFA0A04FC94B}">
-              <ma14:wrappingTextBoxFlag xmlns:ma14="http://schemas.microsoft.com/office/mac/drawingml/2011/main" xmlns:a14="http://schemas.microsoft.com/office/drawing/2010/main" xmlns:m="http://schemas.openxmlformats.org/officeDocument/2006/math" xmlns="" val="1"/>
+              <ma14:wrappingTextBoxFlag xmlns="" xmlns:m="http://schemas.openxmlformats.org/officeDocument/2006/math" xmlns:a14="http://schemas.microsoft.com/office/drawing/2010/main" xmlns:ma14="http://schemas.microsoft.com/office/mac/drawingml/2011/main" val="1"/>
             </a:ext>
           </a:extLst>
         </p:spPr>
@@ -5481,7 +5486,7 @@
           </a:ln>
           <a:extLst>
             <a:ext uri="{C572A759-6A51-4108-AA02-DFA0A04FC94B}">
-              <ma14:wrappingTextBoxFlag xmlns:ma14="http://schemas.microsoft.com/office/mac/drawingml/2011/main" xmlns:a14="http://schemas.microsoft.com/office/drawing/2010/main" xmlns:m="http://schemas.openxmlformats.org/officeDocument/2006/math" xmlns="" val="1"/>
+              <ma14:wrappingTextBoxFlag xmlns="" xmlns:m="http://schemas.openxmlformats.org/officeDocument/2006/math" xmlns:a14="http://schemas.microsoft.com/office/drawing/2010/main" xmlns:ma14="http://schemas.microsoft.com/office/mac/drawingml/2011/main" val="1"/>
             </a:ext>
           </a:extLst>
         </p:spPr>
@@ -5580,7 +5585,7 @@
           </a:ln>
           <a:extLst>
             <a:ext uri="{C572A759-6A51-4108-AA02-DFA0A04FC94B}">
-              <ma14:wrappingTextBoxFlag xmlns:ma14="http://schemas.microsoft.com/office/mac/drawingml/2011/main" xmlns:a14="http://schemas.microsoft.com/office/drawing/2010/main" xmlns:m="http://schemas.openxmlformats.org/officeDocument/2006/math" xmlns="" val="1"/>
+              <ma14:wrappingTextBoxFlag xmlns="" xmlns:m="http://schemas.openxmlformats.org/officeDocument/2006/math" xmlns:a14="http://schemas.microsoft.com/office/drawing/2010/main" xmlns:ma14="http://schemas.microsoft.com/office/mac/drawingml/2011/main" val="1"/>
             </a:ext>
           </a:extLst>
         </p:spPr>
@@ -5630,7 +5635,7 @@
           </a:ln>
           <a:extLst>
             <a:ext uri="{C572A759-6A51-4108-AA02-DFA0A04FC94B}">
-              <ma14:wrappingTextBoxFlag xmlns:ma14="http://schemas.microsoft.com/office/mac/drawingml/2011/main" xmlns:a14="http://schemas.microsoft.com/office/drawing/2010/main" xmlns:m="http://schemas.openxmlformats.org/officeDocument/2006/math" xmlns="" val="1"/>
+              <ma14:wrappingTextBoxFlag xmlns="" xmlns:m="http://schemas.openxmlformats.org/officeDocument/2006/math" xmlns:a14="http://schemas.microsoft.com/office/drawing/2010/main" xmlns:ma14="http://schemas.microsoft.com/office/mac/drawingml/2011/main" val="1"/>
             </a:ext>
           </a:extLst>
         </p:spPr>
@@ -5677,7 +5682,7 @@
           </a:ln>
           <a:extLst>
             <a:ext uri="{C572A759-6A51-4108-AA02-DFA0A04FC94B}">
-              <ma14:wrappingTextBoxFlag xmlns:ma14="http://schemas.microsoft.com/office/mac/drawingml/2011/main" xmlns:a14="http://schemas.microsoft.com/office/drawing/2010/main" xmlns:m="http://schemas.openxmlformats.org/officeDocument/2006/math" xmlns="" val="1"/>
+              <ma14:wrappingTextBoxFlag xmlns="" xmlns:m="http://schemas.openxmlformats.org/officeDocument/2006/math" xmlns:a14="http://schemas.microsoft.com/office/drawing/2010/main" xmlns:ma14="http://schemas.microsoft.com/office/mac/drawingml/2011/main" val="1"/>
             </a:ext>
           </a:extLst>
         </p:spPr>
@@ -5724,7 +5729,7 @@
           </a:ln>
           <a:extLst>
             <a:ext uri="{C572A759-6A51-4108-AA02-DFA0A04FC94B}">
-              <ma14:wrappingTextBoxFlag xmlns:ma14="http://schemas.microsoft.com/office/mac/drawingml/2011/main" xmlns:a14="http://schemas.microsoft.com/office/drawing/2010/main" xmlns:m="http://schemas.openxmlformats.org/officeDocument/2006/math" xmlns="" val="1"/>
+              <ma14:wrappingTextBoxFlag xmlns="" xmlns:m="http://schemas.openxmlformats.org/officeDocument/2006/math" xmlns:a14="http://schemas.microsoft.com/office/drawing/2010/main" xmlns:ma14="http://schemas.microsoft.com/office/mac/drawingml/2011/main" val="1"/>
             </a:ext>
           </a:extLst>
         </p:spPr>
@@ -5903,7 +5908,7 @@
           </a:ln>
           <a:extLst>
             <a:ext uri="{C572A759-6A51-4108-AA02-DFA0A04FC94B}">
-              <ma14:wrappingTextBoxFlag xmlns:ma14="http://schemas.microsoft.com/office/mac/drawingml/2011/main" xmlns:a14="http://schemas.microsoft.com/office/drawing/2010/main" xmlns:m="http://schemas.openxmlformats.org/officeDocument/2006/math" xmlns="" val="1"/>
+              <ma14:wrappingTextBoxFlag xmlns="" xmlns:m="http://schemas.openxmlformats.org/officeDocument/2006/math" xmlns:a14="http://schemas.microsoft.com/office/drawing/2010/main" xmlns:ma14="http://schemas.microsoft.com/office/mac/drawingml/2011/main" val="1"/>
             </a:ext>
           </a:extLst>
         </p:spPr>
@@ -5950,7 +5955,7 @@
           </a:ln>
           <a:extLst>
             <a:ext uri="{C572A759-6A51-4108-AA02-DFA0A04FC94B}">
-              <ma14:wrappingTextBoxFlag xmlns:ma14="http://schemas.microsoft.com/office/mac/drawingml/2011/main" xmlns:a14="http://schemas.microsoft.com/office/drawing/2010/main" xmlns:m="http://schemas.openxmlformats.org/officeDocument/2006/math" xmlns="" val="1"/>
+              <ma14:wrappingTextBoxFlag xmlns="" xmlns:m="http://schemas.openxmlformats.org/officeDocument/2006/math" xmlns:a14="http://schemas.microsoft.com/office/drawing/2010/main" xmlns:ma14="http://schemas.microsoft.com/office/mac/drawingml/2011/main" val="1"/>
             </a:ext>
           </a:extLst>
         </p:spPr>
@@ -5997,7 +6002,7 @@
           </a:ln>
           <a:extLst>
             <a:ext uri="{C572A759-6A51-4108-AA02-DFA0A04FC94B}">
-              <ma14:wrappingTextBoxFlag xmlns:ma14="http://schemas.microsoft.com/office/mac/drawingml/2011/main" xmlns:a14="http://schemas.microsoft.com/office/drawing/2010/main" xmlns:m="http://schemas.openxmlformats.org/officeDocument/2006/math" xmlns="" val="1"/>
+              <ma14:wrappingTextBoxFlag xmlns="" xmlns:m="http://schemas.openxmlformats.org/officeDocument/2006/math" xmlns:a14="http://schemas.microsoft.com/office/drawing/2010/main" xmlns:ma14="http://schemas.microsoft.com/office/mac/drawingml/2011/main" val="1"/>
             </a:ext>
           </a:extLst>
         </p:spPr>
@@ -6132,7 +6137,7 @@
           </a:ln>
           <a:extLst>
             <a:ext uri="{C572A759-6A51-4108-AA02-DFA0A04FC94B}">
-              <ma14:wrappingTextBoxFlag xmlns:ma14="http://schemas.microsoft.com/office/mac/drawingml/2011/main" xmlns:a14="http://schemas.microsoft.com/office/drawing/2010/main" xmlns:m="http://schemas.openxmlformats.org/officeDocument/2006/math" xmlns="" val="1"/>
+              <ma14:wrappingTextBoxFlag xmlns="" xmlns:m="http://schemas.openxmlformats.org/officeDocument/2006/math" xmlns:a14="http://schemas.microsoft.com/office/drawing/2010/main" xmlns:ma14="http://schemas.microsoft.com/office/mac/drawingml/2011/main" val="1"/>
             </a:ext>
           </a:extLst>
         </p:spPr>
@@ -6187,7 +6192,7 @@
           </a:ln>
           <a:extLst>
             <a:ext uri="{C572A759-6A51-4108-AA02-DFA0A04FC94B}">
-              <ma14:wrappingTextBoxFlag xmlns:ma14="http://schemas.microsoft.com/office/mac/drawingml/2011/main" xmlns:a14="http://schemas.microsoft.com/office/drawing/2010/main" xmlns:m="http://schemas.openxmlformats.org/officeDocument/2006/math" xmlns="" val="1"/>
+              <ma14:wrappingTextBoxFlag xmlns="" xmlns:m="http://schemas.openxmlformats.org/officeDocument/2006/math" xmlns:a14="http://schemas.microsoft.com/office/drawing/2010/main" xmlns:ma14="http://schemas.microsoft.com/office/mac/drawingml/2011/main" val="1"/>
             </a:ext>
           </a:extLst>
         </p:spPr>
@@ -6275,7 +6280,7 @@
           </a:ln>
           <a:extLst>
             <a:ext uri="{C572A759-6A51-4108-AA02-DFA0A04FC94B}">
-              <ma14:wrappingTextBoxFlag xmlns:ma14="http://schemas.microsoft.com/office/mac/drawingml/2011/main" xmlns:a14="http://schemas.microsoft.com/office/drawing/2010/main" xmlns:m="http://schemas.openxmlformats.org/officeDocument/2006/math" xmlns="" val="1"/>
+              <ma14:wrappingTextBoxFlag xmlns="" xmlns:m="http://schemas.openxmlformats.org/officeDocument/2006/math" xmlns:a14="http://schemas.microsoft.com/office/drawing/2010/main" xmlns:ma14="http://schemas.microsoft.com/office/mac/drawingml/2011/main" val="1"/>
             </a:ext>
           </a:extLst>
         </p:spPr>
@@ -6322,7 +6327,7 @@
           </a:ln>
           <a:extLst>
             <a:ext uri="{C572A759-6A51-4108-AA02-DFA0A04FC94B}">
-              <ma14:wrappingTextBoxFlag xmlns:ma14="http://schemas.microsoft.com/office/mac/drawingml/2011/main" xmlns:a14="http://schemas.microsoft.com/office/drawing/2010/main" xmlns:m="http://schemas.openxmlformats.org/officeDocument/2006/math" xmlns="" val="1"/>
+              <ma14:wrappingTextBoxFlag xmlns="" xmlns:m="http://schemas.openxmlformats.org/officeDocument/2006/math" xmlns:a14="http://schemas.microsoft.com/office/drawing/2010/main" xmlns:ma14="http://schemas.microsoft.com/office/mac/drawingml/2011/main" val="1"/>
             </a:ext>
           </a:extLst>
         </p:spPr>
@@ -6430,7 +6435,7 @@
           </a:ln>
           <a:extLst>
             <a:ext uri="{C572A759-6A51-4108-AA02-DFA0A04FC94B}">
-              <ma14:wrappingTextBoxFlag xmlns:ma14="http://schemas.microsoft.com/office/mac/drawingml/2011/main" xmlns:a14="http://schemas.microsoft.com/office/drawing/2010/main" xmlns:m="http://schemas.openxmlformats.org/officeDocument/2006/math" xmlns="" val="1"/>
+              <ma14:wrappingTextBoxFlag xmlns="" xmlns:m="http://schemas.openxmlformats.org/officeDocument/2006/math" xmlns:a14="http://schemas.microsoft.com/office/drawing/2010/main" xmlns:ma14="http://schemas.microsoft.com/office/mac/drawingml/2011/main" val="1"/>
             </a:ext>
           </a:extLst>
         </p:spPr>
@@ -6480,7 +6485,7 @@
           </a:ln>
           <a:extLst>
             <a:ext uri="{C572A759-6A51-4108-AA02-DFA0A04FC94B}">
-              <ma14:wrappingTextBoxFlag xmlns:ma14="http://schemas.microsoft.com/office/mac/drawingml/2011/main" xmlns:a14="http://schemas.microsoft.com/office/drawing/2010/main" xmlns:m="http://schemas.openxmlformats.org/officeDocument/2006/math" xmlns="" val="1"/>
+              <ma14:wrappingTextBoxFlag xmlns="" xmlns:m="http://schemas.openxmlformats.org/officeDocument/2006/math" xmlns:a14="http://schemas.microsoft.com/office/drawing/2010/main" xmlns:ma14="http://schemas.microsoft.com/office/mac/drawingml/2011/main" val="1"/>
             </a:ext>
           </a:extLst>
         </p:spPr>
@@ -6571,7 +6576,7 @@
           </a:ln>
           <a:extLst>
             <a:ext uri="{C572A759-6A51-4108-AA02-DFA0A04FC94B}">
-              <ma14:wrappingTextBoxFlag xmlns:ma14="http://schemas.microsoft.com/office/mac/drawingml/2011/main" xmlns:a14="http://schemas.microsoft.com/office/drawing/2010/main" xmlns:m="http://schemas.openxmlformats.org/officeDocument/2006/math" xmlns="" val="1"/>
+              <ma14:wrappingTextBoxFlag xmlns="" xmlns:m="http://schemas.openxmlformats.org/officeDocument/2006/math" xmlns:a14="http://schemas.microsoft.com/office/drawing/2010/main" xmlns:ma14="http://schemas.microsoft.com/office/mac/drawingml/2011/main" val="1"/>
             </a:ext>
           </a:extLst>
         </p:spPr>
@@ -6621,7 +6626,7 @@
           </a:ln>
           <a:extLst>
             <a:ext uri="{C572A759-6A51-4108-AA02-DFA0A04FC94B}">
-              <ma14:wrappingTextBoxFlag xmlns:ma14="http://schemas.microsoft.com/office/mac/drawingml/2011/main" xmlns:a14="http://schemas.microsoft.com/office/drawing/2010/main" xmlns:m="http://schemas.openxmlformats.org/officeDocument/2006/math" xmlns="" val="1"/>
+              <ma14:wrappingTextBoxFlag xmlns="" xmlns:m="http://schemas.openxmlformats.org/officeDocument/2006/math" xmlns:a14="http://schemas.microsoft.com/office/drawing/2010/main" xmlns:ma14="http://schemas.microsoft.com/office/mac/drawingml/2011/main" val="1"/>
             </a:ext>
           </a:extLst>
         </p:spPr>
@@ -6733,7 +6738,7 @@
           </a:ln>
           <a:extLst>
             <a:ext uri="{C572A759-6A51-4108-AA02-DFA0A04FC94B}">
-              <ma14:wrappingTextBoxFlag xmlns:ma14="http://schemas.microsoft.com/office/mac/drawingml/2011/main" xmlns:a14="http://schemas.microsoft.com/office/drawing/2010/main" xmlns:m="http://schemas.openxmlformats.org/officeDocument/2006/math" xmlns="" val="1"/>
+              <ma14:wrappingTextBoxFlag xmlns="" xmlns:m="http://schemas.openxmlformats.org/officeDocument/2006/math" xmlns:a14="http://schemas.microsoft.com/office/drawing/2010/main" xmlns:ma14="http://schemas.microsoft.com/office/mac/drawingml/2011/main" val="1"/>
             </a:ext>
           </a:extLst>
         </p:spPr>
@@ -6783,7 +6788,7 @@
           </a:ln>
           <a:extLst>
             <a:ext uri="{C572A759-6A51-4108-AA02-DFA0A04FC94B}">
-              <ma14:wrappingTextBoxFlag xmlns:ma14="http://schemas.microsoft.com/office/mac/drawingml/2011/main" xmlns:a14="http://schemas.microsoft.com/office/drawing/2010/main" xmlns:m="http://schemas.openxmlformats.org/officeDocument/2006/math" xmlns="" val="1"/>
+              <ma14:wrappingTextBoxFlag xmlns="" xmlns:m="http://schemas.openxmlformats.org/officeDocument/2006/math" xmlns:a14="http://schemas.microsoft.com/office/drawing/2010/main" xmlns:ma14="http://schemas.microsoft.com/office/mac/drawingml/2011/main" val="1"/>
             </a:ext>
           </a:extLst>
         </p:spPr>
@@ -6833,7 +6838,7 @@
           </a:ln>
           <a:extLst>
             <a:ext uri="{C572A759-6A51-4108-AA02-DFA0A04FC94B}">
-              <ma14:wrappingTextBoxFlag xmlns:ma14="http://schemas.microsoft.com/office/mac/drawingml/2011/main" xmlns:a14="http://schemas.microsoft.com/office/drawing/2010/main" xmlns:m="http://schemas.openxmlformats.org/officeDocument/2006/math" xmlns="" val="1"/>
+              <ma14:wrappingTextBoxFlag xmlns="" xmlns:m="http://schemas.openxmlformats.org/officeDocument/2006/math" xmlns:a14="http://schemas.microsoft.com/office/drawing/2010/main" xmlns:ma14="http://schemas.microsoft.com/office/mac/drawingml/2011/main" val="1"/>
             </a:ext>
           </a:extLst>
         </p:spPr>
@@ -6880,7 +6885,7 @@
           </a:ln>
           <a:extLst>
             <a:ext uri="{C572A759-6A51-4108-AA02-DFA0A04FC94B}">
-              <ma14:wrappingTextBoxFlag xmlns:ma14="http://schemas.microsoft.com/office/mac/drawingml/2011/main" xmlns:a14="http://schemas.microsoft.com/office/drawing/2010/main" xmlns:m="http://schemas.openxmlformats.org/officeDocument/2006/math" xmlns="" val="1"/>
+              <ma14:wrappingTextBoxFlag xmlns="" xmlns:m="http://schemas.openxmlformats.org/officeDocument/2006/math" xmlns:a14="http://schemas.microsoft.com/office/drawing/2010/main" xmlns:ma14="http://schemas.microsoft.com/office/mac/drawingml/2011/main" val="1"/>
             </a:ext>
           </a:extLst>
         </p:spPr>
@@ -7056,7 +7061,7 @@
           </a:ln>
           <a:extLst>
             <a:ext uri="{C572A759-6A51-4108-AA02-DFA0A04FC94B}">
-              <ma14:wrappingTextBoxFlag xmlns:ma14="http://schemas.microsoft.com/office/mac/drawingml/2011/main" xmlns:a14="http://schemas.microsoft.com/office/drawing/2010/main" xmlns:m="http://schemas.openxmlformats.org/officeDocument/2006/math" xmlns="" val="1"/>
+              <ma14:wrappingTextBoxFlag xmlns="" xmlns:m="http://schemas.openxmlformats.org/officeDocument/2006/math" xmlns:a14="http://schemas.microsoft.com/office/drawing/2010/main" xmlns:ma14="http://schemas.microsoft.com/office/mac/drawingml/2011/main" val="1"/>
             </a:ext>
           </a:extLst>
         </p:spPr>
@@ -7103,7 +7108,7 @@
           </a:ln>
           <a:extLst>
             <a:ext uri="{C572A759-6A51-4108-AA02-DFA0A04FC94B}">
-              <ma14:wrappingTextBoxFlag xmlns:ma14="http://schemas.microsoft.com/office/mac/drawingml/2011/main" xmlns:a14="http://schemas.microsoft.com/office/drawing/2010/main" xmlns:m="http://schemas.openxmlformats.org/officeDocument/2006/math" xmlns="" val="1"/>
+              <ma14:wrappingTextBoxFlag xmlns="" xmlns:m="http://schemas.openxmlformats.org/officeDocument/2006/math" xmlns:a14="http://schemas.microsoft.com/office/drawing/2010/main" xmlns:ma14="http://schemas.microsoft.com/office/mac/drawingml/2011/main" val="1"/>
             </a:ext>
           </a:extLst>
         </p:spPr>
@@ -7150,7 +7155,7 @@
           </a:ln>
           <a:extLst>
             <a:ext uri="{C572A759-6A51-4108-AA02-DFA0A04FC94B}">
-              <ma14:wrappingTextBoxFlag xmlns:ma14="http://schemas.microsoft.com/office/mac/drawingml/2011/main" xmlns:a14="http://schemas.microsoft.com/office/drawing/2010/main" xmlns:m="http://schemas.openxmlformats.org/officeDocument/2006/math" xmlns="" val="1"/>
+              <ma14:wrappingTextBoxFlag xmlns="" xmlns:m="http://schemas.openxmlformats.org/officeDocument/2006/math" xmlns:a14="http://schemas.microsoft.com/office/drawing/2010/main" xmlns:ma14="http://schemas.microsoft.com/office/mac/drawingml/2011/main" val="1"/>
             </a:ext>
           </a:extLst>
         </p:spPr>
@@ -7285,7 +7290,7 @@
           </a:ln>
           <a:extLst>
             <a:ext uri="{C572A759-6A51-4108-AA02-DFA0A04FC94B}">
-              <ma14:wrappingTextBoxFlag xmlns:ma14="http://schemas.microsoft.com/office/mac/drawingml/2011/main" xmlns:a14="http://schemas.microsoft.com/office/drawing/2010/main" xmlns:m="http://schemas.openxmlformats.org/officeDocument/2006/math" xmlns="" val="1"/>
+              <ma14:wrappingTextBoxFlag xmlns="" xmlns:m="http://schemas.openxmlformats.org/officeDocument/2006/math" xmlns:a14="http://schemas.microsoft.com/office/drawing/2010/main" xmlns:ma14="http://schemas.microsoft.com/office/mac/drawingml/2011/main" val="1"/>
             </a:ext>
           </a:extLst>
         </p:spPr>
@@ -7340,7 +7345,7 @@
           </a:ln>
           <a:extLst>
             <a:ext uri="{C572A759-6A51-4108-AA02-DFA0A04FC94B}">
-              <ma14:wrappingTextBoxFlag xmlns:ma14="http://schemas.microsoft.com/office/mac/drawingml/2011/main" xmlns:a14="http://schemas.microsoft.com/office/drawing/2010/main" xmlns:m="http://schemas.openxmlformats.org/officeDocument/2006/math" xmlns="" val="1"/>
+              <ma14:wrappingTextBoxFlag xmlns="" xmlns:m="http://schemas.openxmlformats.org/officeDocument/2006/math" xmlns:a14="http://schemas.microsoft.com/office/drawing/2010/main" xmlns:ma14="http://schemas.microsoft.com/office/mac/drawingml/2011/main" val="1"/>
             </a:ext>
           </a:extLst>
         </p:spPr>
@@ -7428,7 +7433,7 @@
           </a:ln>
           <a:extLst>
             <a:ext uri="{C572A759-6A51-4108-AA02-DFA0A04FC94B}">
-              <ma14:wrappingTextBoxFlag xmlns:ma14="http://schemas.microsoft.com/office/mac/drawingml/2011/main" xmlns:a14="http://schemas.microsoft.com/office/drawing/2010/main" xmlns:m="http://schemas.openxmlformats.org/officeDocument/2006/math" xmlns="" val="1"/>
+              <ma14:wrappingTextBoxFlag xmlns="" xmlns:m="http://schemas.openxmlformats.org/officeDocument/2006/math" xmlns:a14="http://schemas.microsoft.com/office/drawing/2010/main" xmlns:ma14="http://schemas.microsoft.com/office/mac/drawingml/2011/main" val="1"/>
             </a:ext>
           </a:extLst>
         </p:spPr>
@@ -7475,7 +7480,7 @@
           </a:ln>
           <a:extLst>
             <a:ext uri="{C572A759-6A51-4108-AA02-DFA0A04FC94B}">
-              <ma14:wrappingTextBoxFlag xmlns:ma14="http://schemas.microsoft.com/office/mac/drawingml/2011/main" xmlns:a14="http://schemas.microsoft.com/office/drawing/2010/main" xmlns:m="http://schemas.openxmlformats.org/officeDocument/2006/math" xmlns="" val="1"/>
+              <ma14:wrappingTextBoxFlag xmlns="" xmlns:m="http://schemas.openxmlformats.org/officeDocument/2006/math" xmlns:a14="http://schemas.microsoft.com/office/drawing/2010/main" xmlns:ma14="http://schemas.microsoft.com/office/mac/drawingml/2011/main" val="1"/>
             </a:ext>
           </a:extLst>
         </p:spPr>
@@ -7522,7 +7527,7 @@
           </a:ln>
           <a:extLst>
             <a:ext uri="{C572A759-6A51-4108-AA02-DFA0A04FC94B}">
-              <ma14:wrappingTextBoxFlag xmlns:ma14="http://schemas.microsoft.com/office/mac/drawingml/2011/main" xmlns:a14="http://schemas.microsoft.com/office/drawing/2010/main" xmlns:m="http://schemas.openxmlformats.org/officeDocument/2006/math" xmlns="" val="1"/>
+              <ma14:wrappingTextBoxFlag xmlns="" xmlns:m="http://schemas.openxmlformats.org/officeDocument/2006/math" xmlns:a14="http://schemas.microsoft.com/office/drawing/2010/main" xmlns:ma14="http://schemas.microsoft.com/office/mac/drawingml/2011/main" val="1"/>
             </a:ext>
           </a:extLst>
         </p:spPr>
@@ -7618,7 +7623,7 @@
           </a:ln>
           <a:extLst>
             <a:ext uri="{C572A759-6A51-4108-AA02-DFA0A04FC94B}">
-              <ma14:wrappingTextBoxFlag xmlns:ma14="http://schemas.microsoft.com/office/mac/drawingml/2011/main" xmlns:a14="http://schemas.microsoft.com/office/drawing/2010/main" xmlns:m="http://schemas.openxmlformats.org/officeDocument/2006/math" xmlns="" val="1"/>
+              <ma14:wrappingTextBoxFlag xmlns="" xmlns:m="http://schemas.openxmlformats.org/officeDocument/2006/math" xmlns:a14="http://schemas.microsoft.com/office/drawing/2010/main" xmlns:ma14="http://schemas.microsoft.com/office/mac/drawingml/2011/main" val="1"/>
             </a:ext>
           </a:extLst>
         </p:spPr>
@@ -7665,7 +7670,7 @@
           </a:ln>
           <a:extLst>
             <a:ext uri="{C572A759-6A51-4108-AA02-DFA0A04FC94B}">
-              <ma14:wrappingTextBoxFlag xmlns:ma14="http://schemas.microsoft.com/office/mac/drawingml/2011/main" xmlns:a14="http://schemas.microsoft.com/office/drawing/2010/main" xmlns:m="http://schemas.openxmlformats.org/officeDocument/2006/math" xmlns="" val="1"/>
+              <ma14:wrappingTextBoxFlag xmlns="" xmlns:m="http://schemas.openxmlformats.org/officeDocument/2006/math" xmlns:a14="http://schemas.microsoft.com/office/drawing/2010/main" xmlns:ma14="http://schemas.microsoft.com/office/mac/drawingml/2011/main" val="1"/>
             </a:ext>
           </a:extLst>
         </p:spPr>
@@ -7776,7 +7781,7 @@
           </a:ln>
           <a:extLst>
             <a:ext uri="{C572A759-6A51-4108-AA02-DFA0A04FC94B}">
-              <ma14:wrappingTextBoxFlag xmlns:ma14="http://schemas.microsoft.com/office/mac/drawingml/2011/main" xmlns:a14="http://schemas.microsoft.com/office/drawing/2010/main" xmlns:m="http://schemas.openxmlformats.org/officeDocument/2006/math" xmlns="" val="1"/>
+              <ma14:wrappingTextBoxFlag xmlns="" xmlns:m="http://schemas.openxmlformats.org/officeDocument/2006/math" xmlns:a14="http://schemas.microsoft.com/office/drawing/2010/main" xmlns:ma14="http://schemas.microsoft.com/office/mac/drawingml/2011/main" val="1"/>
             </a:ext>
           </a:extLst>
         </p:spPr>
@@ -7823,7 +7828,7 @@
           </a:ln>
           <a:extLst>
             <a:ext uri="{C572A759-6A51-4108-AA02-DFA0A04FC94B}">
-              <ma14:wrappingTextBoxFlag xmlns:ma14="http://schemas.microsoft.com/office/mac/drawingml/2011/main" xmlns:a14="http://schemas.microsoft.com/office/drawing/2010/main" xmlns:m="http://schemas.openxmlformats.org/officeDocument/2006/math" xmlns="" val="1"/>
+              <ma14:wrappingTextBoxFlag xmlns="" xmlns:m="http://schemas.openxmlformats.org/officeDocument/2006/math" xmlns:a14="http://schemas.microsoft.com/office/drawing/2010/main" xmlns:ma14="http://schemas.microsoft.com/office/mac/drawingml/2011/main" val="1"/>
             </a:ext>
           </a:extLst>
         </p:spPr>
@@ -7922,7 +7927,7 @@
           </a:ln>
           <a:extLst>
             <a:ext uri="{C572A759-6A51-4108-AA02-DFA0A04FC94B}">
-              <ma14:wrappingTextBoxFlag xmlns:ma14="http://schemas.microsoft.com/office/mac/drawingml/2011/main" xmlns:a14="http://schemas.microsoft.com/office/drawing/2010/main" xmlns:m="http://schemas.openxmlformats.org/officeDocument/2006/math" xmlns="" val="1"/>
+              <ma14:wrappingTextBoxFlag xmlns="" xmlns:m="http://schemas.openxmlformats.org/officeDocument/2006/math" xmlns:a14="http://schemas.microsoft.com/office/drawing/2010/main" xmlns:ma14="http://schemas.microsoft.com/office/mac/drawingml/2011/main" val="1"/>
             </a:ext>
           </a:extLst>
         </p:spPr>
@@ -7969,7 +7974,7 @@
           </a:ln>
           <a:extLst>
             <a:ext uri="{C572A759-6A51-4108-AA02-DFA0A04FC94B}">
-              <ma14:wrappingTextBoxFlag xmlns:ma14="http://schemas.microsoft.com/office/mac/drawingml/2011/main" xmlns:a14="http://schemas.microsoft.com/office/drawing/2010/main" xmlns:m="http://schemas.openxmlformats.org/officeDocument/2006/math" xmlns="" val="1"/>
+              <ma14:wrappingTextBoxFlag xmlns="" xmlns:m="http://schemas.openxmlformats.org/officeDocument/2006/math" xmlns:a14="http://schemas.microsoft.com/office/drawing/2010/main" xmlns:ma14="http://schemas.microsoft.com/office/mac/drawingml/2011/main" val="1"/>
             </a:ext>
           </a:extLst>
         </p:spPr>
@@ -8092,7 +8097,7 @@
           </a:ln>
           <a:extLst>
             <a:ext uri="{C572A759-6A51-4108-AA02-DFA0A04FC94B}">
-              <ma14:wrappingTextBoxFlag xmlns:ma14="http://schemas.microsoft.com/office/mac/drawingml/2011/main" xmlns:a14="http://schemas.microsoft.com/office/drawing/2010/main" xmlns:m="http://schemas.openxmlformats.org/officeDocument/2006/math" xmlns="" val="1"/>
+              <ma14:wrappingTextBoxFlag xmlns="" xmlns:m="http://schemas.openxmlformats.org/officeDocument/2006/math" xmlns:a14="http://schemas.microsoft.com/office/drawing/2010/main" xmlns:ma14="http://schemas.microsoft.com/office/mac/drawingml/2011/main" val="1"/>
             </a:ext>
           </a:extLst>
         </p:spPr>
@@ -8139,7 +8144,7 @@
           </a:ln>
           <a:extLst>
             <a:ext uri="{C572A759-6A51-4108-AA02-DFA0A04FC94B}">
-              <ma14:wrappingTextBoxFlag xmlns:ma14="http://schemas.microsoft.com/office/mac/drawingml/2011/main" xmlns:a14="http://schemas.microsoft.com/office/drawing/2010/main" xmlns:m="http://schemas.openxmlformats.org/officeDocument/2006/math" xmlns="" val="1"/>
+              <ma14:wrappingTextBoxFlag xmlns="" xmlns:m="http://schemas.openxmlformats.org/officeDocument/2006/math" xmlns:a14="http://schemas.microsoft.com/office/drawing/2010/main" xmlns:ma14="http://schemas.microsoft.com/office/mac/drawingml/2011/main" val="1"/>
             </a:ext>
           </a:extLst>
         </p:spPr>
@@ -8227,7 +8232,7 @@
           </a:ln>
           <a:extLst>
             <a:ext uri="{C572A759-6A51-4108-AA02-DFA0A04FC94B}">
-              <ma14:wrappingTextBoxFlag xmlns:ma14="http://schemas.microsoft.com/office/mac/drawingml/2011/main" xmlns:a14="http://schemas.microsoft.com/office/drawing/2010/main" xmlns:m="http://schemas.openxmlformats.org/officeDocument/2006/math" xmlns="" val="1"/>
+              <ma14:wrappingTextBoxFlag xmlns="" xmlns:m="http://schemas.openxmlformats.org/officeDocument/2006/math" xmlns:a14="http://schemas.microsoft.com/office/drawing/2010/main" xmlns:ma14="http://schemas.microsoft.com/office/mac/drawingml/2011/main" val="1"/>
             </a:ext>
           </a:extLst>
         </p:spPr>
@@ -8274,7 +8279,7 @@
           </a:ln>
           <a:extLst>
             <a:ext uri="{C572A759-6A51-4108-AA02-DFA0A04FC94B}">
-              <ma14:wrappingTextBoxFlag xmlns:ma14="http://schemas.microsoft.com/office/mac/drawingml/2011/main" xmlns:a14="http://schemas.microsoft.com/office/drawing/2010/main" xmlns:m="http://schemas.openxmlformats.org/officeDocument/2006/math" xmlns="" val="1"/>
+              <ma14:wrappingTextBoxFlag xmlns="" xmlns:m="http://schemas.openxmlformats.org/officeDocument/2006/math" xmlns:a14="http://schemas.microsoft.com/office/drawing/2010/main" xmlns:ma14="http://schemas.microsoft.com/office/mac/drawingml/2011/main" val="1"/>
             </a:ext>
           </a:extLst>
         </p:spPr>
@@ -8373,7 +8378,7 @@
           </a:ln>
           <a:extLst>
             <a:ext uri="{C572A759-6A51-4108-AA02-DFA0A04FC94B}">
-              <ma14:wrappingTextBoxFlag xmlns:ma14="http://schemas.microsoft.com/office/mac/drawingml/2011/main" xmlns:a14="http://schemas.microsoft.com/office/drawing/2010/main" xmlns:m="http://schemas.openxmlformats.org/officeDocument/2006/math" xmlns="" val="1"/>
+              <ma14:wrappingTextBoxFlag xmlns="" xmlns:m="http://schemas.openxmlformats.org/officeDocument/2006/math" xmlns:a14="http://schemas.microsoft.com/office/drawing/2010/main" xmlns:ma14="http://schemas.microsoft.com/office/mac/drawingml/2011/main" val="1"/>
             </a:ext>
           </a:extLst>
         </p:spPr>
@@ -8420,7 +8425,7 @@
           </a:ln>
           <a:extLst>
             <a:ext uri="{C572A759-6A51-4108-AA02-DFA0A04FC94B}">
-              <ma14:wrappingTextBoxFlag xmlns:ma14="http://schemas.microsoft.com/office/mac/drawingml/2011/main" xmlns:a14="http://schemas.microsoft.com/office/drawing/2010/main" xmlns:m="http://schemas.openxmlformats.org/officeDocument/2006/math" xmlns="" val="1"/>
+              <ma14:wrappingTextBoxFlag xmlns="" xmlns:m="http://schemas.openxmlformats.org/officeDocument/2006/math" xmlns:a14="http://schemas.microsoft.com/office/drawing/2010/main" xmlns:ma14="http://schemas.microsoft.com/office/mac/drawingml/2011/main" val="1"/>
             </a:ext>
           </a:extLst>
         </p:spPr>
@@ -8508,7 +8513,7 @@
           </a:ln>
           <a:extLst>
             <a:ext uri="{C572A759-6A51-4108-AA02-DFA0A04FC94B}">
-              <ma14:wrappingTextBoxFlag xmlns:ma14="http://schemas.microsoft.com/office/mac/drawingml/2011/main" xmlns:a14="http://schemas.microsoft.com/office/drawing/2010/main" xmlns:m="http://schemas.openxmlformats.org/officeDocument/2006/math" xmlns="" val="1"/>
+              <ma14:wrappingTextBoxFlag xmlns="" xmlns:m="http://schemas.openxmlformats.org/officeDocument/2006/math" xmlns:a14="http://schemas.microsoft.com/office/drawing/2010/main" xmlns:ma14="http://schemas.microsoft.com/office/mac/drawingml/2011/main" val="1"/>
             </a:ext>
           </a:extLst>
         </p:spPr>
@@ -8555,7 +8560,7 @@
           </a:ln>
           <a:extLst>
             <a:ext uri="{C572A759-6A51-4108-AA02-DFA0A04FC94B}">
-              <ma14:wrappingTextBoxFlag xmlns:ma14="http://schemas.microsoft.com/office/mac/drawingml/2011/main" xmlns:a14="http://schemas.microsoft.com/office/drawing/2010/main" xmlns:m="http://schemas.openxmlformats.org/officeDocument/2006/math" xmlns="" val="1"/>
+              <ma14:wrappingTextBoxFlag xmlns="" xmlns:m="http://schemas.openxmlformats.org/officeDocument/2006/math" xmlns:a14="http://schemas.microsoft.com/office/drawing/2010/main" xmlns:ma14="http://schemas.microsoft.com/office/mac/drawingml/2011/main" val="1"/>
             </a:ext>
           </a:extLst>
         </p:spPr>
@@ -8654,7 +8659,7 @@
           </a:ln>
           <a:extLst>
             <a:ext uri="{C572A759-6A51-4108-AA02-DFA0A04FC94B}">
-              <ma14:wrappingTextBoxFlag xmlns:ma14="http://schemas.microsoft.com/office/mac/drawingml/2011/main" xmlns:a14="http://schemas.microsoft.com/office/drawing/2010/main" xmlns:m="http://schemas.openxmlformats.org/officeDocument/2006/math" xmlns="" val="1"/>
+              <ma14:wrappingTextBoxFlag xmlns="" xmlns:m="http://schemas.openxmlformats.org/officeDocument/2006/math" xmlns:a14="http://schemas.microsoft.com/office/drawing/2010/main" xmlns:ma14="http://schemas.microsoft.com/office/mac/drawingml/2011/main" val="1"/>
             </a:ext>
           </a:extLst>
         </p:spPr>
@@ -8701,7 +8706,7 @@
           </a:ln>
           <a:extLst>
             <a:ext uri="{C572A759-6A51-4108-AA02-DFA0A04FC94B}">
-              <ma14:wrappingTextBoxFlag xmlns:ma14="http://schemas.microsoft.com/office/mac/drawingml/2011/main" xmlns:a14="http://schemas.microsoft.com/office/drawing/2010/main" xmlns:m="http://schemas.openxmlformats.org/officeDocument/2006/math" xmlns="" val="1"/>
+              <ma14:wrappingTextBoxFlag xmlns="" xmlns:m="http://schemas.openxmlformats.org/officeDocument/2006/math" xmlns:a14="http://schemas.microsoft.com/office/drawing/2010/main" xmlns:ma14="http://schemas.microsoft.com/office/mac/drawingml/2011/main" val="1"/>
             </a:ext>
           </a:extLst>
         </p:spPr>
@@ -8826,7 +8831,7 @@
           </a:ln>
           <a:extLst>
             <a:ext uri="{C572A759-6A51-4108-AA02-DFA0A04FC94B}">
-              <ma14:wrappingTextBoxFlag xmlns:ma14="http://schemas.microsoft.com/office/mac/drawingml/2011/main" xmlns:a14="http://schemas.microsoft.com/office/drawing/2010/main" xmlns:m="http://schemas.openxmlformats.org/officeDocument/2006/math" xmlns="" val="1"/>
+              <ma14:wrappingTextBoxFlag xmlns="" xmlns:m="http://schemas.openxmlformats.org/officeDocument/2006/math" xmlns:a14="http://schemas.microsoft.com/office/drawing/2010/main" xmlns:ma14="http://schemas.microsoft.com/office/mac/drawingml/2011/main" val="1"/>
             </a:ext>
           </a:extLst>
         </p:spPr>
@@ -8873,7 +8878,7 @@
           </a:ln>
           <a:extLst>
             <a:ext uri="{C572A759-6A51-4108-AA02-DFA0A04FC94B}">
-              <ma14:wrappingTextBoxFlag xmlns:ma14="http://schemas.microsoft.com/office/mac/drawingml/2011/main" xmlns:a14="http://schemas.microsoft.com/office/drawing/2010/main" xmlns:m="http://schemas.openxmlformats.org/officeDocument/2006/math" xmlns="" val="1"/>
+              <ma14:wrappingTextBoxFlag xmlns="" xmlns:m="http://schemas.openxmlformats.org/officeDocument/2006/math" xmlns:a14="http://schemas.microsoft.com/office/drawing/2010/main" xmlns:ma14="http://schemas.microsoft.com/office/mac/drawingml/2011/main" val="1"/>
             </a:ext>
           </a:extLst>
         </p:spPr>
@@ -8920,7 +8925,7 @@
           </a:ln>
           <a:extLst>
             <a:ext uri="{C572A759-6A51-4108-AA02-DFA0A04FC94B}">
-              <ma14:wrappingTextBoxFlag xmlns:ma14="http://schemas.microsoft.com/office/mac/drawingml/2011/main" xmlns:a14="http://schemas.microsoft.com/office/drawing/2010/main" xmlns:m="http://schemas.openxmlformats.org/officeDocument/2006/math" xmlns="" val="1"/>
+              <ma14:wrappingTextBoxFlag xmlns="" xmlns:m="http://schemas.openxmlformats.org/officeDocument/2006/math" xmlns:a14="http://schemas.microsoft.com/office/drawing/2010/main" xmlns:ma14="http://schemas.microsoft.com/office/mac/drawingml/2011/main" val="1"/>
             </a:ext>
           </a:extLst>
         </p:spPr>
@@ -9055,7 +9060,7 @@
           </a:ln>
           <a:extLst>
             <a:ext uri="{C572A759-6A51-4108-AA02-DFA0A04FC94B}">
-              <ma14:wrappingTextBoxFlag xmlns:ma14="http://schemas.microsoft.com/office/mac/drawingml/2011/main" xmlns:a14="http://schemas.microsoft.com/office/drawing/2010/main" xmlns:m="http://schemas.openxmlformats.org/officeDocument/2006/math" xmlns="" val="1"/>
+              <ma14:wrappingTextBoxFlag xmlns="" xmlns:m="http://schemas.openxmlformats.org/officeDocument/2006/math" xmlns:a14="http://schemas.microsoft.com/office/drawing/2010/main" xmlns:ma14="http://schemas.microsoft.com/office/mac/drawingml/2011/main" val="1"/>
             </a:ext>
           </a:extLst>
         </p:spPr>
@@ -9110,7 +9115,7 @@
           </a:ln>
           <a:extLst>
             <a:ext uri="{C572A759-6A51-4108-AA02-DFA0A04FC94B}">
-              <ma14:wrappingTextBoxFlag xmlns:ma14="http://schemas.microsoft.com/office/mac/drawingml/2011/main" xmlns:a14="http://schemas.microsoft.com/office/drawing/2010/main" xmlns:m="http://schemas.openxmlformats.org/officeDocument/2006/math" xmlns="" val="1"/>
+              <ma14:wrappingTextBoxFlag xmlns="" xmlns:m="http://schemas.openxmlformats.org/officeDocument/2006/math" xmlns:a14="http://schemas.microsoft.com/office/drawing/2010/main" xmlns:ma14="http://schemas.microsoft.com/office/mac/drawingml/2011/main" val="1"/>
             </a:ext>
           </a:extLst>
         </p:spPr>
@@ -9198,7 +9203,7 @@
           </a:ln>
           <a:extLst>
             <a:ext uri="{C572A759-6A51-4108-AA02-DFA0A04FC94B}">
-              <ma14:wrappingTextBoxFlag xmlns:ma14="http://schemas.microsoft.com/office/mac/drawingml/2011/main" xmlns:a14="http://schemas.microsoft.com/office/drawing/2010/main" xmlns:m="http://schemas.openxmlformats.org/officeDocument/2006/math" xmlns="" val="1"/>
+              <ma14:wrappingTextBoxFlag xmlns="" xmlns:m="http://schemas.openxmlformats.org/officeDocument/2006/math" xmlns:a14="http://schemas.microsoft.com/office/drawing/2010/main" xmlns:ma14="http://schemas.microsoft.com/office/mac/drawingml/2011/main" val="1"/>
             </a:ext>
           </a:extLst>
         </p:spPr>
@@ -9245,7 +9250,7 @@
           </a:ln>
           <a:extLst>
             <a:ext uri="{C572A759-6A51-4108-AA02-DFA0A04FC94B}">
-              <ma14:wrappingTextBoxFlag xmlns:ma14="http://schemas.microsoft.com/office/mac/drawingml/2011/main" xmlns:a14="http://schemas.microsoft.com/office/drawing/2010/main" xmlns:m="http://schemas.openxmlformats.org/officeDocument/2006/math" xmlns="" val="1"/>
+              <ma14:wrappingTextBoxFlag xmlns="" xmlns:m="http://schemas.openxmlformats.org/officeDocument/2006/math" xmlns:a14="http://schemas.microsoft.com/office/drawing/2010/main" xmlns:ma14="http://schemas.microsoft.com/office/mac/drawingml/2011/main" val="1"/>
             </a:ext>
           </a:extLst>
         </p:spPr>
@@ -9295,7 +9300,7 @@
           </a:ln>
           <a:extLst>
             <a:ext uri="{C572A759-6A51-4108-AA02-DFA0A04FC94B}">
-              <ma14:wrappingTextBoxFlag xmlns:ma14="http://schemas.microsoft.com/office/mac/drawingml/2011/main" xmlns:a14="http://schemas.microsoft.com/office/drawing/2010/main" xmlns:m="http://schemas.openxmlformats.org/officeDocument/2006/math" xmlns="" val="1"/>
+              <ma14:wrappingTextBoxFlag xmlns="" xmlns:m="http://schemas.openxmlformats.org/officeDocument/2006/math" xmlns:a14="http://schemas.microsoft.com/office/drawing/2010/main" xmlns:ma14="http://schemas.microsoft.com/office/mac/drawingml/2011/main" val="1"/>
             </a:ext>
           </a:extLst>
         </p:spPr>
@@ -9391,7 +9396,7 @@
           </a:ln>
           <a:extLst>
             <a:ext uri="{C572A759-6A51-4108-AA02-DFA0A04FC94B}">
-              <ma14:wrappingTextBoxFlag xmlns:ma14="http://schemas.microsoft.com/office/mac/drawingml/2011/main" xmlns:a14="http://schemas.microsoft.com/office/drawing/2010/main" xmlns:m="http://schemas.openxmlformats.org/officeDocument/2006/math" xmlns="" val="1"/>
+              <ma14:wrappingTextBoxFlag xmlns="" xmlns:m="http://schemas.openxmlformats.org/officeDocument/2006/math" xmlns:a14="http://schemas.microsoft.com/office/drawing/2010/main" xmlns:ma14="http://schemas.microsoft.com/office/mac/drawingml/2011/main" val="1"/>
             </a:ext>
           </a:extLst>
         </p:spPr>
@@ -9441,7 +9446,7 @@
           </a:ln>
           <a:extLst>
             <a:ext uri="{C572A759-6A51-4108-AA02-DFA0A04FC94B}">
-              <ma14:wrappingTextBoxFlag xmlns:ma14="http://schemas.microsoft.com/office/mac/drawingml/2011/main" xmlns:a14="http://schemas.microsoft.com/office/drawing/2010/main" xmlns:m="http://schemas.openxmlformats.org/officeDocument/2006/math" xmlns="" val="1"/>
+              <ma14:wrappingTextBoxFlag xmlns="" xmlns:m="http://schemas.openxmlformats.org/officeDocument/2006/math" xmlns:a14="http://schemas.microsoft.com/office/drawing/2010/main" xmlns:ma14="http://schemas.microsoft.com/office/mac/drawingml/2011/main" val="1"/>
             </a:ext>
           </a:extLst>
         </p:spPr>
@@ -9502,7 +9507,7 @@
           </a:ln>
           <a:extLst>
             <a:ext uri="{C572A759-6A51-4108-AA02-DFA0A04FC94B}">
-              <ma14:wrappingTextBoxFlag xmlns:ma14="http://schemas.microsoft.com/office/mac/drawingml/2011/main" xmlns:a14="http://schemas.microsoft.com/office/drawing/2010/main" xmlns:m="http://schemas.openxmlformats.org/officeDocument/2006/math" xmlns="" val="1"/>
+              <ma14:wrappingTextBoxFlag xmlns="" xmlns:m="http://schemas.openxmlformats.org/officeDocument/2006/math" xmlns:a14="http://schemas.microsoft.com/office/drawing/2010/main" xmlns:ma14="http://schemas.microsoft.com/office/mac/drawingml/2011/main" val="1"/>
             </a:ext>
           </a:extLst>
         </p:spPr>
@@ -9601,7 +9606,7 @@
           </a:ln>
           <a:extLst>
             <a:ext uri="{C572A759-6A51-4108-AA02-DFA0A04FC94B}">
-              <ma14:wrappingTextBoxFlag xmlns:ma14="http://schemas.microsoft.com/office/mac/drawingml/2011/main" xmlns:a14="http://schemas.microsoft.com/office/drawing/2010/main" xmlns:m="http://schemas.openxmlformats.org/officeDocument/2006/math" xmlns="" val="1"/>
+              <ma14:wrappingTextBoxFlag xmlns="" xmlns:m="http://schemas.openxmlformats.org/officeDocument/2006/math" xmlns:a14="http://schemas.microsoft.com/office/drawing/2010/main" xmlns:ma14="http://schemas.microsoft.com/office/mac/drawingml/2011/main" val="1"/>
             </a:ext>
           </a:extLst>
         </p:spPr>
@@ -9651,7 +9656,7 @@
           </a:ln>
           <a:extLst>
             <a:ext uri="{C572A759-6A51-4108-AA02-DFA0A04FC94B}">
-              <ma14:wrappingTextBoxFlag xmlns:ma14="http://schemas.microsoft.com/office/mac/drawingml/2011/main" xmlns:a14="http://schemas.microsoft.com/office/drawing/2010/main" xmlns:m="http://schemas.openxmlformats.org/officeDocument/2006/math" xmlns="" val="1"/>
+              <ma14:wrappingTextBoxFlag xmlns="" xmlns:m="http://schemas.openxmlformats.org/officeDocument/2006/math" xmlns:a14="http://schemas.microsoft.com/office/drawing/2010/main" xmlns:ma14="http://schemas.microsoft.com/office/mac/drawingml/2011/main" val="1"/>
             </a:ext>
           </a:extLst>
         </p:spPr>
@@ -9712,7 +9717,7 @@
           </a:ln>
           <a:extLst>
             <a:ext uri="{C572A759-6A51-4108-AA02-DFA0A04FC94B}">
-              <ma14:wrappingTextBoxFlag xmlns:ma14="http://schemas.microsoft.com/office/mac/drawingml/2011/main" xmlns:a14="http://schemas.microsoft.com/office/drawing/2010/main" xmlns:m="http://schemas.openxmlformats.org/officeDocument/2006/math" xmlns="" val="1"/>
+              <ma14:wrappingTextBoxFlag xmlns="" xmlns:m="http://schemas.openxmlformats.org/officeDocument/2006/math" xmlns:a14="http://schemas.microsoft.com/office/drawing/2010/main" xmlns:ma14="http://schemas.microsoft.com/office/mac/drawingml/2011/main" val="1"/>
             </a:ext>
           </a:extLst>
         </p:spPr>
@@ -9811,7 +9816,7 @@
           </a:ln>
           <a:extLst>
             <a:ext uri="{C572A759-6A51-4108-AA02-DFA0A04FC94B}">
-              <ma14:wrappingTextBoxFlag xmlns:ma14="http://schemas.microsoft.com/office/mac/drawingml/2011/main" xmlns:a14="http://schemas.microsoft.com/office/drawing/2010/main" xmlns:m="http://schemas.openxmlformats.org/officeDocument/2006/math" xmlns="" val="1"/>
+              <ma14:wrappingTextBoxFlag xmlns="" xmlns:m="http://schemas.openxmlformats.org/officeDocument/2006/math" xmlns:a14="http://schemas.microsoft.com/office/drawing/2010/main" xmlns:ma14="http://schemas.microsoft.com/office/mac/drawingml/2011/main" val="1"/>
             </a:ext>
           </a:extLst>
         </p:spPr>
@@ -9861,7 +9866,7 @@
           </a:ln>
           <a:extLst>
             <a:ext uri="{C572A759-6A51-4108-AA02-DFA0A04FC94B}">
-              <ma14:wrappingTextBoxFlag xmlns:ma14="http://schemas.microsoft.com/office/mac/drawingml/2011/main" xmlns:a14="http://schemas.microsoft.com/office/drawing/2010/main" xmlns:m="http://schemas.openxmlformats.org/officeDocument/2006/math" xmlns="" val="1"/>
+              <ma14:wrappingTextBoxFlag xmlns="" xmlns:m="http://schemas.openxmlformats.org/officeDocument/2006/math" xmlns:a14="http://schemas.microsoft.com/office/drawing/2010/main" xmlns:ma14="http://schemas.microsoft.com/office/mac/drawingml/2011/main" val="1"/>
             </a:ext>
           </a:extLst>
         </p:spPr>
@@ -9911,7 +9916,7 @@
           </a:ln>
           <a:extLst>
             <a:ext uri="{C572A759-6A51-4108-AA02-DFA0A04FC94B}">
-              <ma14:wrappingTextBoxFlag xmlns:ma14="http://schemas.microsoft.com/office/mac/drawingml/2011/main" xmlns:a14="http://schemas.microsoft.com/office/drawing/2010/main" xmlns:m="http://schemas.openxmlformats.org/officeDocument/2006/math" xmlns="" val="1"/>
+              <ma14:wrappingTextBoxFlag xmlns="" xmlns:m="http://schemas.openxmlformats.org/officeDocument/2006/math" xmlns:a14="http://schemas.microsoft.com/office/drawing/2010/main" xmlns:ma14="http://schemas.microsoft.com/office/mac/drawingml/2011/main" val="1"/>
             </a:ext>
           </a:extLst>
         </p:spPr>
@@ -10022,7 +10027,7 @@
           </a:ln>
           <a:extLst>
             <a:ext uri="{C572A759-6A51-4108-AA02-DFA0A04FC94B}">
-              <ma14:wrappingTextBoxFlag xmlns:ma14="http://schemas.microsoft.com/office/mac/drawingml/2011/main" xmlns:a14="http://schemas.microsoft.com/office/drawing/2010/main" xmlns:m="http://schemas.openxmlformats.org/officeDocument/2006/math" xmlns="" val="1"/>
+              <ma14:wrappingTextBoxFlag xmlns="" xmlns:m="http://schemas.openxmlformats.org/officeDocument/2006/math" xmlns:a14="http://schemas.microsoft.com/office/drawing/2010/main" xmlns:ma14="http://schemas.microsoft.com/office/mac/drawingml/2011/main" val="1"/>
             </a:ext>
           </a:extLst>
         </p:spPr>
@@ -10072,7 +10077,7 @@
           </a:ln>
           <a:extLst>
             <a:ext uri="{C572A759-6A51-4108-AA02-DFA0A04FC94B}">
-              <ma14:wrappingTextBoxFlag xmlns:ma14="http://schemas.microsoft.com/office/mac/drawingml/2011/main" xmlns:a14="http://schemas.microsoft.com/office/drawing/2010/main" xmlns:m="http://schemas.openxmlformats.org/officeDocument/2006/math" xmlns="" val="1"/>
+              <ma14:wrappingTextBoxFlag xmlns="" xmlns:m="http://schemas.openxmlformats.org/officeDocument/2006/math" xmlns:a14="http://schemas.microsoft.com/office/drawing/2010/main" xmlns:ma14="http://schemas.microsoft.com/office/mac/drawingml/2011/main" val="1"/>
             </a:ext>
           </a:extLst>
         </p:spPr>
@@ -10122,7 +10127,7 @@
           </a:ln>
           <a:extLst>
             <a:ext uri="{C572A759-6A51-4108-AA02-DFA0A04FC94B}">
-              <ma14:wrappingTextBoxFlag xmlns:ma14="http://schemas.microsoft.com/office/mac/drawingml/2011/main" xmlns:a14="http://schemas.microsoft.com/office/drawing/2010/main" xmlns:m="http://schemas.openxmlformats.org/officeDocument/2006/math" xmlns="" val="1"/>
+              <ma14:wrappingTextBoxFlag xmlns="" xmlns:m="http://schemas.openxmlformats.org/officeDocument/2006/math" xmlns:a14="http://schemas.microsoft.com/office/drawing/2010/main" xmlns:ma14="http://schemas.microsoft.com/office/mac/drawingml/2011/main" val="1"/>
             </a:ext>
           </a:extLst>
         </p:spPr>
@@ -10210,7 +10215,7 @@
           </a:ln>
           <a:extLst>
             <a:ext uri="{C572A759-6A51-4108-AA02-DFA0A04FC94B}">
-              <ma14:wrappingTextBoxFlag xmlns:ma14="http://schemas.microsoft.com/office/mac/drawingml/2011/main" xmlns:a14="http://schemas.microsoft.com/office/drawing/2010/main" xmlns:m="http://schemas.openxmlformats.org/officeDocument/2006/math" xmlns="" val="1"/>
+              <ma14:wrappingTextBoxFlag xmlns="" xmlns:m="http://schemas.openxmlformats.org/officeDocument/2006/math" xmlns:a14="http://schemas.microsoft.com/office/drawing/2010/main" xmlns:ma14="http://schemas.microsoft.com/office/mac/drawingml/2011/main" val="1"/>
             </a:ext>
           </a:extLst>
         </p:spPr>
@@ -10260,7 +10265,7 @@
           </a:ln>
           <a:extLst>
             <a:ext uri="{C572A759-6A51-4108-AA02-DFA0A04FC94B}">
-              <ma14:wrappingTextBoxFlag xmlns:ma14="http://schemas.microsoft.com/office/mac/drawingml/2011/main" xmlns:a14="http://schemas.microsoft.com/office/drawing/2010/main" xmlns:m="http://schemas.openxmlformats.org/officeDocument/2006/math" xmlns="" val="1"/>
+              <ma14:wrappingTextBoxFlag xmlns="" xmlns:m="http://schemas.openxmlformats.org/officeDocument/2006/math" xmlns:a14="http://schemas.microsoft.com/office/drawing/2010/main" xmlns:ma14="http://schemas.microsoft.com/office/mac/drawingml/2011/main" val="1"/>
             </a:ext>
           </a:extLst>
         </p:spPr>
@@ -10310,7 +10315,7 @@
           </a:ln>
           <a:extLst>
             <a:ext uri="{C572A759-6A51-4108-AA02-DFA0A04FC94B}">
-              <ma14:wrappingTextBoxFlag xmlns:ma14="http://schemas.microsoft.com/office/mac/drawingml/2011/main" xmlns:a14="http://schemas.microsoft.com/office/drawing/2010/main" xmlns:m="http://schemas.openxmlformats.org/officeDocument/2006/math" xmlns="" val="1"/>
+              <ma14:wrappingTextBoxFlag xmlns="" xmlns:m="http://schemas.openxmlformats.org/officeDocument/2006/math" xmlns:a14="http://schemas.microsoft.com/office/drawing/2010/main" xmlns:ma14="http://schemas.microsoft.com/office/mac/drawingml/2011/main" val="1"/>
             </a:ext>
           </a:extLst>
         </p:spPr>
@@ -10406,7 +10411,7 @@
           </a:ln>
           <a:extLst>
             <a:ext uri="{C572A759-6A51-4108-AA02-DFA0A04FC94B}">
-              <ma14:wrappingTextBoxFlag xmlns:ma14="http://schemas.microsoft.com/office/mac/drawingml/2011/main" xmlns:a14="http://schemas.microsoft.com/office/drawing/2010/main" xmlns:m="http://schemas.openxmlformats.org/officeDocument/2006/math" xmlns="" val="1"/>
+              <ma14:wrappingTextBoxFlag xmlns="" xmlns:m="http://schemas.openxmlformats.org/officeDocument/2006/math" xmlns:a14="http://schemas.microsoft.com/office/drawing/2010/main" xmlns:ma14="http://schemas.microsoft.com/office/mac/drawingml/2011/main" val="1"/>
             </a:ext>
           </a:extLst>
         </p:spPr>
@@ -10456,7 +10461,7 @@
           </a:ln>
           <a:extLst>
             <a:ext uri="{C572A759-6A51-4108-AA02-DFA0A04FC94B}">
-              <ma14:wrappingTextBoxFlag xmlns:ma14="http://schemas.microsoft.com/office/mac/drawingml/2011/main" xmlns:a14="http://schemas.microsoft.com/office/drawing/2010/main" xmlns:m="http://schemas.openxmlformats.org/officeDocument/2006/math" xmlns="" val="1"/>
+              <ma14:wrappingTextBoxFlag xmlns="" xmlns:m="http://schemas.openxmlformats.org/officeDocument/2006/math" xmlns:a14="http://schemas.microsoft.com/office/drawing/2010/main" xmlns:ma14="http://schemas.microsoft.com/office/mac/drawingml/2011/main" val="1"/>
             </a:ext>
           </a:extLst>
         </p:spPr>
@@ -10517,7 +10522,7 @@
           </a:ln>
           <a:extLst>
             <a:ext uri="{C572A759-6A51-4108-AA02-DFA0A04FC94B}">
-              <ma14:wrappingTextBoxFlag xmlns:ma14="http://schemas.microsoft.com/office/mac/drawingml/2011/main" xmlns:a14="http://schemas.microsoft.com/office/drawing/2010/main" xmlns:m="http://schemas.openxmlformats.org/officeDocument/2006/math" xmlns="" val="1"/>
+              <ma14:wrappingTextBoxFlag xmlns="" xmlns:m="http://schemas.openxmlformats.org/officeDocument/2006/math" xmlns:a14="http://schemas.microsoft.com/office/drawing/2010/main" xmlns:ma14="http://schemas.microsoft.com/office/mac/drawingml/2011/main" val="1"/>
             </a:ext>
           </a:extLst>
         </p:spPr>
@@ -10640,7 +10645,7 @@
           </a:ln>
           <a:extLst>
             <a:ext uri="{C572A759-6A51-4108-AA02-DFA0A04FC94B}">
-              <ma14:wrappingTextBoxFlag xmlns:ma14="http://schemas.microsoft.com/office/mac/drawingml/2011/main" xmlns:a14="http://schemas.microsoft.com/office/drawing/2010/main" xmlns:m="http://schemas.openxmlformats.org/officeDocument/2006/math" xmlns="" val="1"/>
+              <ma14:wrappingTextBoxFlag xmlns="" xmlns:m="http://schemas.openxmlformats.org/officeDocument/2006/math" xmlns:a14="http://schemas.microsoft.com/office/drawing/2010/main" xmlns:ma14="http://schemas.microsoft.com/office/mac/drawingml/2011/main" val="1"/>
             </a:ext>
           </a:extLst>
         </p:spPr>
@@ -10690,7 +10695,7 @@
           </a:ln>
           <a:extLst>
             <a:ext uri="{C572A759-6A51-4108-AA02-DFA0A04FC94B}">
-              <ma14:wrappingTextBoxFlag xmlns:ma14="http://schemas.microsoft.com/office/mac/drawingml/2011/main" xmlns:a14="http://schemas.microsoft.com/office/drawing/2010/main" xmlns:m="http://schemas.openxmlformats.org/officeDocument/2006/math" xmlns="" val="1"/>
+              <ma14:wrappingTextBoxFlag xmlns="" xmlns:m="http://schemas.openxmlformats.org/officeDocument/2006/math" xmlns:a14="http://schemas.microsoft.com/office/drawing/2010/main" xmlns:ma14="http://schemas.microsoft.com/office/mac/drawingml/2011/main" val="1"/>
             </a:ext>
           </a:extLst>
         </p:spPr>
@@ -10740,7 +10745,7 @@
           </a:ln>
           <a:extLst>
             <a:ext uri="{C572A759-6A51-4108-AA02-DFA0A04FC94B}">
-              <ma14:wrappingTextBoxFlag xmlns:ma14="http://schemas.microsoft.com/office/mac/drawingml/2011/main" xmlns:a14="http://schemas.microsoft.com/office/drawing/2010/main" xmlns:m="http://schemas.openxmlformats.org/officeDocument/2006/math" xmlns="" val="1"/>
+              <ma14:wrappingTextBoxFlag xmlns="" xmlns:m="http://schemas.openxmlformats.org/officeDocument/2006/math" xmlns:a14="http://schemas.microsoft.com/office/drawing/2010/main" xmlns:ma14="http://schemas.microsoft.com/office/mac/drawingml/2011/main" val="1"/>
             </a:ext>
           </a:extLst>
         </p:spPr>
@@ -10828,7 +10833,7 @@
           </a:ln>
           <a:extLst>
             <a:ext uri="{C572A759-6A51-4108-AA02-DFA0A04FC94B}">
-              <ma14:wrappingTextBoxFlag xmlns:ma14="http://schemas.microsoft.com/office/mac/drawingml/2011/main" xmlns:a14="http://schemas.microsoft.com/office/drawing/2010/main" xmlns:m="http://schemas.openxmlformats.org/officeDocument/2006/math" xmlns="" val="1"/>
+              <ma14:wrappingTextBoxFlag xmlns="" xmlns:m="http://schemas.openxmlformats.org/officeDocument/2006/math" xmlns:a14="http://schemas.microsoft.com/office/drawing/2010/main" xmlns:ma14="http://schemas.microsoft.com/office/mac/drawingml/2011/main" val="1"/>
             </a:ext>
           </a:extLst>
         </p:spPr>
@@ -10889,7 +10894,7 @@
           </a:ln>
           <a:extLst>
             <a:ext uri="{C572A759-6A51-4108-AA02-DFA0A04FC94B}">
-              <ma14:wrappingTextBoxFlag xmlns:ma14="http://schemas.microsoft.com/office/mac/drawingml/2011/main" xmlns:a14="http://schemas.microsoft.com/office/drawing/2010/main" xmlns:m="http://schemas.openxmlformats.org/officeDocument/2006/math" xmlns="" val="1"/>
+              <ma14:wrappingTextBoxFlag xmlns="" xmlns:m="http://schemas.openxmlformats.org/officeDocument/2006/math" xmlns:a14="http://schemas.microsoft.com/office/drawing/2010/main" xmlns:ma14="http://schemas.microsoft.com/office/mac/drawingml/2011/main" val="1"/>
             </a:ext>
           </a:extLst>
         </p:spPr>
@@ -10939,7 +10944,7 @@
           </a:ln>
           <a:extLst>
             <a:ext uri="{C572A759-6A51-4108-AA02-DFA0A04FC94B}">
-              <ma14:wrappingTextBoxFlag xmlns:ma14="http://schemas.microsoft.com/office/mac/drawingml/2011/main" xmlns:a14="http://schemas.microsoft.com/office/drawing/2010/main" xmlns:m="http://schemas.openxmlformats.org/officeDocument/2006/math" xmlns="" val="1"/>
+              <ma14:wrappingTextBoxFlag xmlns="" xmlns:m="http://schemas.openxmlformats.org/officeDocument/2006/math" xmlns:a14="http://schemas.microsoft.com/office/drawing/2010/main" xmlns:ma14="http://schemas.microsoft.com/office/mac/drawingml/2011/main" val="1"/>
             </a:ext>
           </a:extLst>
         </p:spPr>
@@ -11038,7 +11043,7 @@
           </a:ln>
           <a:extLst>
             <a:ext uri="{C572A759-6A51-4108-AA02-DFA0A04FC94B}">
-              <ma14:wrappingTextBoxFlag xmlns:ma14="http://schemas.microsoft.com/office/mac/drawingml/2011/main" xmlns:a14="http://schemas.microsoft.com/office/drawing/2010/main" xmlns:m="http://schemas.openxmlformats.org/officeDocument/2006/math" xmlns="" val="1"/>
+              <ma14:wrappingTextBoxFlag xmlns="" xmlns:m="http://schemas.openxmlformats.org/officeDocument/2006/math" xmlns:a14="http://schemas.microsoft.com/office/drawing/2010/main" xmlns:ma14="http://schemas.microsoft.com/office/mac/drawingml/2011/main" val="1"/>
             </a:ext>
           </a:extLst>
         </p:spPr>
@@ -11088,7 +11093,7 @@
           </a:ln>
           <a:extLst>
             <a:ext uri="{C572A759-6A51-4108-AA02-DFA0A04FC94B}">
-              <ma14:wrappingTextBoxFlag xmlns:ma14="http://schemas.microsoft.com/office/mac/drawingml/2011/main" xmlns:a14="http://schemas.microsoft.com/office/drawing/2010/main" xmlns:m="http://schemas.openxmlformats.org/officeDocument/2006/math" xmlns="" val="1"/>
+              <ma14:wrappingTextBoxFlag xmlns="" xmlns:m="http://schemas.openxmlformats.org/officeDocument/2006/math" xmlns:a14="http://schemas.microsoft.com/office/drawing/2010/main" xmlns:ma14="http://schemas.microsoft.com/office/mac/drawingml/2011/main" val="1"/>
             </a:ext>
           </a:extLst>
         </p:spPr>
@@ -11138,7 +11143,7 @@
           </a:ln>
           <a:extLst>
             <a:ext uri="{C572A759-6A51-4108-AA02-DFA0A04FC94B}">
-              <ma14:wrappingTextBoxFlag xmlns:ma14="http://schemas.microsoft.com/office/mac/drawingml/2011/main" xmlns:a14="http://schemas.microsoft.com/office/drawing/2010/main" xmlns:m="http://schemas.openxmlformats.org/officeDocument/2006/math" xmlns="" val="1"/>
+              <ma14:wrappingTextBoxFlag xmlns="" xmlns:m="http://schemas.openxmlformats.org/officeDocument/2006/math" xmlns:a14="http://schemas.microsoft.com/office/drawing/2010/main" xmlns:ma14="http://schemas.microsoft.com/office/mac/drawingml/2011/main" val="1"/>
             </a:ext>
           </a:extLst>
         </p:spPr>
@@ -11287,7 +11292,7 @@
           </a:ln>
           <a:extLst>
             <a:ext uri="{C572A759-6A51-4108-AA02-DFA0A04FC94B}">
-              <ma14:wrappingTextBoxFlag xmlns:ma14="http://schemas.microsoft.com/office/mac/drawingml/2011/main" xmlns:a14="http://schemas.microsoft.com/office/drawing/2010/main" xmlns:m="http://schemas.openxmlformats.org/officeDocument/2006/math" xmlns="" val="1"/>
+              <ma14:wrappingTextBoxFlag xmlns="" xmlns:m="http://schemas.openxmlformats.org/officeDocument/2006/math" xmlns:a14="http://schemas.microsoft.com/office/drawing/2010/main" xmlns:ma14="http://schemas.microsoft.com/office/mac/drawingml/2011/main" val="1"/>
             </a:ext>
           </a:extLst>
         </p:spPr>
@@ -11334,7 +11339,7 @@
           </a:ln>
           <a:extLst>
             <a:ext uri="{C572A759-6A51-4108-AA02-DFA0A04FC94B}">
-              <ma14:wrappingTextBoxFlag xmlns:ma14="http://schemas.microsoft.com/office/mac/drawingml/2011/main" xmlns:a14="http://schemas.microsoft.com/office/drawing/2010/main" xmlns:m="http://schemas.openxmlformats.org/officeDocument/2006/math" xmlns="" val="1"/>
+              <ma14:wrappingTextBoxFlag xmlns="" xmlns:m="http://schemas.openxmlformats.org/officeDocument/2006/math" xmlns:a14="http://schemas.microsoft.com/office/drawing/2010/main" xmlns:ma14="http://schemas.microsoft.com/office/mac/drawingml/2011/main" val="1"/>
             </a:ext>
           </a:extLst>
         </p:spPr>
@@ -11381,7 +11386,7 @@
           </a:ln>
           <a:extLst>
             <a:ext uri="{C572A759-6A51-4108-AA02-DFA0A04FC94B}">
-              <ma14:wrappingTextBoxFlag xmlns:ma14="http://schemas.microsoft.com/office/mac/drawingml/2011/main" xmlns:a14="http://schemas.microsoft.com/office/drawing/2010/main" xmlns:m="http://schemas.openxmlformats.org/officeDocument/2006/math" xmlns="" val="1"/>
+              <ma14:wrappingTextBoxFlag xmlns="" xmlns:m="http://schemas.openxmlformats.org/officeDocument/2006/math" xmlns:a14="http://schemas.microsoft.com/office/drawing/2010/main" xmlns:ma14="http://schemas.microsoft.com/office/mac/drawingml/2011/main" val="1"/>
             </a:ext>
           </a:extLst>
         </p:spPr>
@@ -11516,7 +11521,7 @@
           </a:ln>
           <a:extLst>
             <a:ext uri="{C572A759-6A51-4108-AA02-DFA0A04FC94B}">
-              <ma14:wrappingTextBoxFlag xmlns:ma14="http://schemas.microsoft.com/office/mac/drawingml/2011/main" xmlns:a14="http://schemas.microsoft.com/office/drawing/2010/main" xmlns:m="http://schemas.openxmlformats.org/officeDocument/2006/math" xmlns="" val="1"/>
+              <ma14:wrappingTextBoxFlag xmlns="" xmlns:m="http://schemas.openxmlformats.org/officeDocument/2006/math" xmlns:a14="http://schemas.microsoft.com/office/drawing/2010/main" xmlns:ma14="http://schemas.microsoft.com/office/mac/drawingml/2011/main" val="1"/>
             </a:ext>
           </a:extLst>
         </p:spPr>
@@ -11571,7 +11576,7 @@
           </a:ln>
           <a:extLst>
             <a:ext uri="{C572A759-6A51-4108-AA02-DFA0A04FC94B}">
-              <ma14:wrappingTextBoxFlag xmlns:ma14="http://schemas.microsoft.com/office/mac/drawingml/2011/main" xmlns:a14="http://schemas.microsoft.com/office/drawing/2010/main" xmlns:m="http://schemas.openxmlformats.org/officeDocument/2006/math" xmlns="" val="1"/>
+              <ma14:wrappingTextBoxFlag xmlns="" xmlns:m="http://schemas.openxmlformats.org/officeDocument/2006/math" xmlns:a14="http://schemas.microsoft.com/office/drawing/2010/main" xmlns:ma14="http://schemas.microsoft.com/office/mac/drawingml/2011/main" val="1"/>
             </a:ext>
           </a:extLst>
         </p:spPr>
@@ -11659,7 +11664,7 @@
           </a:ln>
           <a:extLst>
             <a:ext uri="{C572A759-6A51-4108-AA02-DFA0A04FC94B}">
-              <ma14:wrappingTextBoxFlag xmlns:ma14="http://schemas.microsoft.com/office/mac/drawingml/2011/main" xmlns:a14="http://schemas.microsoft.com/office/drawing/2010/main" xmlns:m="http://schemas.openxmlformats.org/officeDocument/2006/math" xmlns="" val="1"/>
+              <ma14:wrappingTextBoxFlag xmlns="" xmlns:m="http://schemas.openxmlformats.org/officeDocument/2006/math" xmlns:a14="http://schemas.microsoft.com/office/drawing/2010/main" xmlns:ma14="http://schemas.microsoft.com/office/mac/drawingml/2011/main" val="1"/>
             </a:ext>
           </a:extLst>
         </p:spPr>
@@ -11706,7 +11711,7 @@
           </a:ln>
           <a:extLst>
             <a:ext uri="{C572A759-6A51-4108-AA02-DFA0A04FC94B}">
-              <ma14:wrappingTextBoxFlag xmlns:ma14="http://schemas.microsoft.com/office/mac/drawingml/2011/main" xmlns:a14="http://schemas.microsoft.com/office/drawing/2010/main" xmlns:m="http://schemas.openxmlformats.org/officeDocument/2006/math" xmlns="" val="1"/>
+              <ma14:wrappingTextBoxFlag xmlns="" xmlns:m="http://schemas.openxmlformats.org/officeDocument/2006/math" xmlns:a14="http://schemas.microsoft.com/office/drawing/2010/main" xmlns:ma14="http://schemas.microsoft.com/office/mac/drawingml/2011/main" val="1"/>
             </a:ext>
           </a:extLst>
         </p:spPr>
@@ -11805,7 +11810,7 @@
           </a:ln>
           <a:extLst>
             <a:ext uri="{C572A759-6A51-4108-AA02-DFA0A04FC94B}">
-              <ma14:wrappingTextBoxFlag xmlns:ma14="http://schemas.microsoft.com/office/mac/drawingml/2011/main" xmlns:a14="http://schemas.microsoft.com/office/drawing/2010/main" xmlns:m="http://schemas.openxmlformats.org/officeDocument/2006/math" xmlns="" val="1"/>
+              <ma14:wrappingTextBoxFlag xmlns="" xmlns:m="http://schemas.openxmlformats.org/officeDocument/2006/math" xmlns:a14="http://schemas.microsoft.com/office/drawing/2010/main" xmlns:ma14="http://schemas.microsoft.com/office/mac/drawingml/2011/main" val="1"/>
             </a:ext>
           </a:extLst>
         </p:spPr>
@@ -11852,7 +11857,7 @@
           </a:ln>
           <a:extLst>
             <a:ext uri="{C572A759-6A51-4108-AA02-DFA0A04FC94B}">
-              <ma14:wrappingTextBoxFlag xmlns:ma14="http://schemas.microsoft.com/office/mac/drawingml/2011/main" xmlns:a14="http://schemas.microsoft.com/office/drawing/2010/main" xmlns:m="http://schemas.openxmlformats.org/officeDocument/2006/math" xmlns="" val="1"/>
+              <ma14:wrappingTextBoxFlag xmlns="" xmlns:m="http://schemas.openxmlformats.org/officeDocument/2006/math" xmlns:a14="http://schemas.microsoft.com/office/drawing/2010/main" xmlns:ma14="http://schemas.microsoft.com/office/mac/drawingml/2011/main" val="1"/>
             </a:ext>
           </a:extLst>
         </p:spPr>
@@ -11980,7 +11985,7 @@
           </a:ln>
           <a:extLst>
             <a:ext uri="{C572A759-6A51-4108-AA02-DFA0A04FC94B}">
-              <ma14:wrappingTextBoxFlag xmlns:ma14="http://schemas.microsoft.com/office/mac/drawingml/2011/main" xmlns:a14="http://schemas.microsoft.com/office/drawing/2010/main" xmlns:m="http://schemas.openxmlformats.org/officeDocument/2006/math" xmlns="" val="1"/>
+              <ma14:wrappingTextBoxFlag xmlns="" xmlns:m="http://schemas.openxmlformats.org/officeDocument/2006/math" xmlns:a14="http://schemas.microsoft.com/office/drawing/2010/main" xmlns:ma14="http://schemas.microsoft.com/office/mac/drawingml/2011/main" val="1"/>
             </a:ext>
           </a:extLst>
         </p:spPr>
@@ -12027,7 +12032,7 @@
           </a:ln>
           <a:extLst>
             <a:ext uri="{C572A759-6A51-4108-AA02-DFA0A04FC94B}">
-              <ma14:wrappingTextBoxFlag xmlns:ma14="http://schemas.microsoft.com/office/mac/drawingml/2011/main" xmlns:a14="http://schemas.microsoft.com/office/drawing/2010/main" xmlns:m="http://schemas.openxmlformats.org/officeDocument/2006/math" xmlns="" val="1"/>
+              <ma14:wrappingTextBoxFlag xmlns="" xmlns:m="http://schemas.openxmlformats.org/officeDocument/2006/math" xmlns:a14="http://schemas.microsoft.com/office/drawing/2010/main" xmlns:ma14="http://schemas.microsoft.com/office/mac/drawingml/2011/main" val="1"/>
             </a:ext>
           </a:extLst>
         </p:spPr>
@@ -12155,7 +12160,7 @@
           </a:ln>
           <a:extLst>
             <a:ext uri="{C572A759-6A51-4108-AA02-DFA0A04FC94B}">
-              <ma14:wrappingTextBoxFlag xmlns:ma14="http://schemas.microsoft.com/office/mac/drawingml/2011/main" xmlns:a14="http://schemas.microsoft.com/office/drawing/2010/main" xmlns:m="http://schemas.openxmlformats.org/officeDocument/2006/math" xmlns="" val="1"/>
+              <ma14:wrappingTextBoxFlag xmlns="" xmlns:m="http://schemas.openxmlformats.org/officeDocument/2006/math" xmlns:a14="http://schemas.microsoft.com/office/drawing/2010/main" xmlns:ma14="http://schemas.microsoft.com/office/mac/drawingml/2011/main" val="1"/>
             </a:ext>
           </a:extLst>
         </p:spPr>
@@ -12202,7 +12207,7 @@
           </a:ln>
           <a:extLst>
             <a:ext uri="{C572A759-6A51-4108-AA02-DFA0A04FC94B}">
-              <ma14:wrappingTextBoxFlag xmlns:ma14="http://schemas.microsoft.com/office/mac/drawingml/2011/main" xmlns:a14="http://schemas.microsoft.com/office/drawing/2010/main" xmlns:m="http://schemas.openxmlformats.org/officeDocument/2006/math" xmlns="" val="1"/>
+              <ma14:wrappingTextBoxFlag xmlns="" xmlns:m="http://schemas.openxmlformats.org/officeDocument/2006/math" xmlns:a14="http://schemas.microsoft.com/office/drawing/2010/main" xmlns:ma14="http://schemas.microsoft.com/office/mac/drawingml/2011/main" val="1"/>
             </a:ext>
           </a:extLst>
         </p:spPr>
@@ -12314,7 +12319,7 @@
           </a:ln>
           <a:extLst>
             <a:ext uri="{C572A759-6A51-4108-AA02-DFA0A04FC94B}">
-              <ma14:wrappingTextBoxFlag xmlns:ma14="http://schemas.microsoft.com/office/mac/drawingml/2011/main" xmlns:a14="http://schemas.microsoft.com/office/drawing/2010/main" xmlns:m="http://schemas.openxmlformats.org/officeDocument/2006/math" xmlns="" val="1"/>
+              <ma14:wrappingTextBoxFlag xmlns="" xmlns:m="http://schemas.openxmlformats.org/officeDocument/2006/math" xmlns:a14="http://schemas.microsoft.com/office/drawing/2010/main" xmlns:ma14="http://schemas.microsoft.com/office/mac/drawingml/2011/main" val="1"/>
             </a:ext>
           </a:extLst>
         </p:spPr>
@@ -12361,7 +12366,7 @@
           </a:ln>
           <a:extLst>
             <a:ext uri="{C572A759-6A51-4108-AA02-DFA0A04FC94B}">
-              <ma14:wrappingTextBoxFlag xmlns:ma14="http://schemas.microsoft.com/office/mac/drawingml/2011/main" xmlns:a14="http://schemas.microsoft.com/office/drawing/2010/main" xmlns:m="http://schemas.openxmlformats.org/officeDocument/2006/math" xmlns="" val="1"/>
+              <ma14:wrappingTextBoxFlag xmlns="" xmlns:m="http://schemas.openxmlformats.org/officeDocument/2006/math" xmlns:a14="http://schemas.microsoft.com/office/drawing/2010/main" xmlns:ma14="http://schemas.microsoft.com/office/mac/drawingml/2011/main" val="1"/>
             </a:ext>
           </a:extLst>
         </p:spPr>
@@ -12483,7 +12488,7 @@
           </a:ln>
           <a:extLst>
             <a:ext uri="{C572A759-6A51-4108-AA02-DFA0A04FC94B}">
-              <ma14:wrappingTextBoxFlag xmlns:ma14="http://schemas.microsoft.com/office/mac/drawingml/2011/main" xmlns:a14="http://schemas.microsoft.com/office/drawing/2010/main" xmlns:m="http://schemas.openxmlformats.org/officeDocument/2006/math" xmlns="" val="1"/>
+              <ma14:wrappingTextBoxFlag xmlns="" xmlns:m="http://schemas.openxmlformats.org/officeDocument/2006/math" xmlns:a14="http://schemas.microsoft.com/office/drawing/2010/main" xmlns:ma14="http://schemas.microsoft.com/office/mac/drawingml/2011/main" val="1"/>
             </a:ext>
           </a:extLst>
         </p:spPr>
@@ -12530,7 +12535,7 @@
           </a:ln>
           <a:extLst>
             <a:ext uri="{C572A759-6A51-4108-AA02-DFA0A04FC94B}">
-              <ma14:wrappingTextBoxFlag xmlns:ma14="http://schemas.microsoft.com/office/mac/drawingml/2011/main" xmlns:a14="http://schemas.microsoft.com/office/drawing/2010/main" xmlns:m="http://schemas.openxmlformats.org/officeDocument/2006/math" xmlns="" val="1"/>
+              <ma14:wrappingTextBoxFlag xmlns="" xmlns:m="http://schemas.openxmlformats.org/officeDocument/2006/math" xmlns:a14="http://schemas.microsoft.com/office/drawing/2010/main" xmlns:ma14="http://schemas.microsoft.com/office/mac/drawingml/2011/main" val="1"/>
             </a:ext>
           </a:extLst>
         </p:spPr>
@@ -12577,7 +12582,7 @@
           </a:ln>
           <a:extLst>
             <a:ext uri="{C572A759-6A51-4108-AA02-DFA0A04FC94B}">
-              <ma14:wrappingTextBoxFlag xmlns:ma14="http://schemas.microsoft.com/office/mac/drawingml/2011/main" xmlns:a14="http://schemas.microsoft.com/office/drawing/2010/main" xmlns:m="http://schemas.openxmlformats.org/officeDocument/2006/math" xmlns="" val="1"/>
+              <ma14:wrappingTextBoxFlag xmlns="" xmlns:m="http://schemas.openxmlformats.org/officeDocument/2006/math" xmlns:a14="http://schemas.microsoft.com/office/drawing/2010/main" xmlns:ma14="http://schemas.microsoft.com/office/mac/drawingml/2011/main" val="1"/>
             </a:ext>
           </a:extLst>
         </p:spPr>
@@ -12712,7 +12717,7 @@
           </a:ln>
           <a:extLst>
             <a:ext uri="{C572A759-6A51-4108-AA02-DFA0A04FC94B}">
-              <ma14:wrappingTextBoxFlag xmlns:ma14="http://schemas.microsoft.com/office/mac/drawingml/2011/main" xmlns:a14="http://schemas.microsoft.com/office/drawing/2010/main" xmlns:m="http://schemas.openxmlformats.org/officeDocument/2006/math" xmlns="" val="1"/>
+              <ma14:wrappingTextBoxFlag xmlns="" xmlns:m="http://schemas.openxmlformats.org/officeDocument/2006/math" xmlns:a14="http://schemas.microsoft.com/office/drawing/2010/main" xmlns:ma14="http://schemas.microsoft.com/office/mac/drawingml/2011/main" val="1"/>
             </a:ext>
           </a:extLst>
         </p:spPr>
@@ -12767,7 +12772,7 @@
           </a:ln>
           <a:extLst>
             <a:ext uri="{C572A759-6A51-4108-AA02-DFA0A04FC94B}">
-              <ma14:wrappingTextBoxFlag xmlns:ma14="http://schemas.microsoft.com/office/mac/drawingml/2011/main" xmlns:a14="http://schemas.microsoft.com/office/drawing/2010/main" xmlns:m="http://schemas.openxmlformats.org/officeDocument/2006/math" xmlns="" val="1"/>
+              <ma14:wrappingTextBoxFlag xmlns="" xmlns:m="http://schemas.openxmlformats.org/officeDocument/2006/math" xmlns:a14="http://schemas.microsoft.com/office/drawing/2010/main" xmlns:ma14="http://schemas.microsoft.com/office/mac/drawingml/2011/main" val="1"/>
             </a:ext>
           </a:extLst>
         </p:spPr>
@@ -12855,7 +12860,7 @@
           </a:ln>
           <a:extLst>
             <a:ext uri="{C572A759-6A51-4108-AA02-DFA0A04FC94B}">
-              <ma14:wrappingTextBoxFlag xmlns:ma14="http://schemas.microsoft.com/office/mac/drawingml/2011/main" xmlns:a14="http://schemas.microsoft.com/office/drawing/2010/main" xmlns:m="http://schemas.openxmlformats.org/officeDocument/2006/math" xmlns="" val="1"/>
+              <ma14:wrappingTextBoxFlag xmlns="" xmlns:m="http://schemas.openxmlformats.org/officeDocument/2006/math" xmlns:a14="http://schemas.microsoft.com/office/drawing/2010/main" xmlns:ma14="http://schemas.microsoft.com/office/mac/drawingml/2011/main" val="1"/>
             </a:ext>
           </a:extLst>
         </p:spPr>
@@ -12902,7 +12907,7 @@
           </a:ln>
           <a:extLst>
             <a:ext uri="{C572A759-6A51-4108-AA02-DFA0A04FC94B}">
-              <ma14:wrappingTextBoxFlag xmlns:ma14="http://schemas.microsoft.com/office/mac/drawingml/2011/main" xmlns:a14="http://schemas.microsoft.com/office/drawing/2010/main" xmlns:m="http://schemas.openxmlformats.org/officeDocument/2006/math" xmlns="" val="1"/>
+              <ma14:wrappingTextBoxFlag xmlns="" xmlns:m="http://schemas.openxmlformats.org/officeDocument/2006/math" xmlns:a14="http://schemas.microsoft.com/office/drawing/2010/main" xmlns:ma14="http://schemas.microsoft.com/office/mac/drawingml/2011/main" val="1"/>
             </a:ext>
           </a:extLst>
         </p:spPr>
@@ -12960,7 +12965,7 @@
           </a:ln>
           <a:extLst>
             <a:ext uri="{C572A759-6A51-4108-AA02-DFA0A04FC94B}">
-              <ma14:wrappingTextBoxFlag xmlns:ma14="http://schemas.microsoft.com/office/mac/drawingml/2011/main" xmlns:a14="http://schemas.microsoft.com/office/drawing/2010/main" xmlns:m="http://schemas.openxmlformats.org/officeDocument/2006/math" xmlns="" val="1"/>
+              <ma14:wrappingTextBoxFlag xmlns="" xmlns:m="http://schemas.openxmlformats.org/officeDocument/2006/math" xmlns:a14="http://schemas.microsoft.com/office/drawing/2010/main" xmlns:ma14="http://schemas.microsoft.com/office/mac/drawingml/2011/main" val="1"/>
             </a:ext>
           </a:extLst>
         </p:spPr>
@@ -13068,7 +13073,7 @@
           </a:ln>
           <a:extLst>
             <a:ext uri="{C572A759-6A51-4108-AA02-DFA0A04FC94B}">
-              <ma14:wrappingTextBoxFlag xmlns:ma14="http://schemas.microsoft.com/office/mac/drawingml/2011/main" xmlns:a14="http://schemas.microsoft.com/office/drawing/2010/main" xmlns:m="http://schemas.openxmlformats.org/officeDocument/2006/math" xmlns="" val="1"/>
+              <ma14:wrappingTextBoxFlag xmlns="" xmlns:m="http://schemas.openxmlformats.org/officeDocument/2006/math" xmlns:a14="http://schemas.microsoft.com/office/drawing/2010/main" xmlns:ma14="http://schemas.microsoft.com/office/mac/drawingml/2011/main" val="1"/>
             </a:ext>
           </a:extLst>
         </p:spPr>
@@ -13115,7 +13120,7 @@
           </a:ln>
           <a:extLst>
             <a:ext uri="{C572A759-6A51-4108-AA02-DFA0A04FC94B}">
-              <ma14:wrappingTextBoxFlag xmlns:ma14="http://schemas.microsoft.com/office/mac/drawingml/2011/main" xmlns:a14="http://schemas.microsoft.com/office/drawing/2010/main" xmlns:m="http://schemas.openxmlformats.org/officeDocument/2006/math" xmlns="" val="1"/>
+              <ma14:wrappingTextBoxFlag xmlns="" xmlns:m="http://schemas.openxmlformats.org/officeDocument/2006/math" xmlns:a14="http://schemas.microsoft.com/office/drawing/2010/main" xmlns:ma14="http://schemas.microsoft.com/office/mac/drawingml/2011/main" val="1"/>
             </a:ext>
           </a:extLst>
         </p:spPr>
@@ -13255,7 +13260,7 @@
           </a:ln>
           <a:extLst>
             <a:ext uri="{C572A759-6A51-4108-AA02-DFA0A04FC94B}">
-              <ma14:wrappingTextBoxFlag xmlns:ma14="http://schemas.microsoft.com/office/mac/drawingml/2011/main" xmlns:a14="http://schemas.microsoft.com/office/drawing/2010/main" xmlns:m="http://schemas.openxmlformats.org/officeDocument/2006/math" xmlns="" val="1"/>
+              <ma14:wrappingTextBoxFlag xmlns="" xmlns:m="http://schemas.openxmlformats.org/officeDocument/2006/math" xmlns:a14="http://schemas.microsoft.com/office/drawing/2010/main" xmlns:ma14="http://schemas.microsoft.com/office/mac/drawingml/2011/main" val="1"/>
             </a:ext>
           </a:extLst>
         </p:spPr>
@@ -13302,7 +13307,7 @@
           </a:ln>
           <a:extLst>
             <a:ext uri="{C572A759-6A51-4108-AA02-DFA0A04FC94B}">
-              <ma14:wrappingTextBoxFlag xmlns:ma14="http://schemas.microsoft.com/office/mac/drawingml/2011/main" xmlns:a14="http://schemas.microsoft.com/office/drawing/2010/main" xmlns:m="http://schemas.openxmlformats.org/officeDocument/2006/math" xmlns="" val="1"/>
+              <ma14:wrappingTextBoxFlag xmlns="" xmlns:m="http://schemas.openxmlformats.org/officeDocument/2006/math" xmlns:a14="http://schemas.microsoft.com/office/drawing/2010/main" xmlns:ma14="http://schemas.microsoft.com/office/mac/drawingml/2011/main" val="1"/>
             </a:ext>
           </a:extLst>
         </p:spPr>
@@ -13433,7 +13438,7 @@
           </a:ln>
           <a:extLst>
             <a:ext uri="{C572A759-6A51-4108-AA02-DFA0A04FC94B}">
-              <ma14:wrappingTextBoxFlag xmlns:ma14="http://schemas.microsoft.com/office/mac/drawingml/2011/main" xmlns:a14="http://schemas.microsoft.com/office/drawing/2010/main" xmlns:m="http://schemas.openxmlformats.org/officeDocument/2006/math" xmlns="" val="1"/>
+              <ma14:wrappingTextBoxFlag xmlns="" xmlns:m="http://schemas.openxmlformats.org/officeDocument/2006/math" xmlns:a14="http://schemas.microsoft.com/office/drawing/2010/main" xmlns:ma14="http://schemas.microsoft.com/office/mac/drawingml/2011/main" val="1"/>
             </a:ext>
           </a:extLst>
         </p:spPr>
@@ -13494,7 +13499,7 @@
           </a:ln>
           <a:extLst>
             <a:ext uri="{C572A759-6A51-4108-AA02-DFA0A04FC94B}">
-              <ma14:wrappingTextBoxFlag xmlns:ma14="http://schemas.microsoft.com/office/mac/drawingml/2011/main" xmlns:a14="http://schemas.microsoft.com/office/drawing/2010/main" xmlns:m="http://schemas.openxmlformats.org/officeDocument/2006/math" xmlns="" val="1"/>
+              <ma14:wrappingTextBoxFlag xmlns="" xmlns:m="http://schemas.openxmlformats.org/officeDocument/2006/math" xmlns:a14="http://schemas.microsoft.com/office/drawing/2010/main" xmlns:ma14="http://schemas.microsoft.com/office/mac/drawingml/2011/main" val="1"/>
             </a:ext>
           </a:extLst>
         </p:spPr>
@@ -13625,7 +13630,7 @@
           </a:ln>
           <a:extLst>
             <a:ext uri="{C572A759-6A51-4108-AA02-DFA0A04FC94B}">
-              <ma14:wrappingTextBoxFlag xmlns:ma14="http://schemas.microsoft.com/office/mac/drawingml/2011/main" xmlns:a14="http://schemas.microsoft.com/office/drawing/2010/main" xmlns:m="http://schemas.openxmlformats.org/officeDocument/2006/math" xmlns="" val="1"/>
+              <ma14:wrappingTextBoxFlag xmlns="" xmlns:m="http://schemas.openxmlformats.org/officeDocument/2006/math" xmlns:a14="http://schemas.microsoft.com/office/drawing/2010/main" xmlns:ma14="http://schemas.microsoft.com/office/mac/drawingml/2011/main" val="1"/>
             </a:ext>
           </a:extLst>
         </p:spPr>
@@ -13680,7 +13685,7 @@
           </a:ln>
           <a:extLst>
             <a:ext uri="{C572A759-6A51-4108-AA02-DFA0A04FC94B}">
-              <ma14:wrappingTextBoxFlag xmlns:ma14="http://schemas.microsoft.com/office/mac/drawingml/2011/main" xmlns:a14="http://schemas.microsoft.com/office/drawing/2010/main" xmlns:m="http://schemas.openxmlformats.org/officeDocument/2006/math" xmlns="" val="1"/>
+              <ma14:wrappingTextBoxFlag xmlns="" xmlns:m="http://schemas.openxmlformats.org/officeDocument/2006/math" xmlns:a14="http://schemas.microsoft.com/office/drawing/2010/main" xmlns:ma14="http://schemas.microsoft.com/office/mac/drawingml/2011/main" val="1"/>
             </a:ext>
           </a:extLst>
         </p:spPr>
@@ -13766,7 +13771,7 @@
           </a:ln>
           <a:extLst>
             <a:ext uri="{C572A759-6A51-4108-AA02-DFA0A04FC94B}">
-              <ma14:wrappingTextBoxFlag xmlns:ma14="http://schemas.microsoft.com/office/mac/drawingml/2011/main" xmlns:a14="http://schemas.microsoft.com/office/drawing/2010/main" xmlns:m="http://schemas.openxmlformats.org/officeDocument/2006/math" xmlns="" val="1"/>
+              <ma14:wrappingTextBoxFlag xmlns="" xmlns:m="http://schemas.openxmlformats.org/officeDocument/2006/math" xmlns:a14="http://schemas.microsoft.com/office/drawing/2010/main" xmlns:ma14="http://schemas.microsoft.com/office/mac/drawingml/2011/main" val="1"/>
             </a:ext>
           </a:extLst>
         </p:spPr>
@@ -13880,7 +13885,7 @@
           </a:ln>
           <a:extLst>
             <a:ext uri="{C572A759-6A51-4108-AA02-DFA0A04FC94B}">
-              <ma14:wrappingTextBoxFlag xmlns:ma14="http://schemas.microsoft.com/office/mac/drawingml/2011/main" xmlns:a14="http://schemas.microsoft.com/office/drawing/2010/main" xmlns:m="http://schemas.openxmlformats.org/officeDocument/2006/math" xmlns="" val="1"/>
+              <ma14:wrappingTextBoxFlag xmlns="" xmlns:m="http://schemas.openxmlformats.org/officeDocument/2006/math" xmlns:a14="http://schemas.microsoft.com/office/drawing/2010/main" xmlns:ma14="http://schemas.microsoft.com/office/mac/drawingml/2011/main" val="1"/>
             </a:ext>
           </a:extLst>
         </p:spPr>
@@ -13927,7 +13932,7 @@
           </a:ln>
           <a:extLst>
             <a:ext uri="{C572A759-6A51-4108-AA02-DFA0A04FC94B}">
-              <ma14:wrappingTextBoxFlag xmlns:ma14="http://schemas.microsoft.com/office/mac/drawingml/2011/main" xmlns:a14="http://schemas.microsoft.com/office/drawing/2010/main" xmlns:m="http://schemas.openxmlformats.org/officeDocument/2006/math" xmlns="" val="1"/>
+              <ma14:wrappingTextBoxFlag xmlns="" xmlns:m="http://schemas.openxmlformats.org/officeDocument/2006/math" xmlns:a14="http://schemas.microsoft.com/office/drawing/2010/main" xmlns:ma14="http://schemas.microsoft.com/office/mac/drawingml/2011/main" val="1"/>
             </a:ext>
           </a:extLst>
         </p:spPr>
@@ -13974,7 +13979,7 @@
           </a:ln>
           <a:extLst>
             <a:ext uri="{C572A759-6A51-4108-AA02-DFA0A04FC94B}">
-              <ma14:wrappingTextBoxFlag xmlns:ma14="http://schemas.microsoft.com/office/mac/drawingml/2011/main" xmlns:a14="http://schemas.microsoft.com/office/drawing/2010/main" xmlns:m="http://schemas.openxmlformats.org/officeDocument/2006/math" xmlns="" val="1"/>
+              <ma14:wrappingTextBoxFlag xmlns="" xmlns:m="http://schemas.openxmlformats.org/officeDocument/2006/math" xmlns:a14="http://schemas.microsoft.com/office/drawing/2010/main" xmlns:ma14="http://schemas.microsoft.com/office/mac/drawingml/2011/main" val="1"/>
             </a:ext>
           </a:extLst>
         </p:spPr>
@@ -14109,7 +14114,7 @@
           </a:ln>
           <a:extLst>
             <a:ext uri="{C572A759-6A51-4108-AA02-DFA0A04FC94B}">
-              <ma14:wrappingTextBoxFlag xmlns:ma14="http://schemas.microsoft.com/office/mac/drawingml/2011/main" xmlns:a14="http://schemas.microsoft.com/office/drawing/2010/main" xmlns:m="http://schemas.openxmlformats.org/officeDocument/2006/math" xmlns="" val="1"/>
+              <ma14:wrappingTextBoxFlag xmlns="" xmlns:m="http://schemas.openxmlformats.org/officeDocument/2006/math" xmlns:a14="http://schemas.microsoft.com/office/drawing/2010/main" xmlns:ma14="http://schemas.microsoft.com/office/mac/drawingml/2011/main" val="1"/>
             </a:ext>
           </a:extLst>
         </p:spPr>
@@ -14164,7 +14169,7 @@
           </a:ln>
           <a:extLst>
             <a:ext uri="{C572A759-6A51-4108-AA02-DFA0A04FC94B}">
-              <ma14:wrappingTextBoxFlag xmlns:ma14="http://schemas.microsoft.com/office/mac/drawingml/2011/main" xmlns:a14="http://schemas.microsoft.com/office/drawing/2010/main" xmlns:m="http://schemas.openxmlformats.org/officeDocument/2006/math" xmlns="" val="1"/>
+              <ma14:wrappingTextBoxFlag xmlns="" xmlns:m="http://schemas.openxmlformats.org/officeDocument/2006/math" xmlns:a14="http://schemas.microsoft.com/office/drawing/2010/main" xmlns:ma14="http://schemas.microsoft.com/office/mac/drawingml/2011/main" val="1"/>
             </a:ext>
           </a:extLst>
         </p:spPr>
@@ -14252,7 +14257,7 @@
           </a:ln>
           <a:extLst>
             <a:ext uri="{C572A759-6A51-4108-AA02-DFA0A04FC94B}">
-              <ma14:wrappingTextBoxFlag xmlns:ma14="http://schemas.microsoft.com/office/mac/drawingml/2011/main" xmlns:a14="http://schemas.microsoft.com/office/drawing/2010/main" xmlns:m="http://schemas.openxmlformats.org/officeDocument/2006/math" xmlns="" val="1"/>
+              <ma14:wrappingTextBoxFlag xmlns="" xmlns:m="http://schemas.openxmlformats.org/officeDocument/2006/math" xmlns:a14="http://schemas.microsoft.com/office/drawing/2010/main" xmlns:ma14="http://schemas.microsoft.com/office/mac/drawingml/2011/main" val="1"/>
             </a:ext>
           </a:extLst>
         </p:spPr>
@@ -14299,7 +14304,7 @@
           </a:ln>
           <a:extLst>
             <a:ext uri="{C572A759-6A51-4108-AA02-DFA0A04FC94B}">
-              <ma14:wrappingTextBoxFlag xmlns:ma14="http://schemas.microsoft.com/office/mac/drawingml/2011/main" xmlns:a14="http://schemas.microsoft.com/office/drawing/2010/main" xmlns:m="http://schemas.openxmlformats.org/officeDocument/2006/math" xmlns="" val="1"/>
+              <ma14:wrappingTextBoxFlag xmlns="" xmlns:m="http://schemas.openxmlformats.org/officeDocument/2006/math" xmlns:a14="http://schemas.microsoft.com/office/drawing/2010/main" xmlns:ma14="http://schemas.microsoft.com/office/mac/drawingml/2011/main" val="1"/>
             </a:ext>
           </a:extLst>
         </p:spPr>
@@ -14404,8 +14409,238 @@
                 <a:ea typeface="Helvetica" panose="020B0604020202020204" pitchFamily="34" charset="0"/>
                 <a:cs typeface="Helvetica" panose="020B0604020202020204" pitchFamily="34" charset="0"/>
               </a:rPr>
-              <a:t>: </a:t>
-            </a:r>
+              <a:t>:</a:t>
+            </a:r>
+            <a:endParaRPr lang="ko-KR" altLang="en-US" dirty="0"/>
+          </a:p>
+        </p:txBody>
+      </p:sp>
+      <p:sp>
+        <p:nvSpPr>
+          <p:cNvPr id="4" name="TextBox 3">
+            <a:extLst>
+              <a:ext uri="{FF2B5EF4-FFF2-40B4-BE49-F238E27FC236}">
+                <a16:creationId xmlns:a16="http://schemas.microsoft.com/office/drawing/2014/main" id="{D484C9F9-4827-C7BD-EF29-B94F2D166626}"/>
+              </a:ext>
+            </a:extLst>
+          </p:cNvPr>
+          <p:cNvSpPr txBox="1"/>
+          <p:nvPr/>
+        </p:nvSpPr>
+        <p:spPr>
+          <a:xfrm>
+            <a:off x="658368" y="3051937"/>
+            <a:ext cx="6102926" cy="369332"/>
+          </a:xfrm>
+          <a:prstGeom prst="rect">
+            <a:avLst/>
+          </a:prstGeom>
+          <a:noFill/>
+          <a:ln w="12700" cap="flat">
+            <a:noFill/>
+            <a:miter lim="400000"/>
+          </a:ln>
+          <a:effectLst/>
+          <a:sp3d/>
+        </p:spPr>
+        <p:style>
+          <a:lnRef idx="0">
+            <a:scrgbClr r="0" g="0" b="0"/>
+          </a:lnRef>
+          <a:fillRef idx="0">
+            <a:scrgbClr r="0" g="0" b="0"/>
+          </a:fillRef>
+          <a:effectRef idx="0">
+            <a:scrgbClr r="0" g="0" b="0"/>
+          </a:effectRef>
+          <a:fontRef idx="none"/>
+        </p:style>
+        <p:txBody>
+          <a:bodyPr wrap="square">
+            <a:spAutoFit/>
+          </a:bodyPr>
+          <a:lstStyle/>
+          <a:p>
+            <a:pPr marL="0" marR="0" indent="0" algn="l" rtl="0" fontAlgn="auto" latinLnBrk="0" hangingPunct="0">
+              <a:buNone/>
+            </a:pPr>
+            <a:r>
+              <a:rPr lang="ko-KR" altLang="en-US" sz="1800" b="0" i="0" spc="0" baseline="0" dirty="0">
+                <a:ln>
+                  <a:noFill/>
+                </a:ln>
+                <a:solidFill>
+                  <a:srgbClr val="000000"/>
+                </a:solidFill>
+                <a:effectLst/>
+                <a:latin typeface="Helvetica" panose="020B0604020202020204" pitchFamily="34" charset="0"/>
+                <a:ea typeface="Helvetica" panose="020B0604020202020204" pitchFamily="34" charset="0"/>
+                <a:cs typeface="Helvetica" panose="020B0604020202020204" pitchFamily="34" charset="0"/>
+              </a:rPr>
+              <a:t>스트림 웹 사이트 </a:t>
+            </a:r>
+            <a:r>
+              <a:rPr lang="en-US" altLang="ko-KR" sz="1800" b="0" i="0" spc="0" baseline="0" dirty="0">
+                <a:ln>
+                  <a:noFill/>
+                </a:ln>
+                <a:solidFill>
+                  <a:srgbClr val="000000"/>
+                </a:solidFill>
+                <a:effectLst/>
+                <a:latin typeface="Helvetica" panose="020B0604020202020204" pitchFamily="34" charset="0"/>
+                <a:ea typeface="Helvetica" panose="020B0604020202020204" pitchFamily="34" charset="0"/>
+                <a:cs typeface="Helvetica" panose="020B0604020202020204" pitchFamily="34" charset="0"/>
+              </a:rPr>
+              <a:t>:</a:t>
+            </a:r>
+            <a:endParaRPr lang="ko-KR" altLang="ko-KR" dirty="0">
+              <a:effectLst/>
+            </a:endParaRPr>
+          </a:p>
+        </p:txBody>
+      </p:sp>
+      <p:sp>
+        <p:nvSpPr>
+          <p:cNvPr id="6" name="TextBox 5">
+            <a:extLst>
+              <a:ext uri="{FF2B5EF4-FFF2-40B4-BE49-F238E27FC236}">
+                <a16:creationId xmlns:a16="http://schemas.microsoft.com/office/drawing/2014/main" id="{6682C089-CFF9-E71D-4597-70254DBF5EFC}"/>
+              </a:ext>
+            </a:extLst>
+          </p:cNvPr>
+          <p:cNvSpPr txBox="1"/>
+          <p:nvPr/>
+        </p:nvSpPr>
+        <p:spPr>
+          <a:xfrm>
+            <a:off x="786384" y="3452504"/>
+            <a:ext cx="6102926" cy="646331"/>
+          </a:xfrm>
+          <a:prstGeom prst="rect">
+            <a:avLst/>
+          </a:prstGeom>
+          <a:noFill/>
+          <a:ln w="12700" cap="flat">
+            <a:noFill/>
+            <a:miter lim="400000"/>
+          </a:ln>
+          <a:effectLst/>
+          <a:sp3d/>
+        </p:spPr>
+        <p:style>
+          <a:lnRef idx="0">
+            <a:scrgbClr r="0" g="0" b="0"/>
+          </a:lnRef>
+          <a:fillRef idx="0">
+            <a:scrgbClr r="0" g="0" b="0"/>
+          </a:fillRef>
+          <a:effectRef idx="0">
+            <a:scrgbClr r="0" g="0" b="0"/>
+          </a:effectRef>
+          <a:fontRef idx="none"/>
+        </p:style>
+        <p:txBody>
+          <a:bodyPr wrap="square">
+            <a:spAutoFit/>
+          </a:bodyPr>
+          <a:lstStyle/>
+          <a:p>
+            <a:r>
+              <a:rPr lang="ko-KR" altLang="ko-KR" sz="1800" b="0" i="0" spc="0" baseline="0" dirty="0">
+                <a:ln>
+                  <a:noFill/>
+                </a:ln>
+                <a:solidFill>
+                  <a:srgbClr val="000000"/>
+                </a:solidFill>
+                <a:effectLst/>
+                <a:latin typeface="Helvetica" panose="020B0604020202020204" pitchFamily="34" charset="0"/>
+                <a:ea typeface="Helvetica" panose="020B0604020202020204" pitchFamily="34" charset="0"/>
+                <a:cs typeface="Helvetica" panose="020B0604020202020204" pitchFamily="34" charset="0"/>
+              </a:rPr>
+              <a:t>https://algorithm-project-gonggang-planner</a:t>
+            </a:r>
+            <a:r>
+              <a:rPr lang="en-US" altLang="ko-KR" sz="1800" b="0" i="0" spc="0" baseline="0" dirty="0">
+                <a:ln>
+                  <a:noFill/>
+                </a:ln>
+                <a:solidFill>
+                  <a:srgbClr val="000000"/>
+                </a:solidFill>
+                <a:effectLst/>
+                <a:latin typeface="Helvetica" panose="020B0604020202020204" pitchFamily="34" charset="0"/>
+                <a:ea typeface="Helvetica" panose="020B0604020202020204" pitchFamily="34" charset="0"/>
+                <a:cs typeface="Helvetica" panose="020B0604020202020204" pitchFamily="34" charset="0"/>
+              </a:rPr>
+              <a:t>-</a:t>
+            </a:r>
+            <a:r>
+              <a:rPr lang="ko-KR" altLang="ko-KR" sz="1800" b="0" i="0" spc="0" baseline="0" dirty="0">
+                <a:ln>
+                  <a:noFill/>
+                </a:ln>
+                <a:solidFill>
+                  <a:srgbClr val="000000"/>
+                </a:solidFill>
+                <a:effectLst/>
+                <a:latin typeface="Helvetica" panose="020B0604020202020204" pitchFamily="34" charset="0"/>
+                <a:ea typeface="Helvetica" panose="020B0604020202020204" pitchFamily="34" charset="0"/>
+                <a:cs typeface="Helvetica" panose="020B0604020202020204" pitchFamily="34" charset="0"/>
+              </a:rPr>
+              <a:t>fgz6mblyh4evamb3ofqczp.streamlit.app</a:t>
+            </a:r>
+            <a:endParaRPr lang="ko-KR" altLang="en-US" dirty="0"/>
+          </a:p>
+        </p:txBody>
+      </p:sp>
+      <p:sp>
+        <p:nvSpPr>
+          <p:cNvPr id="8" name="TextBox 7">
+            <a:extLst>
+              <a:ext uri="{FF2B5EF4-FFF2-40B4-BE49-F238E27FC236}">
+                <a16:creationId xmlns:a16="http://schemas.microsoft.com/office/drawing/2014/main" id="{CFEC77B3-1B5D-F465-0A15-4E5A18EFD80D}"/>
+              </a:ext>
+            </a:extLst>
+          </p:cNvPr>
+          <p:cNvSpPr txBox="1"/>
+          <p:nvPr/>
+        </p:nvSpPr>
+        <p:spPr>
+          <a:xfrm>
+            <a:off x="786384" y="2290846"/>
+            <a:ext cx="6102926" cy="369332"/>
+          </a:xfrm>
+          <a:prstGeom prst="rect">
+            <a:avLst/>
+          </a:prstGeom>
+          <a:noFill/>
+          <a:ln w="12700" cap="flat">
+            <a:noFill/>
+            <a:miter lim="400000"/>
+          </a:ln>
+          <a:effectLst/>
+          <a:sp3d/>
+        </p:spPr>
+        <p:style>
+          <a:lnRef idx="0">
+            <a:scrgbClr r="0" g="0" b="0"/>
+          </a:lnRef>
+          <a:fillRef idx="0">
+            <a:scrgbClr r="0" g="0" b="0"/>
+          </a:fillRef>
+          <a:effectRef idx="0">
+            <a:scrgbClr r="0" g="0" b="0"/>
+          </a:effectRef>
+          <a:fontRef idx="none"/>
+        </p:style>
+        <p:txBody>
+          <a:bodyPr wrap="square">
+            <a:spAutoFit/>
+          </a:bodyPr>
+          <a:lstStyle/>
+          <a:p>
             <a:r>
               <a:rPr lang="ko-KR" altLang="ko-KR" sz="1800" b="0" i="0" spc="0" baseline="0" dirty="0">
                 <a:ln>
@@ -14511,7 +14746,7 @@
           </a:ln>
           <a:extLst>
             <a:ext uri="{C572A759-6A51-4108-AA02-DFA0A04FC94B}">
-              <ma14:wrappingTextBoxFlag xmlns:ma14="http://schemas.microsoft.com/office/mac/drawingml/2011/main" xmlns:a14="http://schemas.microsoft.com/office/drawing/2010/main" xmlns:m="http://schemas.openxmlformats.org/officeDocument/2006/math" xmlns="" val="1"/>
+              <ma14:wrappingTextBoxFlag xmlns="" xmlns:m="http://schemas.openxmlformats.org/officeDocument/2006/math" xmlns:a14="http://schemas.microsoft.com/office/drawing/2010/main" xmlns:ma14="http://schemas.microsoft.com/office/mac/drawingml/2011/main" val="1"/>
             </a:ext>
           </a:extLst>
         </p:spPr>
@@ -14558,7 +14793,7 @@
           </a:ln>
           <a:extLst>
             <a:ext uri="{C572A759-6A51-4108-AA02-DFA0A04FC94B}">
-              <ma14:wrappingTextBoxFlag xmlns:ma14="http://schemas.microsoft.com/office/mac/drawingml/2011/main" xmlns:a14="http://schemas.microsoft.com/office/drawing/2010/main" xmlns:m="http://schemas.openxmlformats.org/officeDocument/2006/math" xmlns="" val="1"/>
+              <ma14:wrappingTextBoxFlag xmlns="" xmlns:m="http://schemas.openxmlformats.org/officeDocument/2006/math" xmlns:a14="http://schemas.microsoft.com/office/drawing/2010/main" xmlns:ma14="http://schemas.microsoft.com/office/mac/drawingml/2011/main" val="1"/>
             </a:ext>
           </a:extLst>
         </p:spPr>
@@ -14605,7 +14840,7 @@
           </a:ln>
           <a:extLst>
             <a:ext uri="{C572A759-6A51-4108-AA02-DFA0A04FC94B}">
-              <ma14:wrappingTextBoxFlag xmlns:ma14="http://schemas.microsoft.com/office/mac/drawingml/2011/main" xmlns:a14="http://schemas.microsoft.com/office/drawing/2010/main" xmlns:m="http://schemas.openxmlformats.org/officeDocument/2006/math" xmlns="" val="1"/>
+              <ma14:wrappingTextBoxFlag xmlns="" xmlns:m="http://schemas.openxmlformats.org/officeDocument/2006/math" xmlns:a14="http://schemas.microsoft.com/office/drawing/2010/main" xmlns:ma14="http://schemas.microsoft.com/office/mac/drawingml/2011/main" val="1"/>
             </a:ext>
           </a:extLst>
         </p:spPr>
@@ -14740,7 +14975,7 @@
           </a:ln>
           <a:extLst>
             <a:ext uri="{C572A759-6A51-4108-AA02-DFA0A04FC94B}">
-              <ma14:wrappingTextBoxFlag xmlns:ma14="http://schemas.microsoft.com/office/mac/drawingml/2011/main" xmlns:a14="http://schemas.microsoft.com/office/drawing/2010/main" xmlns:m="http://schemas.openxmlformats.org/officeDocument/2006/math" xmlns="" val="1"/>
+              <ma14:wrappingTextBoxFlag xmlns="" xmlns:m="http://schemas.openxmlformats.org/officeDocument/2006/math" xmlns:a14="http://schemas.microsoft.com/office/drawing/2010/main" xmlns:ma14="http://schemas.microsoft.com/office/mac/drawingml/2011/main" val="1"/>
             </a:ext>
           </a:extLst>
         </p:spPr>
@@ -14795,7 +15030,7 @@
           </a:ln>
           <a:extLst>
             <a:ext uri="{C572A759-6A51-4108-AA02-DFA0A04FC94B}">
-              <ma14:wrappingTextBoxFlag xmlns:ma14="http://schemas.microsoft.com/office/mac/drawingml/2011/main" xmlns:a14="http://schemas.microsoft.com/office/drawing/2010/main" xmlns:m="http://schemas.openxmlformats.org/officeDocument/2006/math" xmlns="" val="1"/>
+              <ma14:wrappingTextBoxFlag xmlns="" xmlns:m="http://schemas.openxmlformats.org/officeDocument/2006/math" xmlns:a14="http://schemas.microsoft.com/office/drawing/2010/main" xmlns:ma14="http://schemas.microsoft.com/office/mac/drawingml/2011/main" val="1"/>
             </a:ext>
           </a:extLst>
         </p:spPr>
@@ -14883,7 +15118,7 @@
           </a:ln>
           <a:extLst>
             <a:ext uri="{C572A759-6A51-4108-AA02-DFA0A04FC94B}">
-              <ma14:wrappingTextBoxFlag xmlns:ma14="http://schemas.microsoft.com/office/mac/drawingml/2011/main" xmlns:a14="http://schemas.microsoft.com/office/drawing/2010/main" xmlns:m="http://schemas.openxmlformats.org/officeDocument/2006/math" xmlns="" val="1"/>
+              <ma14:wrappingTextBoxFlag xmlns="" xmlns:m="http://schemas.openxmlformats.org/officeDocument/2006/math" xmlns:a14="http://schemas.microsoft.com/office/drawing/2010/main" xmlns:ma14="http://schemas.microsoft.com/office/mac/drawingml/2011/main" val="1"/>
             </a:ext>
           </a:extLst>
         </p:spPr>
@@ -14930,7 +15165,7 @@
           </a:ln>
           <a:extLst>
             <a:ext uri="{C572A759-6A51-4108-AA02-DFA0A04FC94B}">
-              <ma14:wrappingTextBoxFlag xmlns:ma14="http://schemas.microsoft.com/office/mac/drawingml/2011/main" xmlns:a14="http://schemas.microsoft.com/office/drawing/2010/main" xmlns:m="http://schemas.openxmlformats.org/officeDocument/2006/math" xmlns="" val="1"/>
+              <ma14:wrappingTextBoxFlag xmlns="" xmlns:m="http://schemas.openxmlformats.org/officeDocument/2006/math" xmlns:a14="http://schemas.microsoft.com/office/drawing/2010/main" xmlns:ma14="http://schemas.microsoft.com/office/mac/drawingml/2011/main" val="1"/>
             </a:ext>
           </a:extLst>
         </p:spPr>
@@ -14977,7 +15212,7 @@
           </a:ln>
           <a:extLst>
             <a:ext uri="{C572A759-6A51-4108-AA02-DFA0A04FC94B}">
-              <ma14:wrappingTextBoxFlag xmlns:ma14="http://schemas.microsoft.com/office/mac/drawingml/2011/main" xmlns:a14="http://schemas.microsoft.com/office/drawing/2010/main" xmlns:m="http://schemas.openxmlformats.org/officeDocument/2006/math" xmlns="" val="1"/>
+              <ma14:wrappingTextBoxFlag xmlns="" xmlns:m="http://schemas.openxmlformats.org/officeDocument/2006/math" xmlns:a14="http://schemas.microsoft.com/office/drawing/2010/main" xmlns:ma14="http://schemas.microsoft.com/office/mac/drawingml/2011/main" val="1"/>
             </a:ext>
           </a:extLst>
         </p:spPr>
@@ -15080,7 +15315,7 @@
           </a:ln>
           <a:extLst>
             <a:ext uri="{C572A759-6A51-4108-AA02-DFA0A04FC94B}">
-              <ma14:wrappingTextBoxFlag xmlns:ma14="http://schemas.microsoft.com/office/mac/drawingml/2011/main" xmlns:a14="http://schemas.microsoft.com/office/drawing/2010/main" xmlns:m="http://schemas.openxmlformats.org/officeDocument/2006/math" xmlns="" val="1"/>
+              <ma14:wrappingTextBoxFlag xmlns="" xmlns:m="http://schemas.openxmlformats.org/officeDocument/2006/math" xmlns:a14="http://schemas.microsoft.com/office/drawing/2010/main" xmlns:ma14="http://schemas.microsoft.com/office/mac/drawingml/2011/main" val="1"/>
             </a:ext>
           </a:extLst>
         </p:spPr>
@@ -15127,7 +15362,7 @@
           </a:ln>
           <a:extLst>
             <a:ext uri="{C572A759-6A51-4108-AA02-DFA0A04FC94B}">
-              <ma14:wrappingTextBoxFlag xmlns:ma14="http://schemas.microsoft.com/office/mac/drawingml/2011/main" xmlns:a14="http://schemas.microsoft.com/office/drawing/2010/main" xmlns:m="http://schemas.openxmlformats.org/officeDocument/2006/math" xmlns="" val="1"/>
+              <ma14:wrappingTextBoxFlag xmlns="" xmlns:m="http://schemas.openxmlformats.org/officeDocument/2006/math" xmlns:a14="http://schemas.microsoft.com/office/drawing/2010/main" xmlns:ma14="http://schemas.microsoft.com/office/mac/drawingml/2011/main" val="1"/>
             </a:ext>
           </a:extLst>
         </p:spPr>
@@ -15246,7 +15481,7 @@
           </a:ln>
           <a:extLst>
             <a:ext uri="{C572A759-6A51-4108-AA02-DFA0A04FC94B}">
-              <ma14:wrappingTextBoxFlag xmlns:ma14="http://schemas.microsoft.com/office/mac/drawingml/2011/main" xmlns:a14="http://schemas.microsoft.com/office/drawing/2010/main" xmlns:m="http://schemas.openxmlformats.org/officeDocument/2006/math" xmlns="" val="1"/>
+              <ma14:wrappingTextBoxFlag xmlns="" xmlns:m="http://schemas.openxmlformats.org/officeDocument/2006/math" xmlns:a14="http://schemas.microsoft.com/office/drawing/2010/main" xmlns:ma14="http://schemas.microsoft.com/office/mac/drawingml/2011/main" val="1"/>
             </a:ext>
           </a:extLst>
         </p:spPr>
@@ -15293,7 +15528,7 @@
           </a:ln>
           <a:extLst>
             <a:ext uri="{C572A759-6A51-4108-AA02-DFA0A04FC94B}">
-              <ma14:wrappingTextBoxFlag xmlns:ma14="http://schemas.microsoft.com/office/mac/drawingml/2011/main" xmlns:a14="http://schemas.microsoft.com/office/drawing/2010/main" xmlns:m="http://schemas.openxmlformats.org/officeDocument/2006/math" xmlns="" val="1"/>
+              <ma14:wrappingTextBoxFlag xmlns="" xmlns:m="http://schemas.openxmlformats.org/officeDocument/2006/math" xmlns:a14="http://schemas.microsoft.com/office/drawing/2010/main" xmlns:ma14="http://schemas.microsoft.com/office/mac/drawingml/2011/main" val="1"/>
             </a:ext>
           </a:extLst>
         </p:spPr>
@@ -15380,7 +15615,7 @@
           </a:ln>
           <a:extLst>
             <a:ext uri="{C572A759-6A51-4108-AA02-DFA0A04FC94B}">
-              <ma14:wrappingTextBoxFlag xmlns:ma14="http://schemas.microsoft.com/office/mac/drawingml/2011/main" xmlns:a14="http://schemas.microsoft.com/office/drawing/2010/main" xmlns:m="http://schemas.openxmlformats.org/officeDocument/2006/math" xmlns="" val="1"/>
+              <ma14:wrappingTextBoxFlag xmlns="" xmlns:m="http://schemas.openxmlformats.org/officeDocument/2006/math" xmlns:a14="http://schemas.microsoft.com/office/drawing/2010/main" xmlns:ma14="http://schemas.microsoft.com/office/mac/drawingml/2011/main" val="1"/>
             </a:ext>
           </a:extLst>
         </p:spPr>
@@ -15494,7 +15729,7 @@
           </a:ln>
           <a:extLst>
             <a:ext uri="{C572A759-6A51-4108-AA02-DFA0A04FC94B}">
-              <ma14:wrappingTextBoxFlag xmlns:ma14="http://schemas.microsoft.com/office/mac/drawingml/2011/main" xmlns:a14="http://schemas.microsoft.com/office/drawing/2010/main" xmlns:m="http://schemas.openxmlformats.org/officeDocument/2006/math" xmlns="" val="1"/>
+              <ma14:wrappingTextBoxFlag xmlns="" xmlns:m="http://schemas.openxmlformats.org/officeDocument/2006/math" xmlns:a14="http://schemas.microsoft.com/office/drawing/2010/main" xmlns:ma14="http://schemas.microsoft.com/office/mac/drawingml/2011/main" val="1"/>
             </a:ext>
           </a:extLst>
         </p:spPr>
@@ -15541,7 +15776,7 @@
           </a:ln>
           <a:extLst>
             <a:ext uri="{C572A759-6A51-4108-AA02-DFA0A04FC94B}">
-              <ma14:wrappingTextBoxFlag xmlns:ma14="http://schemas.microsoft.com/office/mac/drawingml/2011/main" xmlns:a14="http://schemas.microsoft.com/office/drawing/2010/main" xmlns:m="http://schemas.openxmlformats.org/officeDocument/2006/math" xmlns="" val="1"/>
+              <ma14:wrappingTextBoxFlag xmlns="" xmlns:m="http://schemas.openxmlformats.org/officeDocument/2006/math" xmlns:a14="http://schemas.microsoft.com/office/drawing/2010/main" xmlns:ma14="http://schemas.microsoft.com/office/mac/drawingml/2011/main" val="1"/>
             </a:ext>
           </a:extLst>
         </p:spPr>
@@ -15588,7 +15823,7 @@
           </a:ln>
           <a:extLst>
             <a:ext uri="{C572A759-6A51-4108-AA02-DFA0A04FC94B}">
-              <ma14:wrappingTextBoxFlag xmlns:ma14="http://schemas.microsoft.com/office/mac/drawingml/2011/main" xmlns:a14="http://schemas.microsoft.com/office/drawing/2010/main" xmlns:m="http://schemas.openxmlformats.org/officeDocument/2006/math" xmlns="" val="1"/>
+              <ma14:wrappingTextBoxFlag xmlns="" xmlns:m="http://schemas.openxmlformats.org/officeDocument/2006/math" xmlns:a14="http://schemas.microsoft.com/office/drawing/2010/main" xmlns:ma14="http://schemas.microsoft.com/office/mac/drawingml/2011/main" val="1"/>
             </a:ext>
           </a:extLst>
         </p:spPr>
@@ -15723,7 +15958,7 @@
           </a:ln>
           <a:extLst>
             <a:ext uri="{C572A759-6A51-4108-AA02-DFA0A04FC94B}">
-              <ma14:wrappingTextBoxFlag xmlns:ma14="http://schemas.microsoft.com/office/mac/drawingml/2011/main" xmlns:a14="http://schemas.microsoft.com/office/drawing/2010/main" xmlns:m="http://schemas.openxmlformats.org/officeDocument/2006/math" xmlns="" val="1"/>
+              <ma14:wrappingTextBoxFlag xmlns="" xmlns:m="http://schemas.openxmlformats.org/officeDocument/2006/math" xmlns:a14="http://schemas.microsoft.com/office/drawing/2010/main" xmlns:ma14="http://schemas.microsoft.com/office/mac/drawingml/2011/main" val="1"/>
             </a:ext>
           </a:extLst>
         </p:spPr>
@@ -15778,7 +16013,7 @@
           </a:ln>
           <a:extLst>
             <a:ext uri="{C572A759-6A51-4108-AA02-DFA0A04FC94B}">
-              <ma14:wrappingTextBoxFlag xmlns:ma14="http://schemas.microsoft.com/office/mac/drawingml/2011/main" xmlns:a14="http://schemas.microsoft.com/office/drawing/2010/main" xmlns:m="http://schemas.openxmlformats.org/officeDocument/2006/math" xmlns="" val="1"/>
+              <ma14:wrappingTextBoxFlag xmlns="" xmlns:m="http://schemas.openxmlformats.org/officeDocument/2006/math" xmlns:a14="http://schemas.microsoft.com/office/drawing/2010/main" xmlns:ma14="http://schemas.microsoft.com/office/mac/drawingml/2011/main" val="1"/>
             </a:ext>
           </a:extLst>
         </p:spPr>
@@ -15866,7 +16101,7 @@
           </a:ln>
           <a:extLst>
             <a:ext uri="{C572A759-6A51-4108-AA02-DFA0A04FC94B}">
-              <ma14:wrappingTextBoxFlag xmlns:ma14="http://schemas.microsoft.com/office/mac/drawingml/2011/main" xmlns:a14="http://schemas.microsoft.com/office/drawing/2010/main" xmlns:m="http://schemas.openxmlformats.org/officeDocument/2006/math" xmlns="" val="1"/>
+              <ma14:wrappingTextBoxFlag xmlns="" xmlns:m="http://schemas.openxmlformats.org/officeDocument/2006/math" xmlns:a14="http://schemas.microsoft.com/office/drawing/2010/main" xmlns:ma14="http://schemas.microsoft.com/office/mac/drawingml/2011/main" val="1"/>
             </a:ext>
           </a:extLst>
         </p:spPr>
@@ -15913,7 +16148,7 @@
           </a:ln>
           <a:extLst>
             <a:ext uri="{C572A759-6A51-4108-AA02-DFA0A04FC94B}">
-              <ma14:wrappingTextBoxFlag xmlns:ma14="http://schemas.microsoft.com/office/mac/drawingml/2011/main" xmlns:a14="http://schemas.microsoft.com/office/drawing/2010/main" xmlns:m="http://schemas.openxmlformats.org/officeDocument/2006/math" xmlns="" val="1"/>
+              <ma14:wrappingTextBoxFlag xmlns="" xmlns:m="http://schemas.openxmlformats.org/officeDocument/2006/math" xmlns:a14="http://schemas.microsoft.com/office/drawing/2010/main" xmlns:ma14="http://schemas.microsoft.com/office/mac/drawingml/2011/main" val="1"/>
             </a:ext>
           </a:extLst>
         </p:spPr>
@@ -16001,7 +16236,7 @@
           </a:ln>
           <a:extLst>
             <a:ext uri="{C572A759-6A51-4108-AA02-DFA0A04FC94B}">
-              <ma14:wrappingTextBoxFlag xmlns:ma14="http://schemas.microsoft.com/office/mac/drawingml/2011/main" xmlns:a14="http://schemas.microsoft.com/office/drawing/2010/main" xmlns:m="http://schemas.openxmlformats.org/officeDocument/2006/math" xmlns="" val="1"/>
+              <ma14:wrappingTextBoxFlag xmlns="" xmlns:m="http://schemas.openxmlformats.org/officeDocument/2006/math" xmlns:a14="http://schemas.microsoft.com/office/drawing/2010/main" xmlns:ma14="http://schemas.microsoft.com/office/mac/drawingml/2011/main" val="1"/>
             </a:ext>
           </a:extLst>
         </p:spPr>
@@ -16048,7 +16283,7 @@
           </a:ln>
           <a:extLst>
             <a:ext uri="{C572A759-6A51-4108-AA02-DFA0A04FC94B}">
-              <ma14:wrappingTextBoxFlag xmlns:ma14="http://schemas.microsoft.com/office/mac/drawingml/2011/main" xmlns:a14="http://schemas.microsoft.com/office/drawing/2010/main" xmlns:m="http://schemas.openxmlformats.org/officeDocument/2006/math" xmlns="" val="1"/>
+              <ma14:wrappingTextBoxFlag xmlns="" xmlns:m="http://schemas.openxmlformats.org/officeDocument/2006/math" xmlns:a14="http://schemas.microsoft.com/office/drawing/2010/main" xmlns:ma14="http://schemas.microsoft.com/office/mac/drawingml/2011/main" val="1"/>
             </a:ext>
           </a:extLst>
         </p:spPr>
@@ -16109,7 +16344,7 @@
           </a:ln>
           <a:extLst>
             <a:ext uri="{C572A759-6A51-4108-AA02-DFA0A04FC94B}">
-              <ma14:wrappingTextBoxFlag xmlns:ma14="http://schemas.microsoft.com/office/mac/drawingml/2011/main" xmlns:a14="http://schemas.microsoft.com/office/drawing/2010/main" xmlns:m="http://schemas.openxmlformats.org/officeDocument/2006/math" xmlns="" val="1"/>
+              <ma14:wrappingTextBoxFlag xmlns="" xmlns:m="http://schemas.openxmlformats.org/officeDocument/2006/math" xmlns:a14="http://schemas.microsoft.com/office/drawing/2010/main" xmlns:ma14="http://schemas.microsoft.com/office/mac/drawingml/2011/main" val="1"/>
             </a:ext>
           </a:extLst>
         </p:spPr>
@@ -16223,7 +16458,7 @@
           </a:ln>
           <a:extLst>
             <a:ext uri="{C572A759-6A51-4108-AA02-DFA0A04FC94B}">
-              <ma14:wrappingTextBoxFlag xmlns:ma14="http://schemas.microsoft.com/office/mac/drawingml/2011/main" xmlns:a14="http://schemas.microsoft.com/office/drawing/2010/main" xmlns:m="http://schemas.openxmlformats.org/officeDocument/2006/math" xmlns="" val="1"/>
+              <ma14:wrappingTextBoxFlag xmlns="" xmlns:m="http://schemas.openxmlformats.org/officeDocument/2006/math" xmlns:a14="http://schemas.microsoft.com/office/drawing/2010/main" xmlns:ma14="http://schemas.microsoft.com/office/mac/drawingml/2011/main" val="1"/>
             </a:ext>
           </a:extLst>
         </p:spPr>
@@ -16270,7 +16505,7 @@
           </a:ln>
           <a:extLst>
             <a:ext uri="{C572A759-6A51-4108-AA02-DFA0A04FC94B}">
-              <ma14:wrappingTextBoxFlag xmlns:ma14="http://schemas.microsoft.com/office/mac/drawingml/2011/main" xmlns:a14="http://schemas.microsoft.com/office/drawing/2010/main" xmlns:m="http://schemas.openxmlformats.org/officeDocument/2006/math" xmlns="" val="1"/>
+              <ma14:wrappingTextBoxFlag xmlns="" xmlns:m="http://schemas.openxmlformats.org/officeDocument/2006/math" xmlns:a14="http://schemas.microsoft.com/office/drawing/2010/main" xmlns:ma14="http://schemas.microsoft.com/office/mac/drawingml/2011/main" val="1"/>
             </a:ext>
           </a:extLst>
         </p:spPr>
@@ -16320,7 +16555,7 @@
           </a:ln>
           <a:extLst>
             <a:ext uri="{C572A759-6A51-4108-AA02-DFA0A04FC94B}">
-              <ma14:wrappingTextBoxFlag xmlns:ma14="http://schemas.microsoft.com/office/mac/drawingml/2011/main" xmlns:a14="http://schemas.microsoft.com/office/drawing/2010/main" xmlns:m="http://schemas.openxmlformats.org/officeDocument/2006/math" xmlns="" val="1"/>
+              <ma14:wrappingTextBoxFlag xmlns="" xmlns:m="http://schemas.openxmlformats.org/officeDocument/2006/math" xmlns:a14="http://schemas.microsoft.com/office/drawing/2010/main" xmlns:ma14="http://schemas.microsoft.com/office/mac/drawingml/2011/main" val="1"/>
             </a:ext>
           </a:extLst>
         </p:spPr>
@@ -16411,7 +16646,7 @@
           </a:ln>
           <a:extLst>
             <a:ext uri="{C572A759-6A51-4108-AA02-DFA0A04FC94B}">
-              <ma14:wrappingTextBoxFlag xmlns:ma14="http://schemas.microsoft.com/office/mac/drawingml/2011/main" xmlns:a14="http://schemas.microsoft.com/office/drawing/2010/main" xmlns:m="http://schemas.openxmlformats.org/officeDocument/2006/math" xmlns="" val="1"/>
+              <ma14:wrappingTextBoxFlag xmlns="" xmlns:m="http://schemas.openxmlformats.org/officeDocument/2006/math" xmlns:a14="http://schemas.microsoft.com/office/drawing/2010/main" xmlns:ma14="http://schemas.microsoft.com/office/mac/drawingml/2011/main" val="1"/>
             </a:ext>
           </a:extLst>
         </p:spPr>
@@ -16458,7 +16693,7 @@
           </a:ln>
           <a:extLst>
             <a:ext uri="{C572A759-6A51-4108-AA02-DFA0A04FC94B}">
-              <ma14:wrappingTextBoxFlag xmlns:ma14="http://schemas.microsoft.com/office/mac/drawingml/2011/main" xmlns:a14="http://schemas.microsoft.com/office/drawing/2010/main" xmlns:m="http://schemas.openxmlformats.org/officeDocument/2006/math" xmlns="" val="1"/>
+              <ma14:wrappingTextBoxFlag xmlns="" xmlns:m="http://schemas.openxmlformats.org/officeDocument/2006/math" xmlns:a14="http://schemas.microsoft.com/office/drawing/2010/main" xmlns:ma14="http://schemas.microsoft.com/office/mac/drawingml/2011/main" val="1"/>
             </a:ext>
           </a:extLst>
         </p:spPr>
@@ -16508,7 +16743,7 @@
           </a:ln>
           <a:extLst>
             <a:ext uri="{C572A759-6A51-4108-AA02-DFA0A04FC94B}">
-              <ma14:wrappingTextBoxFlag xmlns:ma14="http://schemas.microsoft.com/office/mac/drawingml/2011/main" xmlns:a14="http://schemas.microsoft.com/office/drawing/2010/main" xmlns:m="http://schemas.openxmlformats.org/officeDocument/2006/math" xmlns="" val="1"/>
+              <ma14:wrappingTextBoxFlag xmlns="" xmlns:m="http://schemas.openxmlformats.org/officeDocument/2006/math" xmlns:a14="http://schemas.microsoft.com/office/drawing/2010/main" xmlns:ma14="http://schemas.microsoft.com/office/mac/drawingml/2011/main" val="1"/>
             </a:ext>
           </a:extLst>
         </p:spPr>
@@ -16610,7 +16845,7 @@
           </a:ln>
           <a:extLst>
             <a:ext uri="{C572A759-6A51-4108-AA02-DFA0A04FC94B}">
-              <ma14:wrappingTextBoxFlag xmlns:ma14="http://schemas.microsoft.com/office/mac/drawingml/2011/main" xmlns:a14="http://schemas.microsoft.com/office/drawing/2010/main" xmlns:m="http://schemas.openxmlformats.org/officeDocument/2006/math" xmlns="" val="1"/>
+              <ma14:wrappingTextBoxFlag xmlns="" xmlns:m="http://schemas.openxmlformats.org/officeDocument/2006/math" xmlns:a14="http://schemas.microsoft.com/office/drawing/2010/main" xmlns:ma14="http://schemas.microsoft.com/office/mac/drawingml/2011/main" val="1"/>
             </a:ext>
           </a:extLst>
         </p:spPr>
@@ -16657,7 +16892,7 @@
           </a:ln>
           <a:extLst>
             <a:ext uri="{C572A759-6A51-4108-AA02-DFA0A04FC94B}">
-              <ma14:wrappingTextBoxFlag xmlns:ma14="http://schemas.microsoft.com/office/mac/drawingml/2011/main" xmlns:a14="http://schemas.microsoft.com/office/drawing/2010/main" xmlns:m="http://schemas.openxmlformats.org/officeDocument/2006/math" xmlns="" val="1"/>
+              <ma14:wrappingTextBoxFlag xmlns="" xmlns:m="http://schemas.openxmlformats.org/officeDocument/2006/math" xmlns:a14="http://schemas.microsoft.com/office/drawing/2010/main" xmlns:ma14="http://schemas.microsoft.com/office/mac/drawingml/2011/main" val="1"/>
             </a:ext>
           </a:extLst>
         </p:spPr>
@@ -16715,7 +16950,7 @@
           </a:ln>
           <a:extLst>
             <a:ext uri="{C572A759-6A51-4108-AA02-DFA0A04FC94B}">
-              <ma14:wrappingTextBoxFlag xmlns:ma14="http://schemas.microsoft.com/office/mac/drawingml/2011/main" xmlns:a14="http://schemas.microsoft.com/office/drawing/2010/main" xmlns:m="http://schemas.openxmlformats.org/officeDocument/2006/math" xmlns="" val="1"/>
+              <ma14:wrappingTextBoxFlag xmlns="" xmlns:m="http://schemas.openxmlformats.org/officeDocument/2006/math" xmlns:a14="http://schemas.microsoft.com/office/drawing/2010/main" xmlns:ma14="http://schemas.microsoft.com/office/mac/drawingml/2011/main" val="1"/>
             </a:ext>
           </a:extLst>
         </p:spPr>
@@ -16817,7 +17052,7 @@
           </a:ln>
           <a:extLst>
             <a:ext uri="{C572A759-6A51-4108-AA02-DFA0A04FC94B}">
-              <ma14:wrappingTextBoxFlag xmlns:ma14="http://schemas.microsoft.com/office/mac/drawingml/2011/main" xmlns:a14="http://schemas.microsoft.com/office/drawing/2010/main" xmlns:m="http://schemas.openxmlformats.org/officeDocument/2006/math" xmlns="" val="1"/>
+              <ma14:wrappingTextBoxFlag xmlns="" xmlns:m="http://schemas.openxmlformats.org/officeDocument/2006/math" xmlns:a14="http://schemas.microsoft.com/office/drawing/2010/main" xmlns:ma14="http://schemas.microsoft.com/office/mac/drawingml/2011/main" val="1"/>
             </a:ext>
           </a:extLst>
         </p:spPr>
@@ -16864,7 +17099,7 @@
           </a:ln>
           <a:extLst>
             <a:ext uri="{C572A759-6A51-4108-AA02-DFA0A04FC94B}">
-              <ma14:wrappingTextBoxFlag xmlns:ma14="http://schemas.microsoft.com/office/mac/drawingml/2011/main" xmlns:a14="http://schemas.microsoft.com/office/drawing/2010/main" xmlns:m="http://schemas.openxmlformats.org/officeDocument/2006/math" xmlns="" val="1"/>
+              <ma14:wrappingTextBoxFlag xmlns="" xmlns:m="http://schemas.openxmlformats.org/officeDocument/2006/math" xmlns:a14="http://schemas.microsoft.com/office/drawing/2010/main" xmlns:ma14="http://schemas.microsoft.com/office/mac/drawingml/2011/main" val="1"/>
             </a:ext>
           </a:extLst>
         </p:spPr>
@@ -16925,7 +17160,7 @@
           </a:ln>
           <a:extLst>
             <a:ext uri="{C572A759-6A51-4108-AA02-DFA0A04FC94B}">
-              <ma14:wrappingTextBoxFlag xmlns:ma14="http://schemas.microsoft.com/office/mac/drawingml/2011/main" xmlns:a14="http://schemas.microsoft.com/office/drawing/2010/main" xmlns:m="http://schemas.openxmlformats.org/officeDocument/2006/math" xmlns="" val="1"/>
+              <ma14:wrappingTextBoxFlag xmlns="" xmlns:m="http://schemas.openxmlformats.org/officeDocument/2006/math" xmlns:a14="http://schemas.microsoft.com/office/drawing/2010/main" xmlns:ma14="http://schemas.microsoft.com/office/mac/drawingml/2011/main" val="1"/>
             </a:ext>
           </a:extLst>
         </p:spPr>
@@ -17027,7 +17262,7 @@
           </a:ln>
           <a:extLst>
             <a:ext uri="{C572A759-6A51-4108-AA02-DFA0A04FC94B}">
-              <ma14:wrappingTextBoxFlag xmlns:ma14="http://schemas.microsoft.com/office/mac/drawingml/2011/main" xmlns:a14="http://schemas.microsoft.com/office/drawing/2010/main" xmlns:m="http://schemas.openxmlformats.org/officeDocument/2006/math" xmlns="" val="1"/>
+              <ma14:wrappingTextBoxFlag xmlns="" xmlns:m="http://schemas.openxmlformats.org/officeDocument/2006/math" xmlns:a14="http://schemas.microsoft.com/office/drawing/2010/main" xmlns:ma14="http://schemas.microsoft.com/office/mac/drawingml/2011/main" val="1"/>
             </a:ext>
           </a:extLst>
         </p:spPr>
@@ -17074,7 +17309,7 @@
           </a:ln>
           <a:extLst>
             <a:ext uri="{C572A759-6A51-4108-AA02-DFA0A04FC94B}">
-              <ma14:wrappingTextBoxFlag xmlns:ma14="http://schemas.microsoft.com/office/mac/drawingml/2011/main" xmlns:a14="http://schemas.microsoft.com/office/drawing/2010/main" xmlns:m="http://schemas.openxmlformats.org/officeDocument/2006/math" xmlns="" val="1"/>
+              <ma14:wrappingTextBoxFlag xmlns="" xmlns:m="http://schemas.openxmlformats.org/officeDocument/2006/math" xmlns:a14="http://schemas.microsoft.com/office/drawing/2010/main" xmlns:ma14="http://schemas.microsoft.com/office/mac/drawingml/2011/main" val="1"/>
             </a:ext>
           </a:extLst>
         </p:spPr>
@@ -17135,7 +17370,7 @@
           </a:ln>
           <a:extLst>
             <a:ext uri="{C572A759-6A51-4108-AA02-DFA0A04FC94B}">
-              <ma14:wrappingTextBoxFlag xmlns:ma14="http://schemas.microsoft.com/office/mac/drawingml/2011/main" xmlns:a14="http://schemas.microsoft.com/office/drawing/2010/main" xmlns:m="http://schemas.openxmlformats.org/officeDocument/2006/math" xmlns="" val="1"/>
+              <ma14:wrappingTextBoxFlag xmlns="" xmlns:m="http://schemas.openxmlformats.org/officeDocument/2006/math" xmlns:a14="http://schemas.microsoft.com/office/drawing/2010/main" xmlns:ma14="http://schemas.microsoft.com/office/mac/drawingml/2011/main" val="1"/>
             </a:ext>
           </a:extLst>
         </p:spPr>
@@ -17237,7 +17472,7 @@
           </a:ln>
           <a:extLst>
             <a:ext uri="{C572A759-6A51-4108-AA02-DFA0A04FC94B}">
-              <ma14:wrappingTextBoxFlag xmlns:ma14="http://schemas.microsoft.com/office/mac/drawingml/2011/main" xmlns:a14="http://schemas.microsoft.com/office/drawing/2010/main" xmlns:m="http://schemas.openxmlformats.org/officeDocument/2006/math" xmlns="" val="1"/>
+              <ma14:wrappingTextBoxFlag xmlns="" xmlns:m="http://schemas.openxmlformats.org/officeDocument/2006/math" xmlns:a14="http://schemas.microsoft.com/office/drawing/2010/main" xmlns:ma14="http://schemas.microsoft.com/office/mac/drawingml/2011/main" val="1"/>
             </a:ext>
           </a:extLst>
         </p:spPr>
@@ -17284,7 +17519,7 @@
           </a:ln>
           <a:extLst>
             <a:ext uri="{C572A759-6A51-4108-AA02-DFA0A04FC94B}">
-              <ma14:wrappingTextBoxFlag xmlns:ma14="http://schemas.microsoft.com/office/mac/drawingml/2011/main" xmlns:a14="http://schemas.microsoft.com/office/drawing/2010/main" xmlns:m="http://schemas.openxmlformats.org/officeDocument/2006/math" xmlns="" val="1"/>
+              <ma14:wrappingTextBoxFlag xmlns="" xmlns:m="http://schemas.openxmlformats.org/officeDocument/2006/math" xmlns:a14="http://schemas.microsoft.com/office/drawing/2010/main" xmlns:ma14="http://schemas.microsoft.com/office/mac/drawingml/2011/main" val="1"/>
             </a:ext>
           </a:extLst>
         </p:spPr>
@@ -17345,7 +17580,7 @@
           </a:ln>
           <a:extLst>
             <a:ext uri="{C572A759-6A51-4108-AA02-DFA0A04FC94B}">
-              <ma14:wrappingTextBoxFlag xmlns:ma14="http://schemas.microsoft.com/office/mac/drawingml/2011/main" xmlns:a14="http://schemas.microsoft.com/office/drawing/2010/main" xmlns:m="http://schemas.openxmlformats.org/officeDocument/2006/math" xmlns="" val="1"/>
+              <ma14:wrappingTextBoxFlag xmlns="" xmlns:m="http://schemas.openxmlformats.org/officeDocument/2006/math" xmlns:a14="http://schemas.microsoft.com/office/drawing/2010/main" xmlns:ma14="http://schemas.microsoft.com/office/mac/drawingml/2011/main" val="1"/>
             </a:ext>
           </a:extLst>
         </p:spPr>
@@ -17447,7 +17682,7 @@
           </a:ln>
           <a:extLst>
             <a:ext uri="{C572A759-6A51-4108-AA02-DFA0A04FC94B}">
-              <ma14:wrappingTextBoxFlag xmlns:ma14="http://schemas.microsoft.com/office/mac/drawingml/2011/main" xmlns:a14="http://schemas.microsoft.com/office/drawing/2010/main" xmlns:m="http://schemas.openxmlformats.org/officeDocument/2006/math" xmlns="" val="1"/>
+              <ma14:wrappingTextBoxFlag xmlns="" xmlns:m="http://schemas.openxmlformats.org/officeDocument/2006/math" xmlns:a14="http://schemas.microsoft.com/office/drawing/2010/main" xmlns:ma14="http://schemas.microsoft.com/office/mac/drawingml/2011/main" val="1"/>
             </a:ext>
           </a:extLst>
         </p:spPr>
@@ -17494,7 +17729,7 @@
           </a:ln>
           <a:extLst>
             <a:ext uri="{C572A759-6A51-4108-AA02-DFA0A04FC94B}">
-              <ma14:wrappingTextBoxFlag xmlns:ma14="http://schemas.microsoft.com/office/mac/drawingml/2011/main" xmlns:a14="http://schemas.microsoft.com/office/drawing/2010/main" xmlns:m="http://schemas.openxmlformats.org/officeDocument/2006/math" xmlns="" val="1"/>
+              <ma14:wrappingTextBoxFlag xmlns="" xmlns:m="http://schemas.openxmlformats.org/officeDocument/2006/math" xmlns:a14="http://schemas.microsoft.com/office/drawing/2010/main" xmlns:ma14="http://schemas.microsoft.com/office/mac/drawingml/2011/main" val="1"/>
             </a:ext>
           </a:extLst>
         </p:spPr>
@@ -17544,7 +17779,7 @@
           </a:ln>
           <a:extLst>
             <a:ext uri="{C572A759-6A51-4108-AA02-DFA0A04FC94B}">
-              <ma14:wrappingTextBoxFlag xmlns:ma14="http://schemas.microsoft.com/office/mac/drawingml/2011/main" xmlns:a14="http://schemas.microsoft.com/office/drawing/2010/main" xmlns:m="http://schemas.openxmlformats.org/officeDocument/2006/math" xmlns="" val="1"/>
+              <ma14:wrappingTextBoxFlag xmlns="" xmlns:m="http://schemas.openxmlformats.org/officeDocument/2006/math" xmlns:a14="http://schemas.microsoft.com/office/drawing/2010/main" xmlns:ma14="http://schemas.microsoft.com/office/mac/drawingml/2011/main" val="1"/>
             </a:ext>
           </a:extLst>
         </p:spPr>
@@ -17672,7 +17907,7 @@
           </a:ln>
           <a:extLst>
             <a:ext uri="{C572A759-6A51-4108-AA02-DFA0A04FC94B}">
-              <ma14:wrappingTextBoxFlag xmlns:ma14="http://schemas.microsoft.com/office/mac/drawingml/2011/main" xmlns:a14="http://schemas.microsoft.com/office/drawing/2010/main" xmlns:m="http://schemas.openxmlformats.org/officeDocument/2006/math" xmlns="" val="1"/>
+              <ma14:wrappingTextBoxFlag xmlns="" xmlns:m="http://schemas.openxmlformats.org/officeDocument/2006/math" xmlns:a14="http://schemas.microsoft.com/office/drawing/2010/main" xmlns:ma14="http://schemas.microsoft.com/office/mac/drawingml/2011/main" val="1"/>
             </a:ext>
           </a:extLst>
         </p:spPr>
@@ -17719,7 +17954,7 @@
           </a:ln>
           <a:extLst>
             <a:ext uri="{C572A759-6A51-4108-AA02-DFA0A04FC94B}">
-              <ma14:wrappingTextBoxFlag xmlns:ma14="http://schemas.microsoft.com/office/mac/drawingml/2011/main" xmlns:a14="http://schemas.microsoft.com/office/drawing/2010/main" xmlns:m="http://schemas.openxmlformats.org/officeDocument/2006/math" xmlns="" val="1"/>
+              <ma14:wrappingTextBoxFlag xmlns="" xmlns:m="http://schemas.openxmlformats.org/officeDocument/2006/math" xmlns:a14="http://schemas.microsoft.com/office/drawing/2010/main" xmlns:ma14="http://schemas.microsoft.com/office/mac/drawingml/2011/main" val="1"/>
             </a:ext>
           </a:extLst>
         </p:spPr>
@@ -17766,7 +18001,7 @@
           </a:ln>
           <a:extLst>
             <a:ext uri="{C572A759-6A51-4108-AA02-DFA0A04FC94B}">
-              <ma14:wrappingTextBoxFlag xmlns:ma14="http://schemas.microsoft.com/office/mac/drawingml/2011/main" xmlns:a14="http://schemas.microsoft.com/office/drawing/2010/main" xmlns:m="http://schemas.openxmlformats.org/officeDocument/2006/math" xmlns="" val="1"/>
+              <ma14:wrappingTextBoxFlag xmlns="" xmlns:m="http://schemas.openxmlformats.org/officeDocument/2006/math" xmlns:a14="http://schemas.microsoft.com/office/drawing/2010/main" xmlns:ma14="http://schemas.microsoft.com/office/mac/drawingml/2011/main" val="1"/>
             </a:ext>
           </a:extLst>
         </p:spPr>
@@ -17901,7 +18136,7 @@
           </a:ln>
           <a:extLst>
             <a:ext uri="{C572A759-6A51-4108-AA02-DFA0A04FC94B}">
-              <ma14:wrappingTextBoxFlag xmlns:ma14="http://schemas.microsoft.com/office/mac/drawingml/2011/main" xmlns:a14="http://schemas.microsoft.com/office/drawing/2010/main" xmlns:m="http://schemas.openxmlformats.org/officeDocument/2006/math" xmlns="" val="1"/>
+              <ma14:wrappingTextBoxFlag xmlns="" xmlns:m="http://schemas.openxmlformats.org/officeDocument/2006/math" xmlns:a14="http://schemas.microsoft.com/office/drawing/2010/main" xmlns:ma14="http://schemas.microsoft.com/office/mac/drawingml/2011/main" val="1"/>
             </a:ext>
           </a:extLst>
         </p:spPr>
@@ -17956,7 +18191,7 @@
           </a:ln>
           <a:extLst>
             <a:ext uri="{C572A759-6A51-4108-AA02-DFA0A04FC94B}">
-              <ma14:wrappingTextBoxFlag xmlns:ma14="http://schemas.microsoft.com/office/mac/drawingml/2011/main" xmlns:a14="http://schemas.microsoft.com/office/drawing/2010/main" xmlns:m="http://schemas.openxmlformats.org/officeDocument/2006/math" xmlns="" val="1"/>
+              <ma14:wrappingTextBoxFlag xmlns="" xmlns:m="http://schemas.openxmlformats.org/officeDocument/2006/math" xmlns:a14="http://schemas.microsoft.com/office/drawing/2010/main" xmlns:ma14="http://schemas.microsoft.com/office/mac/drawingml/2011/main" val="1"/>
             </a:ext>
           </a:extLst>
         </p:spPr>
@@ -18044,7 +18279,7 @@
           </a:ln>
           <a:extLst>
             <a:ext uri="{C572A759-6A51-4108-AA02-DFA0A04FC94B}">
-              <ma14:wrappingTextBoxFlag xmlns:ma14="http://schemas.microsoft.com/office/mac/drawingml/2011/main" xmlns:a14="http://schemas.microsoft.com/office/drawing/2010/main" xmlns:m="http://schemas.openxmlformats.org/officeDocument/2006/math" xmlns="" val="1"/>
+              <ma14:wrappingTextBoxFlag xmlns="" xmlns:m="http://schemas.openxmlformats.org/officeDocument/2006/math" xmlns:a14="http://schemas.microsoft.com/office/drawing/2010/main" xmlns:ma14="http://schemas.microsoft.com/office/mac/drawingml/2011/main" val="1"/>
             </a:ext>
           </a:extLst>
         </p:spPr>
@@ -18091,7 +18326,7 @@
           </a:ln>
           <a:extLst>
             <a:ext uri="{C572A759-6A51-4108-AA02-DFA0A04FC94B}">
-              <ma14:wrappingTextBoxFlag xmlns:ma14="http://schemas.microsoft.com/office/mac/drawingml/2011/main" xmlns:a14="http://schemas.microsoft.com/office/drawing/2010/main" xmlns:m="http://schemas.openxmlformats.org/officeDocument/2006/math" xmlns="" val="1"/>
+              <ma14:wrappingTextBoxFlag xmlns="" xmlns:m="http://schemas.openxmlformats.org/officeDocument/2006/math" xmlns:a14="http://schemas.microsoft.com/office/drawing/2010/main" xmlns:ma14="http://schemas.microsoft.com/office/mac/drawingml/2011/main" val="1"/>
             </a:ext>
           </a:extLst>
         </p:spPr>
@@ -18137,7 +18372,7 @@
           </a:ln>
           <a:extLst>
             <a:ext uri="{C572A759-6A51-4108-AA02-DFA0A04FC94B}">
-              <ma14:wrappingTextBoxFlag xmlns:ma14="http://schemas.microsoft.com/office/mac/drawingml/2011/main" xmlns:a14="http://schemas.microsoft.com/office/drawing/2010/main" xmlns:m="http://schemas.openxmlformats.org/officeDocument/2006/math" xmlns="" val="1"/>
+              <ma14:wrappingTextBoxFlag xmlns="" xmlns:m="http://schemas.openxmlformats.org/officeDocument/2006/math" xmlns:a14="http://schemas.microsoft.com/office/drawing/2010/main" xmlns:ma14="http://schemas.microsoft.com/office/mac/drawingml/2011/main" val="1"/>
             </a:ext>
           </a:extLst>
         </p:spPr>
@@ -18300,7 +18535,7 @@
           </a:ln>
           <a:extLst>
             <a:ext uri="{C572A759-6A51-4108-AA02-DFA0A04FC94B}">
-              <ma14:wrappingTextBoxFlag xmlns:ma14="http://schemas.microsoft.com/office/mac/drawingml/2011/main" xmlns:a14="http://schemas.microsoft.com/office/drawing/2010/main" xmlns:m="http://schemas.openxmlformats.org/officeDocument/2006/math" xmlns="" val="1"/>
+              <ma14:wrappingTextBoxFlag xmlns="" xmlns:m="http://schemas.openxmlformats.org/officeDocument/2006/math" xmlns:a14="http://schemas.microsoft.com/office/drawing/2010/main" xmlns:ma14="http://schemas.microsoft.com/office/mac/drawingml/2011/main" val="1"/>
             </a:ext>
           </a:extLst>
         </p:spPr>
@@ -18347,7 +18582,7 @@
           </a:ln>
           <a:extLst>
             <a:ext uri="{C572A759-6A51-4108-AA02-DFA0A04FC94B}">
-              <ma14:wrappingTextBoxFlag xmlns:ma14="http://schemas.microsoft.com/office/mac/drawingml/2011/main" xmlns:a14="http://schemas.microsoft.com/office/drawing/2010/main" xmlns:m="http://schemas.openxmlformats.org/officeDocument/2006/math" xmlns="" val="1"/>
+              <ma14:wrappingTextBoxFlag xmlns="" xmlns:m="http://schemas.openxmlformats.org/officeDocument/2006/math" xmlns:a14="http://schemas.microsoft.com/office/drawing/2010/main" xmlns:ma14="http://schemas.microsoft.com/office/mac/drawingml/2011/main" val="1"/>
             </a:ext>
           </a:extLst>
         </p:spPr>
@@ -18394,7 +18629,7 @@
           </a:ln>
           <a:extLst>
             <a:ext uri="{C572A759-6A51-4108-AA02-DFA0A04FC94B}">
-              <ma14:wrappingTextBoxFlag xmlns:ma14="http://schemas.microsoft.com/office/mac/drawingml/2011/main" xmlns:a14="http://schemas.microsoft.com/office/drawing/2010/main" xmlns:m="http://schemas.openxmlformats.org/officeDocument/2006/math" xmlns="" val="1"/>
+              <ma14:wrappingTextBoxFlag xmlns="" xmlns:m="http://schemas.openxmlformats.org/officeDocument/2006/math" xmlns:a14="http://schemas.microsoft.com/office/drawing/2010/main" xmlns:ma14="http://schemas.microsoft.com/office/mac/drawingml/2011/main" val="1"/>
             </a:ext>
           </a:extLst>
         </p:spPr>
@@ -18548,7 +18783,7 @@
           </a:ln>
           <a:extLst>
             <a:ext uri="{C572A759-6A51-4108-AA02-DFA0A04FC94B}">
-              <ma14:wrappingTextBoxFlag xmlns:ma14="http://schemas.microsoft.com/office/mac/drawingml/2011/main" xmlns:a14="http://schemas.microsoft.com/office/drawing/2010/main" xmlns:m="http://schemas.openxmlformats.org/officeDocument/2006/math" xmlns="" val="1"/>
+              <ma14:wrappingTextBoxFlag xmlns="" xmlns:m="http://schemas.openxmlformats.org/officeDocument/2006/math" xmlns:a14="http://schemas.microsoft.com/office/drawing/2010/main" xmlns:ma14="http://schemas.microsoft.com/office/mac/drawingml/2011/main" val="1"/>
             </a:ext>
           </a:extLst>
         </p:spPr>
@@ -18835,7 +19070,7 @@
           </a:ln>
           <a:extLst>
             <a:ext uri="{C572A759-6A51-4108-AA02-DFA0A04FC94B}">
-              <ma14:wrappingTextBoxFlag xmlns:ma14="http://schemas.microsoft.com/office/mac/drawingml/2011/main" xmlns:a14="http://schemas.microsoft.com/office/drawing/2010/main" xmlns:m="http://schemas.openxmlformats.org/officeDocument/2006/math" xmlns="" val="1"/>
+              <ma14:wrappingTextBoxFlag xmlns="" xmlns:m="http://schemas.openxmlformats.org/officeDocument/2006/math" xmlns:a14="http://schemas.microsoft.com/office/drawing/2010/main" xmlns:ma14="http://schemas.microsoft.com/office/mac/drawingml/2011/main" val="1"/>
             </a:ext>
           </a:extLst>
         </p:spPr>
@@ -18882,7 +19117,7 @@
           </a:ln>
           <a:extLst>
             <a:ext uri="{C572A759-6A51-4108-AA02-DFA0A04FC94B}">
-              <ma14:wrappingTextBoxFlag xmlns:ma14="http://schemas.microsoft.com/office/mac/drawingml/2011/main" xmlns:a14="http://schemas.microsoft.com/office/drawing/2010/main" xmlns:m="http://schemas.openxmlformats.org/officeDocument/2006/math" xmlns="" val="1"/>
+              <ma14:wrappingTextBoxFlag xmlns="" xmlns:m="http://schemas.openxmlformats.org/officeDocument/2006/math" xmlns:a14="http://schemas.microsoft.com/office/drawing/2010/main" xmlns:ma14="http://schemas.microsoft.com/office/mac/drawingml/2011/main" val="1"/>
             </a:ext>
           </a:extLst>
         </p:spPr>
@@ -18929,7 +19164,7 @@
           </a:ln>
           <a:extLst>
             <a:ext uri="{C572A759-6A51-4108-AA02-DFA0A04FC94B}">
-              <ma14:wrappingTextBoxFlag xmlns:ma14="http://schemas.microsoft.com/office/mac/drawingml/2011/main" xmlns:a14="http://schemas.microsoft.com/office/drawing/2010/main" xmlns:m="http://schemas.openxmlformats.org/officeDocument/2006/math" xmlns="" val="1"/>
+              <ma14:wrappingTextBoxFlag xmlns="" xmlns:m="http://schemas.openxmlformats.org/officeDocument/2006/math" xmlns:a14="http://schemas.microsoft.com/office/drawing/2010/main" xmlns:ma14="http://schemas.microsoft.com/office/mac/drawingml/2011/main" val="1"/>
             </a:ext>
           </a:extLst>
         </p:spPr>
@@ -19064,7 +19299,7 @@
           </a:ln>
           <a:extLst>
             <a:ext uri="{C572A759-6A51-4108-AA02-DFA0A04FC94B}">
-              <ma14:wrappingTextBoxFlag xmlns:ma14="http://schemas.microsoft.com/office/mac/drawingml/2011/main" xmlns:a14="http://schemas.microsoft.com/office/drawing/2010/main" xmlns:m="http://schemas.openxmlformats.org/officeDocument/2006/math" xmlns="" val="1"/>
+              <ma14:wrappingTextBoxFlag xmlns="" xmlns:m="http://schemas.openxmlformats.org/officeDocument/2006/math" xmlns:a14="http://schemas.microsoft.com/office/drawing/2010/main" xmlns:ma14="http://schemas.microsoft.com/office/mac/drawingml/2011/main" val="1"/>
             </a:ext>
           </a:extLst>
         </p:spPr>
@@ -19119,7 +19354,7 @@
           </a:ln>
           <a:extLst>
             <a:ext uri="{C572A759-6A51-4108-AA02-DFA0A04FC94B}">
-              <ma14:wrappingTextBoxFlag xmlns:ma14="http://schemas.microsoft.com/office/mac/drawingml/2011/main" xmlns:a14="http://schemas.microsoft.com/office/drawing/2010/main" xmlns:m="http://schemas.openxmlformats.org/officeDocument/2006/math" xmlns="" val="1"/>
+              <ma14:wrappingTextBoxFlag xmlns="" xmlns:m="http://schemas.openxmlformats.org/officeDocument/2006/math" xmlns:a14="http://schemas.microsoft.com/office/drawing/2010/main" xmlns:ma14="http://schemas.microsoft.com/office/mac/drawingml/2011/main" val="1"/>
             </a:ext>
           </a:extLst>
         </p:spPr>
@@ -19207,7 +19442,7 @@
           </a:ln>
           <a:extLst>
             <a:ext uri="{C572A759-6A51-4108-AA02-DFA0A04FC94B}">
-              <ma14:wrappingTextBoxFlag xmlns:ma14="http://schemas.microsoft.com/office/mac/drawingml/2011/main" xmlns:a14="http://schemas.microsoft.com/office/drawing/2010/main" xmlns:m="http://schemas.openxmlformats.org/officeDocument/2006/math" xmlns="" val="1"/>
+              <ma14:wrappingTextBoxFlag xmlns="" xmlns:m="http://schemas.openxmlformats.org/officeDocument/2006/math" xmlns:a14="http://schemas.microsoft.com/office/drawing/2010/main" xmlns:ma14="http://schemas.microsoft.com/office/mac/drawingml/2011/main" val="1"/>
             </a:ext>
           </a:extLst>
         </p:spPr>
@@ -19254,7 +19489,7 @@
           </a:ln>
           <a:extLst>
             <a:ext uri="{C572A759-6A51-4108-AA02-DFA0A04FC94B}">
-              <ma14:wrappingTextBoxFlag xmlns:ma14="http://schemas.microsoft.com/office/mac/drawingml/2011/main" xmlns:a14="http://schemas.microsoft.com/office/drawing/2010/main" xmlns:m="http://schemas.openxmlformats.org/officeDocument/2006/math" xmlns="" val="1"/>
+              <ma14:wrappingTextBoxFlag xmlns="" xmlns:m="http://schemas.openxmlformats.org/officeDocument/2006/math" xmlns:a14="http://schemas.microsoft.com/office/drawing/2010/main" xmlns:ma14="http://schemas.microsoft.com/office/mac/drawingml/2011/main" val="1"/>
             </a:ext>
           </a:extLst>
         </p:spPr>
@@ -19300,7 +19535,7 @@
           </a:ln>
           <a:extLst>
             <a:ext uri="{C572A759-6A51-4108-AA02-DFA0A04FC94B}">
-              <ma14:wrappingTextBoxFlag xmlns:ma14="http://schemas.microsoft.com/office/mac/drawingml/2011/main" xmlns:a14="http://schemas.microsoft.com/office/drawing/2010/main" xmlns:m="http://schemas.openxmlformats.org/officeDocument/2006/math" xmlns="" val="1"/>
+              <ma14:wrappingTextBoxFlag xmlns="" xmlns:m="http://schemas.openxmlformats.org/officeDocument/2006/math" xmlns:a14="http://schemas.microsoft.com/office/drawing/2010/main" xmlns:ma14="http://schemas.microsoft.com/office/mac/drawingml/2011/main" val="1"/>
             </a:ext>
           </a:extLst>
         </p:spPr>
@@ -19463,7 +19698,7 @@
           </a:ln>
           <a:extLst>
             <a:ext uri="{C572A759-6A51-4108-AA02-DFA0A04FC94B}">
-              <ma14:wrappingTextBoxFlag xmlns:ma14="http://schemas.microsoft.com/office/mac/drawingml/2011/main" xmlns:a14="http://schemas.microsoft.com/office/drawing/2010/main" xmlns:m="http://schemas.openxmlformats.org/officeDocument/2006/math" xmlns="" val="1"/>
+              <ma14:wrappingTextBoxFlag xmlns="" xmlns:m="http://schemas.openxmlformats.org/officeDocument/2006/math" xmlns:a14="http://schemas.microsoft.com/office/drawing/2010/main" xmlns:ma14="http://schemas.microsoft.com/office/mac/drawingml/2011/main" val="1"/>
             </a:ext>
           </a:extLst>
         </p:spPr>
@@ -19510,7 +19745,7 @@
           </a:ln>
           <a:extLst>
             <a:ext uri="{C572A759-6A51-4108-AA02-DFA0A04FC94B}">
-              <ma14:wrappingTextBoxFlag xmlns:ma14="http://schemas.microsoft.com/office/mac/drawingml/2011/main" xmlns:a14="http://schemas.microsoft.com/office/drawing/2010/main" xmlns:m="http://schemas.openxmlformats.org/officeDocument/2006/math" xmlns="" val="1"/>
+              <ma14:wrappingTextBoxFlag xmlns="" xmlns:m="http://schemas.openxmlformats.org/officeDocument/2006/math" xmlns:a14="http://schemas.microsoft.com/office/drawing/2010/main" xmlns:ma14="http://schemas.microsoft.com/office/mac/drawingml/2011/main" val="1"/>
             </a:ext>
           </a:extLst>
         </p:spPr>
@@ -19557,7 +19792,7 @@
           </a:ln>
           <a:extLst>
             <a:ext uri="{C572A759-6A51-4108-AA02-DFA0A04FC94B}">
-              <ma14:wrappingTextBoxFlag xmlns:ma14="http://schemas.microsoft.com/office/mac/drawingml/2011/main" xmlns:a14="http://schemas.microsoft.com/office/drawing/2010/main" xmlns:m="http://schemas.openxmlformats.org/officeDocument/2006/math" xmlns="" val="1"/>
+              <ma14:wrappingTextBoxFlag xmlns="" xmlns:m="http://schemas.openxmlformats.org/officeDocument/2006/math" xmlns:a14="http://schemas.microsoft.com/office/drawing/2010/main" xmlns:ma14="http://schemas.microsoft.com/office/mac/drawingml/2011/main" val="1"/>
             </a:ext>
           </a:extLst>
         </p:spPr>
@@ -19778,7 +20013,7 @@
           </a:ln>
           <a:extLst>
             <a:ext uri="{C572A759-6A51-4108-AA02-DFA0A04FC94B}">
-              <ma14:wrappingTextBoxFlag xmlns:ma14="http://schemas.microsoft.com/office/mac/drawingml/2011/main" xmlns:a14="http://schemas.microsoft.com/office/drawing/2010/main" xmlns:m="http://schemas.openxmlformats.org/officeDocument/2006/math" xmlns="" val="1"/>
+              <ma14:wrappingTextBoxFlag xmlns="" xmlns:m="http://schemas.openxmlformats.org/officeDocument/2006/math" xmlns:a14="http://schemas.microsoft.com/office/drawing/2010/main" xmlns:ma14="http://schemas.microsoft.com/office/mac/drawingml/2011/main" val="1"/>
             </a:ext>
           </a:extLst>
         </p:spPr>
@@ -19825,7 +20060,7 @@
           </a:ln>
           <a:extLst>
             <a:ext uri="{C572A759-6A51-4108-AA02-DFA0A04FC94B}">
-              <ma14:wrappingTextBoxFlag xmlns:ma14="http://schemas.microsoft.com/office/mac/drawingml/2011/main" xmlns:a14="http://schemas.microsoft.com/office/drawing/2010/main" xmlns:m="http://schemas.openxmlformats.org/officeDocument/2006/math" xmlns="" val="1"/>
+              <ma14:wrappingTextBoxFlag xmlns="" xmlns:m="http://schemas.openxmlformats.org/officeDocument/2006/math" xmlns:a14="http://schemas.microsoft.com/office/drawing/2010/main" xmlns:ma14="http://schemas.microsoft.com/office/mac/drawingml/2011/main" val="1"/>
             </a:ext>
           </a:extLst>
         </p:spPr>
@@ -19872,7 +20107,7 @@
           </a:ln>
           <a:extLst>
             <a:ext uri="{C572A759-6A51-4108-AA02-DFA0A04FC94B}">
-              <ma14:wrappingTextBoxFlag xmlns:ma14="http://schemas.microsoft.com/office/mac/drawingml/2011/main" xmlns:a14="http://schemas.microsoft.com/office/drawing/2010/main" xmlns:m="http://schemas.openxmlformats.org/officeDocument/2006/math" xmlns="" val="1"/>
+              <ma14:wrappingTextBoxFlag xmlns="" xmlns:m="http://schemas.openxmlformats.org/officeDocument/2006/math" xmlns:a14="http://schemas.microsoft.com/office/drawing/2010/main" xmlns:ma14="http://schemas.microsoft.com/office/mac/drawingml/2011/main" val="1"/>
             </a:ext>
           </a:extLst>
         </p:spPr>
@@ -20007,7 +20242,7 @@
           </a:ln>
           <a:extLst>
             <a:ext uri="{C572A759-6A51-4108-AA02-DFA0A04FC94B}">
-              <ma14:wrappingTextBoxFlag xmlns:ma14="http://schemas.microsoft.com/office/mac/drawingml/2011/main" xmlns:a14="http://schemas.microsoft.com/office/drawing/2010/main" xmlns:m="http://schemas.openxmlformats.org/officeDocument/2006/math" xmlns="" val="1"/>
+              <ma14:wrappingTextBoxFlag xmlns="" xmlns:m="http://schemas.openxmlformats.org/officeDocument/2006/math" xmlns:a14="http://schemas.microsoft.com/office/drawing/2010/main" xmlns:ma14="http://schemas.microsoft.com/office/mac/drawingml/2011/main" val="1"/>
             </a:ext>
           </a:extLst>
         </p:spPr>
@@ -20062,7 +20297,7 @@
           </a:ln>
           <a:extLst>
             <a:ext uri="{C572A759-6A51-4108-AA02-DFA0A04FC94B}">
-              <ma14:wrappingTextBoxFlag xmlns:ma14="http://schemas.microsoft.com/office/mac/drawingml/2011/main" xmlns:a14="http://schemas.microsoft.com/office/drawing/2010/main" xmlns:m="http://schemas.openxmlformats.org/officeDocument/2006/math" xmlns="" val="1"/>
+              <ma14:wrappingTextBoxFlag xmlns="" xmlns:m="http://schemas.openxmlformats.org/officeDocument/2006/math" xmlns:a14="http://schemas.microsoft.com/office/drawing/2010/main" xmlns:ma14="http://schemas.microsoft.com/office/mac/drawingml/2011/main" val="1"/>
             </a:ext>
           </a:extLst>
         </p:spPr>
@@ -20150,7 +20385,7 @@
           </a:ln>
           <a:extLst>
             <a:ext uri="{C572A759-6A51-4108-AA02-DFA0A04FC94B}">
-              <ma14:wrappingTextBoxFlag xmlns:ma14="http://schemas.microsoft.com/office/mac/drawingml/2011/main" xmlns:a14="http://schemas.microsoft.com/office/drawing/2010/main" xmlns:m="http://schemas.openxmlformats.org/officeDocument/2006/math" xmlns="" val="1"/>
+              <ma14:wrappingTextBoxFlag xmlns="" xmlns:m="http://schemas.openxmlformats.org/officeDocument/2006/math" xmlns:a14="http://schemas.microsoft.com/office/drawing/2010/main" xmlns:ma14="http://schemas.microsoft.com/office/mac/drawingml/2011/main" val="1"/>
             </a:ext>
           </a:extLst>
         </p:spPr>
@@ -20197,7 +20432,7 @@
           </a:ln>
           <a:extLst>
             <a:ext uri="{C572A759-6A51-4108-AA02-DFA0A04FC94B}">
-              <ma14:wrappingTextBoxFlag xmlns:ma14="http://schemas.microsoft.com/office/mac/drawingml/2011/main" xmlns:a14="http://schemas.microsoft.com/office/drawing/2010/main" xmlns:m="http://schemas.openxmlformats.org/officeDocument/2006/math" xmlns="" val="1"/>
+              <ma14:wrappingTextBoxFlag xmlns="" xmlns:m="http://schemas.openxmlformats.org/officeDocument/2006/math" xmlns:a14="http://schemas.microsoft.com/office/drawing/2010/main" xmlns:ma14="http://schemas.microsoft.com/office/mac/drawingml/2011/main" val="1"/>
             </a:ext>
           </a:extLst>
         </p:spPr>
@@ -20264,7 +20499,7 @@
           </a:ln>
           <a:extLst>
             <a:ext uri="{C572A759-6A51-4108-AA02-DFA0A04FC94B}">
-              <ma14:wrappingTextBoxFlag xmlns:ma14="http://schemas.microsoft.com/office/mac/drawingml/2011/main" xmlns:a14="http://schemas.microsoft.com/office/drawing/2010/main" xmlns:m="http://schemas.openxmlformats.org/officeDocument/2006/math" xmlns="" val="1"/>
+              <ma14:wrappingTextBoxFlag xmlns="" xmlns:m="http://schemas.openxmlformats.org/officeDocument/2006/math" xmlns:a14="http://schemas.microsoft.com/office/drawing/2010/main" xmlns:ma14="http://schemas.microsoft.com/office/mac/drawingml/2011/main" val="1"/>
             </a:ext>
           </a:extLst>
         </p:spPr>
@@ -20420,7 +20655,7 @@
           </a:ln>
           <a:extLst>
             <a:ext uri="{C572A759-6A51-4108-AA02-DFA0A04FC94B}">
-              <ma14:wrappingTextBoxFlag xmlns:ma14="http://schemas.microsoft.com/office/mac/drawingml/2011/main" xmlns:a14="http://schemas.microsoft.com/office/drawing/2010/main" xmlns:m="http://schemas.openxmlformats.org/officeDocument/2006/math" xmlns="" val="1"/>
+              <ma14:wrappingTextBoxFlag xmlns="" xmlns:m="http://schemas.openxmlformats.org/officeDocument/2006/math" xmlns:a14="http://schemas.microsoft.com/office/drawing/2010/main" xmlns:ma14="http://schemas.microsoft.com/office/mac/drawingml/2011/main" val="1"/>
             </a:ext>
           </a:extLst>
         </p:spPr>
@@ -20467,7 +20702,7 @@
           </a:ln>
           <a:extLst>
             <a:ext uri="{C572A759-6A51-4108-AA02-DFA0A04FC94B}">
-              <ma14:wrappingTextBoxFlag xmlns:ma14="http://schemas.microsoft.com/office/mac/drawingml/2011/main" xmlns:a14="http://schemas.microsoft.com/office/drawing/2010/main" xmlns:m="http://schemas.openxmlformats.org/officeDocument/2006/math" xmlns="" val="1"/>
+              <ma14:wrappingTextBoxFlag xmlns="" xmlns:m="http://schemas.openxmlformats.org/officeDocument/2006/math" xmlns:a14="http://schemas.microsoft.com/office/drawing/2010/main" xmlns:ma14="http://schemas.microsoft.com/office/mac/drawingml/2011/main" val="1"/>
             </a:ext>
           </a:extLst>
         </p:spPr>
@@ -20627,7 +20862,7 @@
           </a:ln>
           <a:extLst>
             <a:ext uri="{C572A759-6A51-4108-AA02-DFA0A04FC94B}">
-              <ma14:wrappingTextBoxFlag xmlns:ma14="http://schemas.microsoft.com/office/mac/drawingml/2011/main" xmlns:a14="http://schemas.microsoft.com/office/drawing/2010/main" xmlns:m="http://schemas.openxmlformats.org/officeDocument/2006/math" xmlns="" val="1"/>
+              <ma14:wrappingTextBoxFlag xmlns="" xmlns:m="http://schemas.openxmlformats.org/officeDocument/2006/math" xmlns:a14="http://schemas.microsoft.com/office/drawing/2010/main" xmlns:ma14="http://schemas.microsoft.com/office/mac/drawingml/2011/main" val="1"/>
             </a:ext>
           </a:extLst>
         </p:spPr>
@@ -20674,7 +20909,7 @@
           </a:ln>
           <a:extLst>
             <a:ext uri="{C572A759-6A51-4108-AA02-DFA0A04FC94B}">
-              <ma14:wrappingTextBoxFlag xmlns:ma14="http://schemas.microsoft.com/office/mac/drawingml/2011/main" xmlns:a14="http://schemas.microsoft.com/office/drawing/2010/main" xmlns:m="http://schemas.openxmlformats.org/officeDocument/2006/math" xmlns="" val="1"/>
+              <ma14:wrappingTextBoxFlag xmlns="" xmlns:m="http://schemas.openxmlformats.org/officeDocument/2006/math" xmlns:a14="http://schemas.microsoft.com/office/drawing/2010/main" xmlns:ma14="http://schemas.microsoft.com/office/mac/drawingml/2011/main" val="1"/>
             </a:ext>
           </a:extLst>
         </p:spPr>
@@ -20834,7 +21069,7 @@
           </a:ln>
           <a:extLst>
             <a:ext uri="{C572A759-6A51-4108-AA02-DFA0A04FC94B}">
-              <ma14:wrappingTextBoxFlag xmlns:ma14="http://schemas.microsoft.com/office/mac/drawingml/2011/main" xmlns:a14="http://schemas.microsoft.com/office/drawing/2010/main" xmlns:m="http://schemas.openxmlformats.org/officeDocument/2006/math" xmlns="" val="1"/>
+              <ma14:wrappingTextBoxFlag xmlns="" xmlns:m="http://schemas.openxmlformats.org/officeDocument/2006/math" xmlns:a14="http://schemas.microsoft.com/office/drawing/2010/main" xmlns:ma14="http://schemas.microsoft.com/office/mac/drawingml/2011/main" val="1"/>
             </a:ext>
           </a:extLst>
         </p:spPr>
@@ -20881,7 +21116,7 @@
           </a:ln>
           <a:extLst>
             <a:ext uri="{C572A759-6A51-4108-AA02-DFA0A04FC94B}">
-              <ma14:wrappingTextBoxFlag xmlns:ma14="http://schemas.microsoft.com/office/mac/drawingml/2011/main" xmlns:a14="http://schemas.microsoft.com/office/drawing/2010/main" xmlns:m="http://schemas.openxmlformats.org/officeDocument/2006/math" xmlns="" val="1"/>
+              <ma14:wrappingTextBoxFlag xmlns="" xmlns:m="http://schemas.openxmlformats.org/officeDocument/2006/math" xmlns:a14="http://schemas.microsoft.com/office/drawing/2010/main" xmlns:ma14="http://schemas.microsoft.com/office/mac/drawingml/2011/main" val="1"/>
             </a:ext>
           </a:extLst>
         </p:spPr>
@@ -20952,7 +21187,7 @@
           </a:ln>
           <a:extLst>
             <a:ext uri="{C572A759-6A51-4108-AA02-DFA0A04FC94B}">
-              <ma14:wrappingTextBoxFlag xmlns:ma14="http://schemas.microsoft.com/office/mac/drawingml/2011/main" xmlns:a14="http://schemas.microsoft.com/office/drawing/2010/main" xmlns:m="http://schemas.openxmlformats.org/officeDocument/2006/math" xmlns="" val="1"/>
+              <ma14:wrappingTextBoxFlag xmlns="" xmlns:m="http://schemas.openxmlformats.org/officeDocument/2006/math" xmlns:a14="http://schemas.microsoft.com/office/drawing/2010/main" xmlns:ma14="http://schemas.microsoft.com/office/mac/drawingml/2011/main" val="1"/>
             </a:ext>
           </a:extLst>
         </p:spPr>
@@ -21069,7 +21304,7 @@
           </a:ln>
           <a:extLst>
             <a:ext uri="{C572A759-6A51-4108-AA02-DFA0A04FC94B}">
-              <ma14:wrappingTextBoxFlag xmlns:ma14="http://schemas.microsoft.com/office/mac/drawingml/2011/main" xmlns:a14="http://schemas.microsoft.com/office/drawing/2010/main" xmlns:m="http://schemas.openxmlformats.org/officeDocument/2006/math" xmlns="" val="1"/>
+              <ma14:wrappingTextBoxFlag xmlns="" xmlns:m="http://schemas.openxmlformats.org/officeDocument/2006/math" xmlns:a14="http://schemas.microsoft.com/office/drawing/2010/main" xmlns:ma14="http://schemas.microsoft.com/office/mac/drawingml/2011/main" val="1"/>
             </a:ext>
           </a:extLst>
         </p:spPr>
@@ -21116,7 +21351,7 @@
           </a:ln>
           <a:extLst>
             <a:ext uri="{C572A759-6A51-4108-AA02-DFA0A04FC94B}">
-              <ma14:wrappingTextBoxFlag xmlns:ma14="http://schemas.microsoft.com/office/mac/drawingml/2011/main" xmlns:a14="http://schemas.microsoft.com/office/drawing/2010/main" xmlns:m="http://schemas.openxmlformats.org/officeDocument/2006/math" xmlns="" val="1"/>
+              <ma14:wrappingTextBoxFlag xmlns="" xmlns:m="http://schemas.openxmlformats.org/officeDocument/2006/math" xmlns:a14="http://schemas.microsoft.com/office/drawing/2010/main" xmlns:ma14="http://schemas.microsoft.com/office/mac/drawingml/2011/main" val="1"/>
             </a:ext>
           </a:extLst>
         </p:spPr>
@@ -21163,7 +21398,7 @@
           </a:ln>
           <a:extLst>
             <a:ext uri="{C572A759-6A51-4108-AA02-DFA0A04FC94B}">
-              <ma14:wrappingTextBoxFlag xmlns:ma14="http://schemas.microsoft.com/office/mac/drawingml/2011/main" xmlns:a14="http://schemas.microsoft.com/office/drawing/2010/main" xmlns:m="http://schemas.openxmlformats.org/officeDocument/2006/math" xmlns="" val="1"/>
+              <ma14:wrappingTextBoxFlag xmlns="" xmlns:m="http://schemas.openxmlformats.org/officeDocument/2006/math" xmlns:a14="http://schemas.microsoft.com/office/drawing/2010/main" xmlns:ma14="http://schemas.microsoft.com/office/mac/drawingml/2011/main" val="1"/>
             </a:ext>
           </a:extLst>
         </p:spPr>
@@ -21298,7 +21533,7 @@
           </a:ln>
           <a:extLst>
             <a:ext uri="{C572A759-6A51-4108-AA02-DFA0A04FC94B}">
-              <ma14:wrappingTextBoxFlag xmlns:ma14="http://schemas.microsoft.com/office/mac/drawingml/2011/main" xmlns:a14="http://schemas.microsoft.com/office/drawing/2010/main" xmlns:m="http://schemas.openxmlformats.org/officeDocument/2006/math" xmlns="" val="1"/>
+              <ma14:wrappingTextBoxFlag xmlns="" xmlns:m="http://schemas.openxmlformats.org/officeDocument/2006/math" xmlns:a14="http://schemas.microsoft.com/office/drawing/2010/main" xmlns:ma14="http://schemas.microsoft.com/office/mac/drawingml/2011/main" val="1"/>
             </a:ext>
           </a:extLst>
         </p:spPr>
@@ -21353,7 +21588,7 @@
           </a:ln>
           <a:extLst>
             <a:ext uri="{C572A759-6A51-4108-AA02-DFA0A04FC94B}">
-              <ma14:wrappingTextBoxFlag xmlns:ma14="http://schemas.microsoft.com/office/mac/drawingml/2011/main" xmlns:a14="http://schemas.microsoft.com/office/drawing/2010/main" xmlns:m="http://schemas.openxmlformats.org/officeDocument/2006/math" xmlns="" val="1"/>
+              <ma14:wrappingTextBoxFlag xmlns="" xmlns:m="http://schemas.openxmlformats.org/officeDocument/2006/math" xmlns:a14="http://schemas.microsoft.com/office/drawing/2010/main" xmlns:ma14="http://schemas.microsoft.com/office/mac/drawingml/2011/main" val="1"/>
             </a:ext>
           </a:extLst>
         </p:spPr>
@@ -21504,7 +21739,7 @@
             <a:effectLst/>
             <a:extLst>
               <a:ext uri="{C572A759-6A51-4108-AA02-DFA0A04FC94B}">
-                <ma14:wrappingTextBoxFlag xmlns:ma14="http://schemas.microsoft.com/office/mac/drawingml/2011/main" xmlns:a14="http://schemas.microsoft.com/office/drawing/2010/main" xmlns:m="http://schemas.openxmlformats.org/officeDocument/2006/math" xmlns="" val="1"/>
+                <ma14:wrappingTextBoxFlag xmlns="" xmlns:m="http://schemas.openxmlformats.org/officeDocument/2006/math" xmlns:a14="http://schemas.microsoft.com/office/drawing/2010/main" xmlns:ma14="http://schemas.microsoft.com/office/mac/drawingml/2011/main" val="1"/>
               </a:ext>
             </a:extLst>
           </p:spPr>
@@ -21613,7 +21848,7 @@
           </a:ln>
           <a:extLst>
             <a:ext uri="{C572A759-6A51-4108-AA02-DFA0A04FC94B}">
-              <ma14:wrappingTextBoxFlag xmlns:ma14="http://schemas.microsoft.com/office/mac/drawingml/2011/main" xmlns:a14="http://schemas.microsoft.com/office/drawing/2010/main" xmlns:m="http://schemas.openxmlformats.org/officeDocument/2006/math" xmlns="" val="1"/>
+              <ma14:wrappingTextBoxFlag xmlns="" xmlns:m="http://schemas.openxmlformats.org/officeDocument/2006/math" xmlns:a14="http://schemas.microsoft.com/office/drawing/2010/main" xmlns:ma14="http://schemas.microsoft.com/office/mac/drawingml/2011/main" val="1"/>
             </a:ext>
           </a:extLst>
         </p:spPr>
@@ -21660,7 +21895,7 @@
           </a:ln>
           <a:extLst>
             <a:ext uri="{C572A759-6A51-4108-AA02-DFA0A04FC94B}">
-              <ma14:wrappingTextBoxFlag xmlns:ma14="http://schemas.microsoft.com/office/mac/drawingml/2011/main" xmlns:a14="http://schemas.microsoft.com/office/drawing/2010/main" xmlns:m="http://schemas.openxmlformats.org/officeDocument/2006/math" xmlns="" val="1"/>
+              <ma14:wrappingTextBoxFlag xmlns="" xmlns:m="http://schemas.openxmlformats.org/officeDocument/2006/math" xmlns:a14="http://schemas.microsoft.com/office/drawing/2010/main" xmlns:ma14="http://schemas.microsoft.com/office/mac/drawingml/2011/main" val="1"/>
             </a:ext>
           </a:extLst>
         </p:spPr>
@@ -21774,7 +22009,7 @@
           </a:ln>
           <a:extLst>
             <a:ext uri="{C572A759-6A51-4108-AA02-DFA0A04FC94B}">
-              <ma14:wrappingTextBoxFlag xmlns:ma14="http://schemas.microsoft.com/office/mac/drawingml/2011/main" xmlns:a14="http://schemas.microsoft.com/office/drawing/2010/main" xmlns:m="http://schemas.openxmlformats.org/officeDocument/2006/math" xmlns="" val="1"/>
+              <ma14:wrappingTextBoxFlag xmlns="" xmlns:m="http://schemas.openxmlformats.org/officeDocument/2006/math" xmlns:a14="http://schemas.microsoft.com/office/drawing/2010/main" xmlns:ma14="http://schemas.microsoft.com/office/mac/drawingml/2011/main" val="1"/>
             </a:ext>
           </a:extLst>
         </p:spPr>
@@ -21821,7 +22056,7 @@
           </a:ln>
           <a:extLst>
             <a:ext uri="{C572A759-6A51-4108-AA02-DFA0A04FC94B}">
-              <ma14:wrappingTextBoxFlag xmlns:ma14="http://schemas.microsoft.com/office/mac/drawingml/2011/main" xmlns:a14="http://schemas.microsoft.com/office/drawing/2010/main" xmlns:m="http://schemas.openxmlformats.org/officeDocument/2006/math" xmlns="" val="1"/>
+              <ma14:wrappingTextBoxFlag xmlns="" xmlns:m="http://schemas.openxmlformats.org/officeDocument/2006/math" xmlns:a14="http://schemas.microsoft.com/office/drawing/2010/main" xmlns:ma14="http://schemas.microsoft.com/office/mac/drawingml/2011/main" val="1"/>
             </a:ext>
           </a:extLst>
         </p:spPr>
@@ -21868,7 +22103,7 @@
           </a:ln>
           <a:extLst>
             <a:ext uri="{C572A759-6A51-4108-AA02-DFA0A04FC94B}">
-              <ma14:wrappingTextBoxFlag xmlns:ma14="http://schemas.microsoft.com/office/mac/drawingml/2011/main" xmlns:a14="http://schemas.microsoft.com/office/drawing/2010/main" xmlns:m="http://schemas.openxmlformats.org/officeDocument/2006/math" xmlns="" val="1"/>
+              <ma14:wrappingTextBoxFlag xmlns="" xmlns:m="http://schemas.openxmlformats.org/officeDocument/2006/math" xmlns:a14="http://schemas.microsoft.com/office/drawing/2010/main" xmlns:ma14="http://schemas.microsoft.com/office/mac/drawingml/2011/main" val="1"/>
             </a:ext>
           </a:extLst>
         </p:spPr>
@@ -22003,7 +22238,7 @@
           </a:ln>
           <a:extLst>
             <a:ext uri="{C572A759-6A51-4108-AA02-DFA0A04FC94B}">
-              <ma14:wrappingTextBoxFlag xmlns:ma14="http://schemas.microsoft.com/office/mac/drawingml/2011/main" xmlns:a14="http://schemas.microsoft.com/office/drawing/2010/main" xmlns:m="http://schemas.openxmlformats.org/officeDocument/2006/math" xmlns="" val="1"/>
+              <ma14:wrappingTextBoxFlag xmlns="" xmlns:m="http://schemas.openxmlformats.org/officeDocument/2006/math" xmlns:a14="http://schemas.microsoft.com/office/drawing/2010/main" xmlns:ma14="http://schemas.microsoft.com/office/mac/drawingml/2011/main" val="1"/>
             </a:ext>
           </a:extLst>
         </p:spPr>
@@ -22058,7 +22293,7 @@
           </a:ln>
           <a:extLst>
             <a:ext uri="{C572A759-6A51-4108-AA02-DFA0A04FC94B}">
-              <ma14:wrappingTextBoxFlag xmlns:ma14="http://schemas.microsoft.com/office/mac/drawingml/2011/main" xmlns:a14="http://schemas.microsoft.com/office/drawing/2010/main" xmlns:m="http://schemas.openxmlformats.org/officeDocument/2006/math" xmlns="" val="1"/>
+              <ma14:wrappingTextBoxFlag xmlns="" xmlns:m="http://schemas.openxmlformats.org/officeDocument/2006/math" xmlns:a14="http://schemas.microsoft.com/office/drawing/2010/main" xmlns:ma14="http://schemas.microsoft.com/office/mac/drawingml/2011/main" val="1"/>
             </a:ext>
           </a:extLst>
         </p:spPr>
@@ -22146,7 +22381,7 @@
           </a:ln>
           <a:extLst>
             <a:ext uri="{C572A759-6A51-4108-AA02-DFA0A04FC94B}">
-              <ma14:wrappingTextBoxFlag xmlns:ma14="http://schemas.microsoft.com/office/mac/drawingml/2011/main" xmlns:a14="http://schemas.microsoft.com/office/drawing/2010/main" xmlns:m="http://schemas.openxmlformats.org/officeDocument/2006/math" xmlns="" val="1"/>
+              <ma14:wrappingTextBoxFlag xmlns="" xmlns:m="http://schemas.openxmlformats.org/officeDocument/2006/math" xmlns:a14="http://schemas.microsoft.com/office/drawing/2010/main" xmlns:ma14="http://schemas.microsoft.com/office/mac/drawingml/2011/main" val="1"/>
             </a:ext>
           </a:extLst>
         </p:spPr>
@@ -22193,7 +22428,7 @@
           </a:ln>
           <a:extLst>
             <a:ext uri="{C572A759-6A51-4108-AA02-DFA0A04FC94B}">
-              <ma14:wrappingTextBoxFlag xmlns:ma14="http://schemas.microsoft.com/office/mac/drawingml/2011/main" xmlns:a14="http://schemas.microsoft.com/office/drawing/2010/main" xmlns:m="http://schemas.openxmlformats.org/officeDocument/2006/math" xmlns="" val="1"/>
+              <ma14:wrappingTextBoxFlag xmlns="" xmlns:m="http://schemas.openxmlformats.org/officeDocument/2006/math" xmlns:a14="http://schemas.microsoft.com/office/drawing/2010/main" xmlns:ma14="http://schemas.microsoft.com/office/mac/drawingml/2011/main" val="1"/>
             </a:ext>
           </a:extLst>
         </p:spPr>
@@ -22248,7 +22483,7 @@
           </a:ln>
           <a:extLst>
             <a:ext uri="{C572A759-6A51-4108-AA02-DFA0A04FC94B}">
-              <ma14:wrappingTextBoxFlag xmlns:ma14="http://schemas.microsoft.com/office/mac/drawingml/2011/main" xmlns:a14="http://schemas.microsoft.com/office/drawing/2010/main" xmlns:m="http://schemas.openxmlformats.org/officeDocument/2006/math" xmlns="" val="1"/>
+              <ma14:wrappingTextBoxFlag xmlns="" xmlns:m="http://schemas.openxmlformats.org/officeDocument/2006/math" xmlns:a14="http://schemas.microsoft.com/office/drawing/2010/main" xmlns:ma14="http://schemas.microsoft.com/office/mac/drawingml/2011/main" val="1"/>
             </a:ext>
           </a:extLst>
         </p:spPr>
@@ -22433,7 +22668,7 @@
           </a:ln>
           <a:extLst>
             <a:ext uri="{C572A759-6A51-4108-AA02-DFA0A04FC94B}">
-              <ma14:wrappingTextBoxFlag xmlns:ma14="http://schemas.microsoft.com/office/mac/drawingml/2011/main" xmlns:a14="http://schemas.microsoft.com/office/drawing/2010/main" xmlns:m="http://schemas.openxmlformats.org/officeDocument/2006/math" xmlns="" val="1"/>
+              <ma14:wrappingTextBoxFlag xmlns="" xmlns:m="http://schemas.openxmlformats.org/officeDocument/2006/math" xmlns:a14="http://schemas.microsoft.com/office/drawing/2010/main" xmlns:ma14="http://schemas.microsoft.com/office/mac/drawingml/2011/main" val="1"/>
             </a:ext>
           </a:extLst>
         </p:spPr>
@@ -22480,7 +22715,7 @@
           </a:ln>
           <a:extLst>
             <a:ext uri="{C572A759-6A51-4108-AA02-DFA0A04FC94B}">
-              <ma14:wrappingTextBoxFlag xmlns:ma14="http://schemas.microsoft.com/office/mac/drawingml/2011/main" xmlns:a14="http://schemas.microsoft.com/office/drawing/2010/main" xmlns:m="http://schemas.openxmlformats.org/officeDocument/2006/math" xmlns="" val="1"/>
+              <ma14:wrappingTextBoxFlag xmlns="" xmlns:m="http://schemas.openxmlformats.org/officeDocument/2006/math" xmlns:a14="http://schemas.microsoft.com/office/drawing/2010/main" xmlns:ma14="http://schemas.microsoft.com/office/mac/drawingml/2011/main" val="1"/>
             </a:ext>
           </a:extLst>
         </p:spPr>
@@ -22530,7 +22765,7 @@
           </a:ln>
           <a:extLst>
             <a:ext uri="{C572A759-6A51-4108-AA02-DFA0A04FC94B}">
-              <ma14:wrappingTextBoxFlag xmlns:ma14="http://schemas.microsoft.com/office/mac/drawingml/2011/main" xmlns:a14="http://schemas.microsoft.com/office/drawing/2010/main" xmlns:m="http://schemas.openxmlformats.org/officeDocument/2006/math" xmlns="" val="1"/>
+              <ma14:wrappingTextBoxFlag xmlns="" xmlns:m="http://schemas.openxmlformats.org/officeDocument/2006/math" xmlns:a14="http://schemas.microsoft.com/office/drawing/2010/main" xmlns:ma14="http://schemas.microsoft.com/office/mac/drawingml/2011/main" val="1"/>
             </a:ext>
           </a:extLst>
         </p:spPr>
@@ -22659,7 +22894,7 @@
           </a:ln>
           <a:extLst>
             <a:ext uri="{C572A759-6A51-4108-AA02-DFA0A04FC94B}">
-              <ma14:wrappingTextBoxFlag xmlns:ma14="http://schemas.microsoft.com/office/mac/drawingml/2011/main" xmlns:a14="http://schemas.microsoft.com/office/drawing/2010/main" xmlns:m="http://schemas.openxmlformats.org/officeDocument/2006/math" xmlns="" val="1"/>
+              <ma14:wrappingTextBoxFlag xmlns="" xmlns:m="http://schemas.openxmlformats.org/officeDocument/2006/math" xmlns:a14="http://schemas.microsoft.com/office/drawing/2010/main" xmlns:ma14="http://schemas.microsoft.com/office/mac/drawingml/2011/main" val="1"/>
             </a:ext>
           </a:extLst>
         </p:spPr>
@@ -22706,7 +22941,7 @@
           </a:ln>
           <a:extLst>
             <a:ext uri="{C572A759-6A51-4108-AA02-DFA0A04FC94B}">
-              <ma14:wrappingTextBoxFlag xmlns:ma14="http://schemas.microsoft.com/office/mac/drawingml/2011/main" xmlns:a14="http://schemas.microsoft.com/office/drawing/2010/main" xmlns:m="http://schemas.openxmlformats.org/officeDocument/2006/math" xmlns="" val="1"/>
+              <ma14:wrappingTextBoxFlag xmlns="" xmlns:m="http://schemas.openxmlformats.org/officeDocument/2006/math" xmlns:a14="http://schemas.microsoft.com/office/drawing/2010/main" xmlns:ma14="http://schemas.microsoft.com/office/mac/drawingml/2011/main" val="1"/>
             </a:ext>
           </a:extLst>
         </p:spPr>
@@ -22756,7 +22991,7 @@
           </a:ln>
           <a:extLst>
             <a:ext uri="{C572A759-6A51-4108-AA02-DFA0A04FC94B}">
-              <ma14:wrappingTextBoxFlag xmlns:ma14="http://schemas.microsoft.com/office/mac/drawingml/2011/main" xmlns:a14="http://schemas.microsoft.com/office/drawing/2010/main" xmlns:m="http://schemas.openxmlformats.org/officeDocument/2006/math" xmlns="" val="1"/>
+              <ma14:wrappingTextBoxFlag xmlns="" xmlns:m="http://schemas.openxmlformats.org/officeDocument/2006/math" xmlns:a14="http://schemas.microsoft.com/office/drawing/2010/main" xmlns:ma14="http://schemas.microsoft.com/office/mac/drawingml/2011/main" val="1"/>
             </a:ext>
           </a:extLst>
         </p:spPr>
@@ -22885,7 +23120,7 @@
           </a:ln>
           <a:extLst>
             <a:ext uri="{C572A759-6A51-4108-AA02-DFA0A04FC94B}">
-              <ma14:wrappingTextBoxFlag xmlns:ma14="http://schemas.microsoft.com/office/mac/drawingml/2011/main" xmlns:a14="http://schemas.microsoft.com/office/drawing/2010/main" xmlns:m="http://schemas.openxmlformats.org/officeDocument/2006/math" xmlns="" val="1"/>
+              <ma14:wrappingTextBoxFlag xmlns="" xmlns:m="http://schemas.openxmlformats.org/officeDocument/2006/math" xmlns:a14="http://schemas.microsoft.com/office/drawing/2010/main" xmlns:ma14="http://schemas.microsoft.com/office/mac/drawingml/2011/main" val="1"/>
             </a:ext>
           </a:extLst>
         </p:spPr>
@@ -22932,7 +23167,7 @@
           </a:ln>
           <a:extLst>
             <a:ext uri="{C572A759-6A51-4108-AA02-DFA0A04FC94B}">
-              <ma14:wrappingTextBoxFlag xmlns:ma14="http://schemas.microsoft.com/office/mac/drawingml/2011/main" xmlns:a14="http://schemas.microsoft.com/office/drawing/2010/main" xmlns:m="http://schemas.openxmlformats.org/officeDocument/2006/math" xmlns="" val="1"/>
+              <ma14:wrappingTextBoxFlag xmlns="" xmlns:m="http://schemas.openxmlformats.org/officeDocument/2006/math" xmlns:a14="http://schemas.microsoft.com/office/drawing/2010/main" xmlns:ma14="http://schemas.microsoft.com/office/mac/drawingml/2011/main" val="1"/>
             </a:ext>
           </a:extLst>
         </p:spPr>
@@ -22982,7 +23217,7 @@
           </a:ln>
           <a:extLst>
             <a:ext uri="{C572A759-6A51-4108-AA02-DFA0A04FC94B}">
-              <ma14:wrappingTextBoxFlag xmlns:ma14="http://schemas.microsoft.com/office/mac/drawingml/2011/main" xmlns:a14="http://schemas.microsoft.com/office/drawing/2010/main" xmlns:m="http://schemas.openxmlformats.org/officeDocument/2006/math" xmlns="" val="1"/>
+              <ma14:wrappingTextBoxFlag xmlns="" xmlns:m="http://schemas.openxmlformats.org/officeDocument/2006/math" xmlns:a14="http://schemas.microsoft.com/office/drawing/2010/main" xmlns:ma14="http://schemas.microsoft.com/office/mac/drawingml/2011/main" val="1"/>
             </a:ext>
           </a:extLst>
         </p:spPr>
@@ -23134,7 +23369,7 @@
           </a:ln>
           <a:extLst>
             <a:ext uri="{C572A759-6A51-4108-AA02-DFA0A04FC94B}">
-              <ma14:wrappingTextBoxFlag xmlns:ma14="http://schemas.microsoft.com/office/mac/drawingml/2011/main" xmlns:a14="http://schemas.microsoft.com/office/drawing/2010/main" xmlns:m="http://schemas.openxmlformats.org/officeDocument/2006/math" xmlns="" val="1"/>
+              <ma14:wrappingTextBoxFlag xmlns="" xmlns:m="http://schemas.openxmlformats.org/officeDocument/2006/math" xmlns:a14="http://schemas.microsoft.com/office/drawing/2010/main" xmlns:ma14="http://schemas.microsoft.com/office/mac/drawingml/2011/main" val="1"/>
             </a:ext>
           </a:extLst>
         </p:spPr>
@@ -23181,7 +23416,7 @@
           </a:ln>
           <a:extLst>
             <a:ext uri="{C572A759-6A51-4108-AA02-DFA0A04FC94B}">
-              <ma14:wrappingTextBoxFlag xmlns:ma14="http://schemas.microsoft.com/office/mac/drawingml/2011/main" xmlns:a14="http://schemas.microsoft.com/office/drawing/2010/main" xmlns:m="http://schemas.openxmlformats.org/officeDocument/2006/math" xmlns="" val="1"/>
+              <ma14:wrappingTextBoxFlag xmlns="" xmlns:m="http://schemas.openxmlformats.org/officeDocument/2006/math" xmlns:a14="http://schemas.microsoft.com/office/drawing/2010/main" xmlns:ma14="http://schemas.microsoft.com/office/mac/drawingml/2011/main" val="1"/>
             </a:ext>
           </a:extLst>
         </p:spPr>
@@ -23231,7 +23466,7 @@
           </a:ln>
           <a:extLst>
             <a:ext uri="{C572A759-6A51-4108-AA02-DFA0A04FC94B}">
-              <ma14:wrappingTextBoxFlag xmlns:ma14="http://schemas.microsoft.com/office/mac/drawingml/2011/main" xmlns:a14="http://schemas.microsoft.com/office/drawing/2010/main" xmlns:m="http://schemas.openxmlformats.org/officeDocument/2006/math" xmlns="" val="1"/>
+              <ma14:wrappingTextBoxFlag xmlns="" xmlns:m="http://schemas.openxmlformats.org/officeDocument/2006/math" xmlns:a14="http://schemas.microsoft.com/office/drawing/2010/main" xmlns:ma14="http://schemas.microsoft.com/office/mac/drawingml/2011/main" val="1"/>
             </a:ext>
           </a:extLst>
         </p:spPr>
@@ -23360,7 +23595,7 @@
           </a:ln>
           <a:extLst>
             <a:ext uri="{C572A759-6A51-4108-AA02-DFA0A04FC94B}">
-              <ma14:wrappingTextBoxFlag xmlns:ma14="http://schemas.microsoft.com/office/mac/drawingml/2011/main" xmlns:a14="http://schemas.microsoft.com/office/drawing/2010/main" xmlns:m="http://schemas.openxmlformats.org/officeDocument/2006/math" xmlns="" val="1"/>
+              <ma14:wrappingTextBoxFlag xmlns="" xmlns:m="http://schemas.openxmlformats.org/officeDocument/2006/math" xmlns:a14="http://schemas.microsoft.com/office/drawing/2010/main" xmlns:ma14="http://schemas.microsoft.com/office/mac/drawingml/2011/main" val="1"/>
             </a:ext>
           </a:extLst>
         </p:spPr>
@@ -23407,7 +23642,7 @@
           </a:ln>
           <a:extLst>
             <a:ext uri="{C572A759-6A51-4108-AA02-DFA0A04FC94B}">
-              <ma14:wrappingTextBoxFlag xmlns:ma14="http://schemas.microsoft.com/office/mac/drawingml/2011/main" xmlns:a14="http://schemas.microsoft.com/office/drawing/2010/main" xmlns:m="http://schemas.openxmlformats.org/officeDocument/2006/math" xmlns="" val="1"/>
+              <ma14:wrappingTextBoxFlag xmlns="" xmlns:m="http://schemas.openxmlformats.org/officeDocument/2006/math" xmlns:a14="http://schemas.microsoft.com/office/drawing/2010/main" xmlns:ma14="http://schemas.microsoft.com/office/mac/drawingml/2011/main" val="1"/>
             </a:ext>
           </a:extLst>
         </p:spPr>
@@ -23457,7 +23692,7 @@
           </a:ln>
           <a:extLst>
             <a:ext uri="{C572A759-6A51-4108-AA02-DFA0A04FC94B}">
-              <ma14:wrappingTextBoxFlag xmlns:ma14="http://schemas.microsoft.com/office/mac/drawingml/2011/main" xmlns:a14="http://schemas.microsoft.com/office/drawing/2010/main" xmlns:m="http://schemas.openxmlformats.org/officeDocument/2006/math" xmlns="" val="1"/>
+              <ma14:wrappingTextBoxFlag xmlns="" xmlns:m="http://schemas.openxmlformats.org/officeDocument/2006/math" xmlns:a14="http://schemas.microsoft.com/office/drawing/2010/main" xmlns:ma14="http://schemas.microsoft.com/office/mac/drawingml/2011/main" val="1"/>
             </a:ext>
           </a:extLst>
         </p:spPr>
@@ -23597,7 +23832,7 @@
           </a:ln>
           <a:extLst>
             <a:ext uri="{C572A759-6A51-4108-AA02-DFA0A04FC94B}">
-              <ma14:wrappingTextBoxFlag xmlns:ma14="http://schemas.microsoft.com/office/mac/drawingml/2011/main" xmlns:a14="http://schemas.microsoft.com/office/drawing/2010/main" xmlns:m="http://schemas.openxmlformats.org/officeDocument/2006/math" xmlns="" val="1"/>
+              <ma14:wrappingTextBoxFlag xmlns="" xmlns:m="http://schemas.openxmlformats.org/officeDocument/2006/math" xmlns:a14="http://schemas.microsoft.com/office/drawing/2010/main" xmlns:ma14="http://schemas.microsoft.com/office/mac/drawingml/2011/main" val="1"/>
             </a:ext>
           </a:extLst>
         </p:spPr>
@@ -23644,7 +23879,7 @@
           </a:ln>
           <a:extLst>
             <a:ext uri="{C572A759-6A51-4108-AA02-DFA0A04FC94B}">
-              <ma14:wrappingTextBoxFlag xmlns:ma14="http://schemas.microsoft.com/office/mac/drawingml/2011/main" xmlns:a14="http://schemas.microsoft.com/office/drawing/2010/main" xmlns:m="http://schemas.openxmlformats.org/officeDocument/2006/math" xmlns="" val="1"/>
+              <ma14:wrappingTextBoxFlag xmlns="" xmlns:m="http://schemas.openxmlformats.org/officeDocument/2006/math" xmlns:a14="http://schemas.microsoft.com/office/drawing/2010/main" xmlns:ma14="http://schemas.microsoft.com/office/mac/drawingml/2011/main" val="1"/>
             </a:ext>
           </a:extLst>
         </p:spPr>
@@ -23694,7 +23929,7 @@
           </a:ln>
           <a:extLst>
             <a:ext uri="{C572A759-6A51-4108-AA02-DFA0A04FC94B}">
-              <ma14:wrappingTextBoxFlag xmlns:ma14="http://schemas.microsoft.com/office/mac/drawingml/2011/main" xmlns:a14="http://schemas.microsoft.com/office/drawing/2010/main" xmlns:m="http://schemas.openxmlformats.org/officeDocument/2006/math" xmlns="" val="1"/>
+              <ma14:wrappingTextBoxFlag xmlns="" xmlns:m="http://schemas.openxmlformats.org/officeDocument/2006/math" xmlns:a14="http://schemas.microsoft.com/office/drawing/2010/main" xmlns:ma14="http://schemas.microsoft.com/office/mac/drawingml/2011/main" val="1"/>
             </a:ext>
           </a:extLst>
         </p:spPr>
@@ -23741,7 +23976,7 @@
           </a:ln>
           <a:extLst>
             <a:ext uri="{C572A759-6A51-4108-AA02-DFA0A04FC94B}">
-              <ma14:wrappingTextBoxFlag xmlns:ma14="http://schemas.microsoft.com/office/mac/drawingml/2011/main" xmlns:a14="http://schemas.microsoft.com/office/drawing/2010/main" xmlns:m="http://schemas.openxmlformats.org/officeDocument/2006/math" xmlns="" val="1"/>
+              <ma14:wrappingTextBoxFlag xmlns="" xmlns:m="http://schemas.openxmlformats.org/officeDocument/2006/math" xmlns:a14="http://schemas.microsoft.com/office/drawing/2010/main" xmlns:ma14="http://schemas.microsoft.com/office/mac/drawingml/2011/main" val="1"/>
             </a:ext>
           </a:extLst>
         </p:spPr>
@@ -23887,7 +24122,7 @@
           </a:ln>
           <a:extLst>
             <a:ext uri="{C572A759-6A51-4108-AA02-DFA0A04FC94B}">
-              <ma14:wrappingTextBoxFlag xmlns:ma14="http://schemas.microsoft.com/office/mac/drawingml/2011/main" xmlns:a14="http://schemas.microsoft.com/office/drawing/2010/main" xmlns:m="http://schemas.openxmlformats.org/officeDocument/2006/math" xmlns="" val="1"/>
+              <ma14:wrappingTextBoxFlag xmlns="" xmlns:m="http://schemas.openxmlformats.org/officeDocument/2006/math" xmlns:a14="http://schemas.microsoft.com/office/drawing/2010/main" xmlns:ma14="http://schemas.microsoft.com/office/mac/drawingml/2011/main" val="1"/>
             </a:ext>
           </a:extLst>
         </p:spPr>
@@ -23934,7 +24169,7 @@
           </a:ln>
           <a:extLst>
             <a:ext uri="{C572A759-6A51-4108-AA02-DFA0A04FC94B}">
-              <ma14:wrappingTextBoxFlag xmlns:ma14="http://schemas.microsoft.com/office/mac/drawingml/2011/main" xmlns:a14="http://schemas.microsoft.com/office/drawing/2010/main" xmlns:m="http://schemas.openxmlformats.org/officeDocument/2006/math" xmlns="" val="1"/>
+              <ma14:wrappingTextBoxFlag xmlns="" xmlns:m="http://schemas.openxmlformats.org/officeDocument/2006/math" xmlns:a14="http://schemas.microsoft.com/office/drawing/2010/main" xmlns:ma14="http://schemas.microsoft.com/office/mac/drawingml/2011/main" val="1"/>
             </a:ext>
           </a:extLst>
         </p:spPr>
@@ -23981,7 +24216,7 @@
           </a:ln>
           <a:extLst>
             <a:ext uri="{C572A759-6A51-4108-AA02-DFA0A04FC94B}">
-              <ma14:wrappingTextBoxFlag xmlns:ma14="http://schemas.microsoft.com/office/mac/drawingml/2011/main" xmlns:a14="http://schemas.microsoft.com/office/drawing/2010/main" xmlns:m="http://schemas.openxmlformats.org/officeDocument/2006/math" xmlns="" val="1"/>
+              <ma14:wrappingTextBoxFlag xmlns="" xmlns:m="http://schemas.openxmlformats.org/officeDocument/2006/math" xmlns:a14="http://schemas.microsoft.com/office/drawing/2010/main" xmlns:ma14="http://schemas.microsoft.com/office/mac/drawingml/2011/main" val="1"/>
             </a:ext>
           </a:extLst>
         </p:spPr>
@@ -24116,7 +24351,7 @@
           </a:ln>
           <a:extLst>
             <a:ext uri="{C572A759-6A51-4108-AA02-DFA0A04FC94B}">
-              <ma14:wrappingTextBoxFlag xmlns:ma14="http://schemas.microsoft.com/office/mac/drawingml/2011/main" xmlns:a14="http://schemas.microsoft.com/office/drawing/2010/main" xmlns:m="http://schemas.openxmlformats.org/officeDocument/2006/math" xmlns="" val="1"/>
+              <ma14:wrappingTextBoxFlag xmlns="" xmlns:m="http://schemas.openxmlformats.org/officeDocument/2006/math" xmlns:a14="http://schemas.microsoft.com/office/drawing/2010/main" xmlns:ma14="http://schemas.microsoft.com/office/mac/drawingml/2011/main" val="1"/>
             </a:ext>
           </a:extLst>
         </p:spPr>
@@ -24171,7 +24406,7 @@
           </a:ln>
           <a:extLst>
             <a:ext uri="{C572A759-6A51-4108-AA02-DFA0A04FC94B}">
-              <ma14:wrappingTextBoxFlag xmlns:ma14="http://schemas.microsoft.com/office/mac/drawingml/2011/main" xmlns:a14="http://schemas.microsoft.com/office/drawing/2010/main" xmlns:m="http://schemas.openxmlformats.org/officeDocument/2006/math" xmlns="" val="1"/>
+              <ma14:wrappingTextBoxFlag xmlns="" xmlns:m="http://schemas.openxmlformats.org/officeDocument/2006/math" xmlns:a14="http://schemas.microsoft.com/office/drawing/2010/main" xmlns:ma14="http://schemas.microsoft.com/office/mac/drawingml/2011/main" val="1"/>
             </a:ext>
           </a:extLst>
         </p:spPr>
@@ -24259,7 +24494,7 @@
           </a:ln>
           <a:extLst>
             <a:ext uri="{C572A759-6A51-4108-AA02-DFA0A04FC94B}">
-              <ma14:wrappingTextBoxFlag xmlns:ma14="http://schemas.microsoft.com/office/mac/drawingml/2011/main" xmlns:a14="http://schemas.microsoft.com/office/drawing/2010/main" xmlns:m="http://schemas.openxmlformats.org/officeDocument/2006/math" xmlns="" val="1"/>
+              <ma14:wrappingTextBoxFlag xmlns="" xmlns:m="http://schemas.openxmlformats.org/officeDocument/2006/math" xmlns:a14="http://schemas.microsoft.com/office/drawing/2010/main" xmlns:ma14="http://schemas.microsoft.com/office/mac/drawingml/2011/main" val="1"/>
             </a:ext>
           </a:extLst>
         </p:spPr>
@@ -24306,7 +24541,7 @@
           </a:ln>
           <a:extLst>
             <a:ext uri="{C572A759-6A51-4108-AA02-DFA0A04FC94B}">
-              <ma14:wrappingTextBoxFlag xmlns:ma14="http://schemas.microsoft.com/office/mac/drawingml/2011/main" xmlns:a14="http://schemas.microsoft.com/office/drawing/2010/main" xmlns:m="http://schemas.openxmlformats.org/officeDocument/2006/math" xmlns="" val="1"/>
+              <ma14:wrappingTextBoxFlag xmlns="" xmlns:m="http://schemas.openxmlformats.org/officeDocument/2006/math" xmlns:a14="http://schemas.microsoft.com/office/drawing/2010/main" xmlns:ma14="http://schemas.microsoft.com/office/mac/drawingml/2011/main" val="1"/>
             </a:ext>
           </a:extLst>
         </p:spPr>
@@ -24364,7 +24599,7 @@
           </a:ln>
           <a:extLst>
             <a:ext uri="{C572A759-6A51-4108-AA02-DFA0A04FC94B}">
-              <ma14:wrappingTextBoxFlag xmlns:ma14="http://schemas.microsoft.com/office/mac/drawingml/2011/main" xmlns:a14="http://schemas.microsoft.com/office/drawing/2010/main" xmlns:m="http://schemas.openxmlformats.org/officeDocument/2006/math" xmlns="" val="1"/>
+              <ma14:wrappingTextBoxFlag xmlns="" xmlns:m="http://schemas.openxmlformats.org/officeDocument/2006/math" xmlns:a14="http://schemas.microsoft.com/office/drawing/2010/main" xmlns:ma14="http://schemas.microsoft.com/office/mac/drawingml/2011/main" val="1"/>
             </a:ext>
           </a:extLst>
         </p:spPr>
@@ -24484,7 +24719,7 @@
           </a:ln>
           <a:extLst>
             <a:ext uri="{C572A759-6A51-4108-AA02-DFA0A04FC94B}">
-              <ma14:wrappingTextBoxFlag xmlns:ma14="http://schemas.microsoft.com/office/mac/drawingml/2011/main" xmlns:a14="http://schemas.microsoft.com/office/drawing/2010/main" xmlns:m="http://schemas.openxmlformats.org/officeDocument/2006/math" xmlns="" val="1"/>
+              <ma14:wrappingTextBoxFlag xmlns="" xmlns:m="http://schemas.openxmlformats.org/officeDocument/2006/math" xmlns:a14="http://schemas.microsoft.com/office/drawing/2010/main" xmlns:ma14="http://schemas.microsoft.com/office/mac/drawingml/2011/main" val="1"/>
             </a:ext>
           </a:extLst>
         </p:spPr>
@@ -24534,7 +24769,7 @@
           </a:ln>
           <a:extLst>
             <a:ext uri="{C572A759-6A51-4108-AA02-DFA0A04FC94B}">
-              <ma14:wrappingTextBoxFlag xmlns:ma14="http://schemas.microsoft.com/office/mac/drawingml/2011/main" xmlns:a14="http://schemas.microsoft.com/office/drawing/2010/main" xmlns:m="http://schemas.openxmlformats.org/officeDocument/2006/math" xmlns="" val="1"/>
+              <ma14:wrappingTextBoxFlag xmlns="" xmlns:m="http://schemas.openxmlformats.org/officeDocument/2006/math" xmlns:a14="http://schemas.microsoft.com/office/drawing/2010/main" xmlns:ma14="http://schemas.microsoft.com/office/mac/drawingml/2011/main" val="1"/>
             </a:ext>
           </a:extLst>
         </p:spPr>
@@ -24695,7 +24930,7 @@
           </a:ln>
           <a:extLst>
             <a:ext uri="{C572A759-6A51-4108-AA02-DFA0A04FC94B}">
-              <ma14:wrappingTextBoxFlag xmlns:ma14="http://schemas.microsoft.com/office/mac/drawingml/2011/main" xmlns:a14="http://schemas.microsoft.com/office/drawing/2010/main" xmlns:m="http://schemas.openxmlformats.org/officeDocument/2006/math" xmlns="" val="1"/>
+              <ma14:wrappingTextBoxFlag xmlns="" xmlns:m="http://schemas.openxmlformats.org/officeDocument/2006/math" xmlns:a14="http://schemas.microsoft.com/office/drawing/2010/main" xmlns:ma14="http://schemas.microsoft.com/office/mac/drawingml/2011/main" val="1"/>
             </a:ext>
           </a:extLst>
         </p:spPr>
@@ -24745,7 +24980,7 @@
           </a:ln>
           <a:extLst>
             <a:ext uri="{C572A759-6A51-4108-AA02-DFA0A04FC94B}">
-              <ma14:wrappingTextBoxFlag xmlns:ma14="http://schemas.microsoft.com/office/mac/drawingml/2011/main" xmlns:a14="http://schemas.microsoft.com/office/drawing/2010/main" xmlns:m="http://schemas.openxmlformats.org/officeDocument/2006/math" xmlns="" val="1"/>
+              <ma14:wrappingTextBoxFlag xmlns="" xmlns:m="http://schemas.openxmlformats.org/officeDocument/2006/math" xmlns:a14="http://schemas.microsoft.com/office/drawing/2010/main" xmlns:ma14="http://schemas.microsoft.com/office/mac/drawingml/2011/main" val="1"/>
             </a:ext>
           </a:extLst>
         </p:spPr>
@@ -24853,7 +25088,7 @@
           </a:ln>
           <a:extLst>
             <a:ext uri="{C572A759-6A51-4108-AA02-DFA0A04FC94B}">
-              <ma14:wrappingTextBoxFlag xmlns:ma14="http://schemas.microsoft.com/office/mac/drawingml/2011/main" xmlns:a14="http://schemas.microsoft.com/office/drawing/2010/main" xmlns:m="http://schemas.openxmlformats.org/officeDocument/2006/math" xmlns="" val="1"/>
+              <ma14:wrappingTextBoxFlag xmlns="" xmlns:m="http://schemas.openxmlformats.org/officeDocument/2006/math" xmlns:a14="http://schemas.microsoft.com/office/drawing/2010/main" xmlns:ma14="http://schemas.microsoft.com/office/mac/drawingml/2011/main" val="1"/>
             </a:ext>
           </a:extLst>
         </p:spPr>
@@ -25078,7 +25313,7 @@
           </a:ln>
           <a:extLst>
             <a:ext uri="{C572A759-6A51-4108-AA02-DFA0A04FC94B}">
-              <ma14:wrappingTextBoxFlag xmlns:ma14="http://schemas.microsoft.com/office/mac/drawingml/2011/main" xmlns:a14="http://schemas.microsoft.com/office/drawing/2010/main" xmlns:m="http://schemas.openxmlformats.org/officeDocument/2006/math" xmlns="" val="1"/>
+              <ma14:wrappingTextBoxFlag xmlns="" xmlns:m="http://schemas.openxmlformats.org/officeDocument/2006/math" xmlns:a14="http://schemas.microsoft.com/office/drawing/2010/main" xmlns:ma14="http://schemas.microsoft.com/office/mac/drawingml/2011/main" val="1"/>
             </a:ext>
           </a:extLst>
         </p:spPr>
@@ -25125,7 +25360,7 @@
           </a:ln>
           <a:extLst>
             <a:ext uri="{C572A759-6A51-4108-AA02-DFA0A04FC94B}">
-              <ma14:wrappingTextBoxFlag xmlns:ma14="http://schemas.microsoft.com/office/mac/drawingml/2011/main" xmlns:a14="http://schemas.microsoft.com/office/drawing/2010/main" xmlns:m="http://schemas.openxmlformats.org/officeDocument/2006/math" xmlns="" val="1"/>
+              <ma14:wrappingTextBoxFlag xmlns="" xmlns:m="http://schemas.openxmlformats.org/officeDocument/2006/math" xmlns:a14="http://schemas.microsoft.com/office/drawing/2010/main" xmlns:ma14="http://schemas.microsoft.com/office/mac/drawingml/2011/main" val="1"/>
             </a:ext>
           </a:extLst>
         </p:spPr>
@@ -25172,7 +25407,7 @@
           </a:ln>
           <a:extLst>
             <a:ext uri="{C572A759-6A51-4108-AA02-DFA0A04FC94B}">
-              <ma14:wrappingTextBoxFlag xmlns:ma14="http://schemas.microsoft.com/office/mac/drawingml/2011/main" xmlns:a14="http://schemas.microsoft.com/office/drawing/2010/main" xmlns:m="http://schemas.openxmlformats.org/officeDocument/2006/math" xmlns="" val="1"/>
+              <ma14:wrappingTextBoxFlag xmlns="" xmlns:m="http://schemas.openxmlformats.org/officeDocument/2006/math" xmlns:a14="http://schemas.microsoft.com/office/drawing/2010/main" xmlns:ma14="http://schemas.microsoft.com/office/mac/drawingml/2011/main" val="1"/>
             </a:ext>
           </a:extLst>
         </p:spPr>
@@ -25307,7 +25542,7 @@
           </a:ln>
           <a:extLst>
             <a:ext uri="{C572A759-6A51-4108-AA02-DFA0A04FC94B}">
-              <ma14:wrappingTextBoxFlag xmlns:ma14="http://schemas.microsoft.com/office/mac/drawingml/2011/main" xmlns:a14="http://schemas.microsoft.com/office/drawing/2010/main" xmlns:m="http://schemas.openxmlformats.org/officeDocument/2006/math" xmlns="" val="1"/>
+              <ma14:wrappingTextBoxFlag xmlns="" xmlns:m="http://schemas.openxmlformats.org/officeDocument/2006/math" xmlns:a14="http://schemas.microsoft.com/office/drawing/2010/main" xmlns:ma14="http://schemas.microsoft.com/office/mac/drawingml/2011/main" val="1"/>
             </a:ext>
           </a:extLst>
         </p:spPr>
@@ -25362,7 +25597,7 @@
           </a:ln>
           <a:extLst>
             <a:ext uri="{C572A759-6A51-4108-AA02-DFA0A04FC94B}">
-              <ma14:wrappingTextBoxFlag xmlns:ma14="http://schemas.microsoft.com/office/mac/drawingml/2011/main" xmlns:a14="http://schemas.microsoft.com/office/drawing/2010/main" xmlns:m="http://schemas.openxmlformats.org/officeDocument/2006/math" xmlns="" val="1"/>
+              <ma14:wrappingTextBoxFlag xmlns="" xmlns:m="http://schemas.openxmlformats.org/officeDocument/2006/math" xmlns:a14="http://schemas.microsoft.com/office/drawing/2010/main" xmlns:ma14="http://schemas.microsoft.com/office/mac/drawingml/2011/main" val="1"/>
             </a:ext>
           </a:extLst>
         </p:spPr>
@@ -25450,7 +25685,7 @@
           </a:ln>
           <a:extLst>
             <a:ext uri="{C572A759-6A51-4108-AA02-DFA0A04FC94B}">
-              <ma14:wrappingTextBoxFlag xmlns:ma14="http://schemas.microsoft.com/office/mac/drawingml/2011/main" xmlns:a14="http://schemas.microsoft.com/office/drawing/2010/main" xmlns:m="http://schemas.openxmlformats.org/officeDocument/2006/math" xmlns="" val="1"/>
+              <ma14:wrappingTextBoxFlag xmlns="" xmlns:m="http://schemas.openxmlformats.org/officeDocument/2006/math" xmlns:a14="http://schemas.microsoft.com/office/drawing/2010/main" xmlns:ma14="http://schemas.microsoft.com/office/mac/drawingml/2011/main" val="1"/>
             </a:ext>
           </a:extLst>
         </p:spPr>
@@ -25497,7 +25732,7 @@
           </a:ln>
           <a:extLst>
             <a:ext uri="{C572A759-6A51-4108-AA02-DFA0A04FC94B}">
-              <ma14:wrappingTextBoxFlag xmlns:ma14="http://schemas.microsoft.com/office/mac/drawingml/2011/main" xmlns:a14="http://schemas.microsoft.com/office/drawing/2010/main" xmlns:m="http://schemas.openxmlformats.org/officeDocument/2006/math" xmlns="" val="1"/>
+              <ma14:wrappingTextBoxFlag xmlns="" xmlns:m="http://schemas.openxmlformats.org/officeDocument/2006/math" xmlns:a14="http://schemas.microsoft.com/office/drawing/2010/main" xmlns:ma14="http://schemas.microsoft.com/office/mac/drawingml/2011/main" val="1"/>
             </a:ext>
           </a:extLst>
         </p:spPr>
@@ -25620,7 +25855,7 @@
           </a:ln>
           <a:extLst>
             <a:ext uri="{C572A759-6A51-4108-AA02-DFA0A04FC94B}">
-              <ma14:wrappingTextBoxFlag xmlns:ma14="http://schemas.microsoft.com/office/mac/drawingml/2011/main" xmlns:a14="http://schemas.microsoft.com/office/drawing/2010/main" xmlns:m="http://schemas.openxmlformats.org/officeDocument/2006/math" xmlns="" val="1"/>
+              <ma14:wrappingTextBoxFlag xmlns="" xmlns:m="http://schemas.openxmlformats.org/officeDocument/2006/math" xmlns:a14="http://schemas.microsoft.com/office/drawing/2010/main" xmlns:ma14="http://schemas.microsoft.com/office/mac/drawingml/2011/main" val="1"/>
             </a:ext>
           </a:extLst>
         </p:spPr>
@@ -25670,7 +25905,7 @@
           </a:ln>
           <a:extLst>
             <a:ext uri="{C572A759-6A51-4108-AA02-DFA0A04FC94B}">
-              <ma14:wrappingTextBoxFlag xmlns:ma14="http://schemas.microsoft.com/office/mac/drawingml/2011/main" xmlns:a14="http://schemas.microsoft.com/office/drawing/2010/main" xmlns:m="http://schemas.openxmlformats.org/officeDocument/2006/math" xmlns="" val="1"/>
+              <ma14:wrappingTextBoxFlag xmlns="" xmlns:m="http://schemas.openxmlformats.org/officeDocument/2006/math" xmlns:a14="http://schemas.microsoft.com/office/drawing/2010/main" xmlns:ma14="http://schemas.microsoft.com/office/mac/drawingml/2011/main" val="1"/>
             </a:ext>
           </a:extLst>
         </p:spPr>
@@ -25717,7 +25952,7 @@
           </a:ln>
           <a:extLst>
             <a:ext uri="{C572A759-6A51-4108-AA02-DFA0A04FC94B}">
-              <ma14:wrappingTextBoxFlag xmlns:ma14="http://schemas.microsoft.com/office/mac/drawingml/2011/main" xmlns:a14="http://schemas.microsoft.com/office/drawing/2010/main" xmlns:m="http://schemas.openxmlformats.org/officeDocument/2006/math" xmlns="" val="1"/>
+              <ma14:wrappingTextBoxFlag xmlns="" xmlns:m="http://schemas.openxmlformats.org/officeDocument/2006/math" xmlns:a14="http://schemas.microsoft.com/office/drawing/2010/main" xmlns:ma14="http://schemas.microsoft.com/office/mac/drawingml/2011/main" val="1"/>
             </a:ext>
           </a:extLst>
         </p:spPr>
@@ -25828,7 +26063,7 @@
           </a:ln>
           <a:extLst>
             <a:ext uri="{C572A759-6A51-4108-AA02-DFA0A04FC94B}">
-              <ma14:wrappingTextBoxFlag xmlns:ma14="http://schemas.microsoft.com/office/mac/drawingml/2011/main" xmlns:a14="http://schemas.microsoft.com/office/drawing/2010/main" xmlns:m="http://schemas.openxmlformats.org/officeDocument/2006/math" xmlns="" val="1"/>
+              <ma14:wrappingTextBoxFlag xmlns="" xmlns:m="http://schemas.openxmlformats.org/officeDocument/2006/math" xmlns:a14="http://schemas.microsoft.com/office/drawing/2010/main" xmlns:ma14="http://schemas.microsoft.com/office/mac/drawingml/2011/main" val="1"/>
             </a:ext>
           </a:extLst>
         </p:spPr>
@@ -25878,7 +26113,7 @@
           </a:ln>
           <a:extLst>
             <a:ext uri="{C572A759-6A51-4108-AA02-DFA0A04FC94B}">
-              <ma14:wrappingTextBoxFlag xmlns:ma14="http://schemas.microsoft.com/office/mac/drawingml/2011/main" xmlns:a14="http://schemas.microsoft.com/office/drawing/2010/main" xmlns:m="http://schemas.openxmlformats.org/officeDocument/2006/math" xmlns="" val="1"/>
+              <ma14:wrappingTextBoxFlag xmlns="" xmlns:m="http://schemas.openxmlformats.org/officeDocument/2006/math" xmlns:a14="http://schemas.microsoft.com/office/drawing/2010/main" xmlns:ma14="http://schemas.microsoft.com/office/mac/drawingml/2011/main" val="1"/>
             </a:ext>
           </a:extLst>
         </p:spPr>
@@ -25964,7 +26199,7 @@
           </a:ln>
           <a:extLst>
             <a:ext uri="{C572A759-6A51-4108-AA02-DFA0A04FC94B}">
-              <ma14:wrappingTextBoxFlag xmlns:ma14="http://schemas.microsoft.com/office/mac/drawingml/2011/main" xmlns:a14="http://schemas.microsoft.com/office/drawing/2010/main" xmlns:m="http://schemas.openxmlformats.org/officeDocument/2006/math" xmlns="" val="1"/>
+              <ma14:wrappingTextBoxFlag xmlns="" xmlns:m="http://schemas.openxmlformats.org/officeDocument/2006/math" xmlns:a14="http://schemas.microsoft.com/office/drawing/2010/main" xmlns:ma14="http://schemas.microsoft.com/office/mac/drawingml/2011/main" val="1"/>
             </a:ext>
           </a:extLst>
         </p:spPr>
@@ -26033,7 +26268,7 @@
           </a:ln>
           <a:extLst>
             <a:ext uri="{C572A759-6A51-4108-AA02-DFA0A04FC94B}">
-              <ma14:wrappingTextBoxFlag xmlns:ma14="http://schemas.microsoft.com/office/mac/drawingml/2011/main" xmlns:a14="http://schemas.microsoft.com/office/drawing/2010/main" xmlns:m="http://schemas.openxmlformats.org/officeDocument/2006/math" xmlns="" val="1"/>
+              <ma14:wrappingTextBoxFlag xmlns="" xmlns:m="http://schemas.openxmlformats.org/officeDocument/2006/math" xmlns:a14="http://schemas.microsoft.com/office/drawing/2010/main" xmlns:ma14="http://schemas.microsoft.com/office/mac/drawingml/2011/main" val="1"/>
             </a:ext>
           </a:extLst>
         </p:spPr>
@@ -26091,7 +26326,7 @@
           </a:ln>
           <a:extLst>
             <a:ext uri="{C572A759-6A51-4108-AA02-DFA0A04FC94B}">
-              <ma14:wrappingTextBoxFlag xmlns:ma14="http://schemas.microsoft.com/office/mac/drawingml/2011/main" xmlns:a14="http://schemas.microsoft.com/office/drawing/2010/main" xmlns:m="http://schemas.openxmlformats.org/officeDocument/2006/math" xmlns="" val="1"/>
+              <ma14:wrappingTextBoxFlag xmlns="" xmlns:m="http://schemas.openxmlformats.org/officeDocument/2006/math" xmlns:a14="http://schemas.microsoft.com/office/drawing/2010/main" xmlns:ma14="http://schemas.microsoft.com/office/mac/drawingml/2011/main" val="1"/>
             </a:ext>
           </a:extLst>
         </p:spPr>
@@ -26141,7 +26376,7 @@
           </a:ln>
           <a:extLst>
             <a:ext uri="{C572A759-6A51-4108-AA02-DFA0A04FC94B}">
-              <ma14:wrappingTextBoxFlag xmlns:ma14="http://schemas.microsoft.com/office/mac/drawingml/2011/main" xmlns:a14="http://schemas.microsoft.com/office/drawing/2010/main" xmlns:m="http://schemas.openxmlformats.org/officeDocument/2006/math" xmlns="" val="1"/>
+              <ma14:wrappingTextBoxFlag xmlns="" xmlns:m="http://schemas.openxmlformats.org/officeDocument/2006/math" xmlns:a14="http://schemas.microsoft.com/office/drawing/2010/main" xmlns:ma14="http://schemas.microsoft.com/office/mac/drawingml/2011/main" val="1"/>
             </a:ext>
           </a:extLst>
         </p:spPr>
@@ -26188,7 +26423,7 @@
           </a:ln>
           <a:extLst>
             <a:ext uri="{C572A759-6A51-4108-AA02-DFA0A04FC94B}">
-              <ma14:wrappingTextBoxFlag xmlns:ma14="http://schemas.microsoft.com/office/mac/drawingml/2011/main" xmlns:a14="http://schemas.microsoft.com/office/drawing/2010/main" xmlns:m="http://schemas.openxmlformats.org/officeDocument/2006/math" xmlns="" val="1"/>
+              <ma14:wrappingTextBoxFlag xmlns="" xmlns:m="http://schemas.openxmlformats.org/officeDocument/2006/math" xmlns:a14="http://schemas.microsoft.com/office/drawing/2010/main" xmlns:ma14="http://schemas.microsoft.com/office/mac/drawingml/2011/main" val="1"/>
             </a:ext>
           </a:extLst>
         </p:spPr>
@@ -26246,7 +26481,7 @@
           </a:ln>
           <a:extLst>
             <a:ext uri="{C572A759-6A51-4108-AA02-DFA0A04FC94B}">
-              <ma14:wrappingTextBoxFlag xmlns:ma14="http://schemas.microsoft.com/office/mac/drawingml/2011/main" xmlns:a14="http://schemas.microsoft.com/office/drawing/2010/main" xmlns:m="http://schemas.openxmlformats.org/officeDocument/2006/math" xmlns="" val="1"/>
+              <ma14:wrappingTextBoxFlag xmlns="" xmlns:m="http://schemas.openxmlformats.org/officeDocument/2006/math" xmlns:a14="http://schemas.microsoft.com/office/drawing/2010/main" xmlns:ma14="http://schemas.microsoft.com/office/mac/drawingml/2011/main" val="1"/>
             </a:ext>
           </a:extLst>
         </p:spPr>
@@ -26296,7 +26531,7 @@
           </a:ln>
           <a:extLst>
             <a:ext uri="{C572A759-6A51-4108-AA02-DFA0A04FC94B}">
-              <ma14:wrappingTextBoxFlag xmlns:ma14="http://schemas.microsoft.com/office/mac/drawingml/2011/main" xmlns:a14="http://schemas.microsoft.com/office/drawing/2010/main" xmlns:m="http://schemas.openxmlformats.org/officeDocument/2006/math" xmlns="" val="1"/>
+              <ma14:wrappingTextBoxFlag xmlns="" xmlns:m="http://schemas.openxmlformats.org/officeDocument/2006/math" xmlns:a14="http://schemas.microsoft.com/office/drawing/2010/main" xmlns:ma14="http://schemas.microsoft.com/office/mac/drawingml/2011/main" val="1"/>
             </a:ext>
           </a:extLst>
         </p:spPr>
@@ -26343,7 +26578,7 @@
           </a:ln>
           <a:extLst>
             <a:ext uri="{C572A759-6A51-4108-AA02-DFA0A04FC94B}">
-              <ma14:wrappingTextBoxFlag xmlns:ma14="http://schemas.microsoft.com/office/mac/drawingml/2011/main" xmlns:a14="http://schemas.microsoft.com/office/drawing/2010/main" xmlns:m="http://schemas.openxmlformats.org/officeDocument/2006/math" xmlns="" val="1"/>
+              <ma14:wrappingTextBoxFlag xmlns="" xmlns:m="http://schemas.openxmlformats.org/officeDocument/2006/math" xmlns:a14="http://schemas.microsoft.com/office/drawing/2010/main" xmlns:ma14="http://schemas.microsoft.com/office/mac/drawingml/2011/main" val="1"/>
             </a:ext>
           </a:extLst>
         </p:spPr>
@@ -26413,7 +26648,7 @@
           </a:ln>
           <a:extLst>
             <a:ext uri="{C572A759-6A51-4108-AA02-DFA0A04FC94B}">
-              <ma14:wrappingTextBoxFlag xmlns:ma14="http://schemas.microsoft.com/office/mac/drawingml/2011/main" xmlns:a14="http://schemas.microsoft.com/office/drawing/2010/main" xmlns:m="http://schemas.openxmlformats.org/officeDocument/2006/math" xmlns="" val="1"/>
+              <ma14:wrappingTextBoxFlag xmlns="" xmlns:m="http://schemas.openxmlformats.org/officeDocument/2006/math" xmlns:a14="http://schemas.microsoft.com/office/drawing/2010/main" xmlns:ma14="http://schemas.microsoft.com/office/mac/drawingml/2011/main" val="1"/>
             </a:ext>
           </a:extLst>
         </p:spPr>
@@ -26499,7 +26734,7 @@
           </a:ln>
           <a:extLst>
             <a:ext uri="{C572A759-6A51-4108-AA02-DFA0A04FC94B}">
-              <ma14:wrappingTextBoxFlag xmlns:ma14="http://schemas.microsoft.com/office/mac/drawingml/2011/main" xmlns:a14="http://schemas.microsoft.com/office/drawing/2010/main" xmlns:m="http://schemas.openxmlformats.org/officeDocument/2006/math" xmlns="" val="1"/>
+              <ma14:wrappingTextBoxFlag xmlns="" xmlns:m="http://schemas.openxmlformats.org/officeDocument/2006/math" xmlns:a14="http://schemas.microsoft.com/office/drawing/2010/main" xmlns:ma14="http://schemas.microsoft.com/office/mac/drawingml/2011/main" val="1"/>
             </a:ext>
           </a:extLst>
         </p:spPr>
@@ -26576,7 +26811,7 @@
           </a:ln>
           <a:extLst>
             <a:ext uri="{C572A759-6A51-4108-AA02-DFA0A04FC94B}">
-              <ma14:wrappingTextBoxFlag xmlns:ma14="http://schemas.microsoft.com/office/mac/drawingml/2011/main" xmlns:a14="http://schemas.microsoft.com/office/drawing/2010/main" xmlns:m="http://schemas.openxmlformats.org/officeDocument/2006/math" xmlns="" val="1"/>
+              <ma14:wrappingTextBoxFlag xmlns="" xmlns:m="http://schemas.openxmlformats.org/officeDocument/2006/math" xmlns:a14="http://schemas.microsoft.com/office/drawing/2010/main" xmlns:ma14="http://schemas.microsoft.com/office/mac/drawingml/2011/main" val="1"/>
             </a:ext>
           </a:extLst>
         </p:spPr>
@@ -26729,7 +26964,7 @@
           </a:ln>
           <a:extLst>
             <a:ext uri="{C572A759-6A51-4108-AA02-DFA0A04FC94B}">
-              <ma14:wrappingTextBoxFlag xmlns:ma14="http://schemas.microsoft.com/office/mac/drawingml/2011/main" xmlns:a14="http://schemas.microsoft.com/office/drawing/2010/main" xmlns:m="http://schemas.openxmlformats.org/officeDocument/2006/math" xmlns="" val="1"/>
+              <ma14:wrappingTextBoxFlag xmlns="" xmlns:m="http://schemas.openxmlformats.org/officeDocument/2006/math" xmlns:a14="http://schemas.microsoft.com/office/drawing/2010/main" xmlns:ma14="http://schemas.microsoft.com/office/mac/drawingml/2011/main" val="1"/>
             </a:ext>
           </a:extLst>
         </p:spPr>
@@ -26776,7 +27011,7 @@
           </a:ln>
           <a:extLst>
             <a:ext uri="{C572A759-6A51-4108-AA02-DFA0A04FC94B}">
-              <ma14:wrappingTextBoxFlag xmlns:ma14="http://schemas.microsoft.com/office/mac/drawingml/2011/main" xmlns:a14="http://schemas.microsoft.com/office/drawing/2010/main" xmlns:m="http://schemas.openxmlformats.org/officeDocument/2006/math" xmlns="" val="1"/>
+              <ma14:wrappingTextBoxFlag xmlns="" xmlns:m="http://schemas.openxmlformats.org/officeDocument/2006/math" xmlns:a14="http://schemas.microsoft.com/office/drawing/2010/main" xmlns:ma14="http://schemas.microsoft.com/office/mac/drawingml/2011/main" val="1"/>
             </a:ext>
           </a:extLst>
         </p:spPr>
@@ -26823,7 +27058,7 @@
           </a:ln>
           <a:extLst>
             <a:ext uri="{C572A759-6A51-4108-AA02-DFA0A04FC94B}">
-              <ma14:wrappingTextBoxFlag xmlns:ma14="http://schemas.microsoft.com/office/mac/drawingml/2011/main" xmlns:a14="http://schemas.microsoft.com/office/drawing/2010/main" xmlns:m="http://schemas.openxmlformats.org/officeDocument/2006/math" xmlns="" val="1"/>
+              <ma14:wrappingTextBoxFlag xmlns="" xmlns:m="http://schemas.openxmlformats.org/officeDocument/2006/math" xmlns:a14="http://schemas.microsoft.com/office/drawing/2010/main" xmlns:ma14="http://schemas.microsoft.com/office/mac/drawingml/2011/main" val="1"/>
             </a:ext>
           </a:extLst>
         </p:spPr>
@@ -26958,7 +27193,7 @@
           </a:ln>
           <a:extLst>
             <a:ext uri="{C572A759-6A51-4108-AA02-DFA0A04FC94B}">
-              <ma14:wrappingTextBoxFlag xmlns:ma14="http://schemas.microsoft.com/office/mac/drawingml/2011/main" xmlns:a14="http://schemas.microsoft.com/office/drawing/2010/main" xmlns:m="http://schemas.openxmlformats.org/officeDocument/2006/math" xmlns="" val="1"/>
+              <ma14:wrappingTextBoxFlag xmlns="" xmlns:m="http://schemas.openxmlformats.org/officeDocument/2006/math" xmlns:a14="http://schemas.microsoft.com/office/drawing/2010/main" xmlns:ma14="http://schemas.microsoft.com/office/mac/drawingml/2011/main" val="1"/>
             </a:ext>
           </a:extLst>
         </p:spPr>
@@ -27013,7 +27248,7 @@
           </a:ln>
           <a:extLst>
             <a:ext uri="{C572A759-6A51-4108-AA02-DFA0A04FC94B}">
-              <ma14:wrappingTextBoxFlag xmlns:ma14="http://schemas.microsoft.com/office/mac/drawingml/2011/main" xmlns:a14="http://schemas.microsoft.com/office/drawing/2010/main" xmlns:m="http://schemas.openxmlformats.org/officeDocument/2006/math" xmlns="" val="1"/>
+              <ma14:wrappingTextBoxFlag xmlns="" xmlns:m="http://schemas.openxmlformats.org/officeDocument/2006/math" xmlns:a14="http://schemas.microsoft.com/office/drawing/2010/main" xmlns:ma14="http://schemas.microsoft.com/office/mac/drawingml/2011/main" val="1"/>
             </a:ext>
           </a:extLst>
         </p:spPr>
@@ -27101,7 +27336,7 @@
           </a:ln>
           <a:extLst>
             <a:ext uri="{C572A759-6A51-4108-AA02-DFA0A04FC94B}">
-              <ma14:wrappingTextBoxFlag xmlns:ma14="http://schemas.microsoft.com/office/mac/drawingml/2011/main" xmlns:a14="http://schemas.microsoft.com/office/drawing/2010/main" xmlns:m="http://schemas.openxmlformats.org/officeDocument/2006/math" xmlns="" val="1"/>
+              <ma14:wrappingTextBoxFlag xmlns="" xmlns:m="http://schemas.openxmlformats.org/officeDocument/2006/math" xmlns:a14="http://schemas.microsoft.com/office/drawing/2010/main" xmlns:ma14="http://schemas.microsoft.com/office/mac/drawingml/2011/main" val="1"/>
             </a:ext>
           </a:extLst>
         </p:spPr>
@@ -27148,7 +27383,7 @@
           </a:ln>
           <a:extLst>
             <a:ext uri="{C572A759-6A51-4108-AA02-DFA0A04FC94B}">
-              <ma14:wrappingTextBoxFlag xmlns:ma14="http://schemas.microsoft.com/office/mac/drawingml/2011/main" xmlns:a14="http://schemas.microsoft.com/office/drawing/2010/main" xmlns:m="http://schemas.openxmlformats.org/officeDocument/2006/math" xmlns="" val="1"/>
+              <ma14:wrappingTextBoxFlag xmlns="" xmlns:m="http://schemas.openxmlformats.org/officeDocument/2006/math" xmlns:a14="http://schemas.microsoft.com/office/drawing/2010/main" xmlns:ma14="http://schemas.microsoft.com/office/mac/drawingml/2011/main" val="1"/>
             </a:ext>
           </a:extLst>
         </p:spPr>
@@ -27218,7 +27453,7 @@
           </a:ln>
           <a:extLst>
             <a:ext uri="{C572A759-6A51-4108-AA02-DFA0A04FC94B}">
-              <ma14:wrappingTextBoxFlag xmlns:ma14="http://schemas.microsoft.com/office/mac/drawingml/2011/main" xmlns:a14="http://schemas.microsoft.com/office/drawing/2010/main" xmlns:m="http://schemas.openxmlformats.org/officeDocument/2006/math" xmlns="" val="1"/>
+              <ma14:wrappingTextBoxFlag xmlns="" xmlns:m="http://schemas.openxmlformats.org/officeDocument/2006/math" xmlns:a14="http://schemas.microsoft.com/office/drawing/2010/main" xmlns:ma14="http://schemas.microsoft.com/office/mac/drawingml/2011/main" val="1"/>
             </a:ext>
           </a:extLst>
         </p:spPr>
@@ -27314,7 +27549,7 @@
           </a:ln>
           <a:extLst>
             <a:ext uri="{C572A759-6A51-4108-AA02-DFA0A04FC94B}">
-              <ma14:wrappingTextBoxFlag xmlns:ma14="http://schemas.microsoft.com/office/mac/drawingml/2011/main" xmlns:a14="http://schemas.microsoft.com/office/drawing/2010/main" xmlns:m="http://schemas.openxmlformats.org/officeDocument/2006/math" xmlns="" val="1"/>
+              <ma14:wrappingTextBoxFlag xmlns="" xmlns:m="http://schemas.openxmlformats.org/officeDocument/2006/math" xmlns:a14="http://schemas.microsoft.com/office/drawing/2010/main" xmlns:ma14="http://schemas.microsoft.com/office/mac/drawingml/2011/main" val="1"/>
             </a:ext>
           </a:extLst>
         </p:spPr>
@@ -27364,7 +27599,7 @@
           </a:ln>
           <a:extLst>
             <a:ext uri="{C572A759-6A51-4108-AA02-DFA0A04FC94B}">
-              <ma14:wrappingTextBoxFlag xmlns:ma14="http://schemas.microsoft.com/office/mac/drawingml/2011/main" xmlns:a14="http://schemas.microsoft.com/office/drawing/2010/main" xmlns:m="http://schemas.openxmlformats.org/officeDocument/2006/math" xmlns="" val="1"/>
+              <ma14:wrappingTextBoxFlag xmlns="" xmlns:m="http://schemas.openxmlformats.org/officeDocument/2006/math" xmlns:a14="http://schemas.microsoft.com/office/drawing/2010/main" xmlns:ma14="http://schemas.microsoft.com/office/mac/drawingml/2011/main" val="1"/>
             </a:ext>
           </a:extLst>
         </p:spPr>
@@ -27446,7 +27681,7 @@
           </a:ln>
           <a:extLst>
             <a:ext uri="{C572A759-6A51-4108-AA02-DFA0A04FC94B}">
-              <ma14:wrappingTextBoxFlag xmlns:ma14="http://schemas.microsoft.com/office/mac/drawingml/2011/main" xmlns:a14="http://schemas.microsoft.com/office/drawing/2010/main" xmlns:m="http://schemas.openxmlformats.org/officeDocument/2006/math" xmlns="" val="1"/>
+              <ma14:wrappingTextBoxFlag xmlns="" xmlns:m="http://schemas.openxmlformats.org/officeDocument/2006/math" xmlns:a14="http://schemas.microsoft.com/office/drawing/2010/main" xmlns:ma14="http://schemas.microsoft.com/office/mac/drawingml/2011/main" val="1"/>
             </a:ext>
           </a:extLst>
         </p:spPr>
@@ -27545,7 +27780,7 @@
           </a:ln>
           <a:extLst>
             <a:ext uri="{C572A759-6A51-4108-AA02-DFA0A04FC94B}">
-              <ma14:wrappingTextBoxFlag xmlns:ma14="http://schemas.microsoft.com/office/mac/drawingml/2011/main" xmlns:a14="http://schemas.microsoft.com/office/drawing/2010/main" xmlns:m="http://schemas.openxmlformats.org/officeDocument/2006/math" xmlns="" val="1"/>
+              <ma14:wrappingTextBoxFlag xmlns="" xmlns:m="http://schemas.openxmlformats.org/officeDocument/2006/math" xmlns:a14="http://schemas.microsoft.com/office/drawing/2010/main" xmlns:ma14="http://schemas.microsoft.com/office/mac/drawingml/2011/main" val="1"/>
             </a:ext>
           </a:extLst>
         </p:spPr>
@@ -27595,7 +27830,7 @@
           </a:ln>
           <a:extLst>
             <a:ext uri="{C572A759-6A51-4108-AA02-DFA0A04FC94B}">
-              <ma14:wrappingTextBoxFlag xmlns:ma14="http://schemas.microsoft.com/office/mac/drawingml/2011/main" xmlns:a14="http://schemas.microsoft.com/office/drawing/2010/main" xmlns:m="http://schemas.openxmlformats.org/officeDocument/2006/math" xmlns="" val="1"/>
+              <ma14:wrappingTextBoxFlag xmlns="" xmlns:m="http://schemas.openxmlformats.org/officeDocument/2006/math" xmlns:a14="http://schemas.microsoft.com/office/drawing/2010/main" xmlns:ma14="http://schemas.microsoft.com/office/mac/drawingml/2011/main" val="1"/>
             </a:ext>
           </a:extLst>
         </p:spPr>
@@ -27692,7 +27927,7 @@
           </a:ln>
           <a:extLst>
             <a:ext uri="{C572A759-6A51-4108-AA02-DFA0A04FC94B}">
-              <ma14:wrappingTextBoxFlag xmlns:ma14="http://schemas.microsoft.com/office/mac/drawingml/2011/main" xmlns:a14="http://schemas.microsoft.com/office/drawing/2010/main" xmlns:m="http://schemas.openxmlformats.org/officeDocument/2006/math" xmlns="" val="1"/>
+              <ma14:wrappingTextBoxFlag xmlns="" xmlns:m="http://schemas.openxmlformats.org/officeDocument/2006/math" xmlns:a14="http://schemas.microsoft.com/office/drawing/2010/main" xmlns:ma14="http://schemas.microsoft.com/office/mac/drawingml/2011/main" val="1"/>
             </a:ext>
           </a:extLst>
         </p:spPr>
@@ -27802,7 +28037,7 @@
           </a:ln>
           <a:extLst>
             <a:ext uri="{C572A759-6A51-4108-AA02-DFA0A04FC94B}">
-              <ma14:wrappingTextBoxFlag xmlns:ma14="http://schemas.microsoft.com/office/mac/drawingml/2011/main" xmlns:a14="http://schemas.microsoft.com/office/drawing/2010/main" xmlns:m="http://schemas.openxmlformats.org/officeDocument/2006/math" xmlns="" val="1"/>
+              <ma14:wrappingTextBoxFlag xmlns="" xmlns:m="http://schemas.openxmlformats.org/officeDocument/2006/math" xmlns:a14="http://schemas.microsoft.com/office/drawing/2010/main" xmlns:ma14="http://schemas.microsoft.com/office/mac/drawingml/2011/main" val="1"/>
             </a:ext>
           </a:extLst>
         </p:spPr>
@@ -27852,7 +28087,7 @@
           </a:ln>
           <a:extLst>
             <a:ext uri="{C572A759-6A51-4108-AA02-DFA0A04FC94B}">
-              <ma14:wrappingTextBoxFlag xmlns:ma14="http://schemas.microsoft.com/office/mac/drawingml/2011/main" xmlns:a14="http://schemas.microsoft.com/office/drawing/2010/main" xmlns:m="http://schemas.openxmlformats.org/officeDocument/2006/math" xmlns="" val="1"/>
+              <ma14:wrappingTextBoxFlag xmlns="" xmlns:m="http://schemas.openxmlformats.org/officeDocument/2006/math" xmlns:a14="http://schemas.microsoft.com/office/drawing/2010/main" xmlns:ma14="http://schemas.microsoft.com/office/mac/drawingml/2011/main" val="1"/>
             </a:ext>
           </a:extLst>
         </p:spPr>
@@ -27949,7 +28184,7 @@
           </a:ln>
           <a:extLst>
             <a:ext uri="{C572A759-6A51-4108-AA02-DFA0A04FC94B}">
-              <ma14:wrappingTextBoxFlag xmlns:ma14="http://schemas.microsoft.com/office/mac/drawingml/2011/main" xmlns:a14="http://schemas.microsoft.com/office/drawing/2010/main" xmlns:m="http://schemas.openxmlformats.org/officeDocument/2006/math" xmlns="" val="1"/>
+              <ma14:wrappingTextBoxFlag xmlns="" xmlns:m="http://schemas.openxmlformats.org/officeDocument/2006/math" xmlns:a14="http://schemas.microsoft.com/office/drawing/2010/main" xmlns:ma14="http://schemas.microsoft.com/office/mac/drawingml/2011/main" val="1"/>
             </a:ext>
           </a:extLst>
         </p:spPr>
@@ -28079,7 +28314,7 @@
           </a:ln>
           <a:extLst>
             <a:ext uri="{C572A759-6A51-4108-AA02-DFA0A04FC94B}">
-              <ma14:wrappingTextBoxFlag xmlns:ma14="http://schemas.microsoft.com/office/mac/drawingml/2011/main" xmlns:a14="http://schemas.microsoft.com/office/drawing/2010/main" xmlns:m="http://schemas.openxmlformats.org/officeDocument/2006/math" xmlns="" val="1"/>
+              <ma14:wrappingTextBoxFlag xmlns="" xmlns:m="http://schemas.openxmlformats.org/officeDocument/2006/math" xmlns:a14="http://schemas.microsoft.com/office/drawing/2010/main" xmlns:ma14="http://schemas.microsoft.com/office/mac/drawingml/2011/main" val="1"/>
             </a:ext>
           </a:extLst>
         </p:spPr>
@@ -28129,7 +28364,7 @@
           </a:ln>
           <a:extLst>
             <a:ext uri="{C572A759-6A51-4108-AA02-DFA0A04FC94B}">
-              <ma14:wrappingTextBoxFlag xmlns:ma14="http://schemas.microsoft.com/office/mac/drawingml/2011/main" xmlns:a14="http://schemas.microsoft.com/office/drawing/2010/main" xmlns:m="http://schemas.openxmlformats.org/officeDocument/2006/math" xmlns="" val="1"/>
+              <ma14:wrappingTextBoxFlag xmlns="" xmlns:m="http://schemas.openxmlformats.org/officeDocument/2006/math" xmlns:a14="http://schemas.microsoft.com/office/drawing/2010/main" xmlns:ma14="http://schemas.microsoft.com/office/mac/drawingml/2011/main" val="1"/>
             </a:ext>
           </a:extLst>
         </p:spPr>
@@ -28202,7 +28437,7 @@
           </a:ln>
           <a:extLst>
             <a:ext uri="{C572A759-6A51-4108-AA02-DFA0A04FC94B}">
-              <ma14:wrappingTextBoxFlag xmlns:ma14="http://schemas.microsoft.com/office/mac/drawingml/2011/main" xmlns:a14="http://schemas.microsoft.com/office/drawing/2010/main" xmlns:m="http://schemas.openxmlformats.org/officeDocument/2006/math" xmlns="" val="1"/>
+              <ma14:wrappingTextBoxFlag xmlns="" xmlns:m="http://schemas.openxmlformats.org/officeDocument/2006/math" xmlns:a14="http://schemas.microsoft.com/office/drawing/2010/main" xmlns:ma14="http://schemas.microsoft.com/office/mac/drawingml/2011/main" val="1"/>
             </a:ext>
           </a:extLst>
         </p:spPr>
@@ -28324,7 +28559,7 @@
           </a:ln>
           <a:extLst>
             <a:ext uri="{C572A759-6A51-4108-AA02-DFA0A04FC94B}">
-              <ma14:wrappingTextBoxFlag xmlns:ma14="http://schemas.microsoft.com/office/mac/drawingml/2011/main" xmlns:a14="http://schemas.microsoft.com/office/drawing/2010/main" xmlns:m="http://schemas.openxmlformats.org/officeDocument/2006/math" xmlns="" val="1"/>
+              <ma14:wrappingTextBoxFlag xmlns="" xmlns:m="http://schemas.openxmlformats.org/officeDocument/2006/math" xmlns:a14="http://schemas.microsoft.com/office/drawing/2010/main" xmlns:ma14="http://schemas.microsoft.com/office/mac/drawingml/2011/main" val="1"/>
             </a:ext>
           </a:extLst>
         </p:spPr>
@@ -28374,7 +28609,7 @@
           </a:ln>
           <a:extLst>
             <a:ext uri="{C572A759-6A51-4108-AA02-DFA0A04FC94B}">
-              <ma14:wrappingTextBoxFlag xmlns:ma14="http://schemas.microsoft.com/office/mac/drawingml/2011/main" xmlns:a14="http://schemas.microsoft.com/office/drawing/2010/main" xmlns:m="http://schemas.openxmlformats.org/officeDocument/2006/math" xmlns="" val="1"/>
+              <ma14:wrappingTextBoxFlag xmlns="" xmlns:m="http://schemas.openxmlformats.org/officeDocument/2006/math" xmlns:a14="http://schemas.microsoft.com/office/drawing/2010/main" xmlns:ma14="http://schemas.microsoft.com/office/mac/drawingml/2011/main" val="1"/>
             </a:ext>
           </a:extLst>
         </p:spPr>
@@ -28447,7 +28682,7 @@
           </a:ln>
           <a:extLst>
             <a:ext uri="{C572A759-6A51-4108-AA02-DFA0A04FC94B}">
-              <ma14:wrappingTextBoxFlag xmlns:ma14="http://schemas.microsoft.com/office/mac/drawingml/2011/main" xmlns:a14="http://schemas.microsoft.com/office/drawing/2010/main" xmlns:m="http://schemas.openxmlformats.org/officeDocument/2006/math" xmlns="" val="1"/>
+              <ma14:wrappingTextBoxFlag xmlns="" xmlns:m="http://schemas.openxmlformats.org/officeDocument/2006/math" xmlns:a14="http://schemas.microsoft.com/office/drawing/2010/main" xmlns:ma14="http://schemas.microsoft.com/office/mac/drawingml/2011/main" val="1"/>
             </a:ext>
           </a:extLst>
         </p:spPr>
@@ -28569,7 +28804,7 @@
           </a:ln>
           <a:extLst>
             <a:ext uri="{C572A759-6A51-4108-AA02-DFA0A04FC94B}">
-              <ma14:wrappingTextBoxFlag xmlns:ma14="http://schemas.microsoft.com/office/mac/drawingml/2011/main" xmlns:a14="http://schemas.microsoft.com/office/drawing/2010/main" xmlns:m="http://schemas.openxmlformats.org/officeDocument/2006/math" xmlns="" val="1"/>
+              <ma14:wrappingTextBoxFlag xmlns="" xmlns:m="http://schemas.openxmlformats.org/officeDocument/2006/math" xmlns:a14="http://schemas.microsoft.com/office/drawing/2010/main" xmlns:ma14="http://schemas.microsoft.com/office/mac/drawingml/2011/main" val="1"/>
             </a:ext>
           </a:extLst>
         </p:spPr>
@@ -28683,7 +28918,7 @@
           </a:ln>
           <a:extLst>
             <a:ext uri="{C572A759-6A51-4108-AA02-DFA0A04FC94B}">
-              <ma14:wrappingTextBoxFlag xmlns:ma14="http://schemas.microsoft.com/office/mac/drawingml/2011/main" xmlns:a14="http://schemas.microsoft.com/office/drawing/2010/main" xmlns:m="http://schemas.openxmlformats.org/officeDocument/2006/math" xmlns="" val="1"/>
+              <ma14:wrappingTextBoxFlag xmlns="" xmlns:m="http://schemas.openxmlformats.org/officeDocument/2006/math" xmlns:a14="http://schemas.microsoft.com/office/drawing/2010/main" xmlns:ma14="http://schemas.microsoft.com/office/mac/drawingml/2011/main" val="1"/>
             </a:ext>
           </a:extLst>
         </p:spPr>
@@ -28730,7 +28965,7 @@
           </a:ln>
           <a:extLst>
             <a:ext uri="{C572A759-6A51-4108-AA02-DFA0A04FC94B}">
-              <ma14:wrappingTextBoxFlag xmlns:ma14="http://schemas.microsoft.com/office/mac/drawingml/2011/main" xmlns:a14="http://schemas.microsoft.com/office/drawing/2010/main" xmlns:m="http://schemas.openxmlformats.org/officeDocument/2006/math" xmlns="" val="1"/>
+              <ma14:wrappingTextBoxFlag xmlns="" xmlns:m="http://schemas.openxmlformats.org/officeDocument/2006/math" xmlns:a14="http://schemas.microsoft.com/office/drawing/2010/main" xmlns:ma14="http://schemas.microsoft.com/office/mac/drawingml/2011/main" val="1"/>
             </a:ext>
           </a:extLst>
         </p:spPr>
@@ -28777,7 +29012,7 @@
           </a:ln>
           <a:extLst>
             <a:ext uri="{C572A759-6A51-4108-AA02-DFA0A04FC94B}">
-              <ma14:wrappingTextBoxFlag xmlns:ma14="http://schemas.microsoft.com/office/mac/drawingml/2011/main" xmlns:a14="http://schemas.microsoft.com/office/drawing/2010/main" xmlns:m="http://schemas.openxmlformats.org/officeDocument/2006/math" xmlns="" val="1"/>
+              <ma14:wrappingTextBoxFlag xmlns="" xmlns:m="http://schemas.openxmlformats.org/officeDocument/2006/math" xmlns:a14="http://schemas.microsoft.com/office/drawing/2010/main" xmlns:ma14="http://schemas.microsoft.com/office/mac/drawingml/2011/main" val="1"/>
             </a:ext>
           </a:extLst>
         </p:spPr>
@@ -28912,7 +29147,7 @@
           </a:ln>
           <a:extLst>
             <a:ext uri="{C572A759-6A51-4108-AA02-DFA0A04FC94B}">
-              <ma14:wrappingTextBoxFlag xmlns:ma14="http://schemas.microsoft.com/office/mac/drawingml/2011/main" xmlns:a14="http://schemas.microsoft.com/office/drawing/2010/main" xmlns:m="http://schemas.openxmlformats.org/officeDocument/2006/math" xmlns="" val="1"/>
+              <ma14:wrappingTextBoxFlag xmlns="" xmlns:m="http://schemas.openxmlformats.org/officeDocument/2006/math" xmlns:a14="http://schemas.microsoft.com/office/drawing/2010/main" xmlns:ma14="http://schemas.microsoft.com/office/mac/drawingml/2011/main" val="1"/>
             </a:ext>
           </a:extLst>
         </p:spPr>
@@ -28967,7 +29202,7 @@
           </a:ln>
           <a:extLst>
             <a:ext uri="{C572A759-6A51-4108-AA02-DFA0A04FC94B}">
-              <ma14:wrappingTextBoxFlag xmlns:ma14="http://schemas.microsoft.com/office/mac/drawingml/2011/main" xmlns:a14="http://schemas.microsoft.com/office/drawing/2010/main" xmlns:m="http://schemas.openxmlformats.org/officeDocument/2006/math" xmlns="" val="1"/>
+              <ma14:wrappingTextBoxFlag xmlns="" xmlns:m="http://schemas.openxmlformats.org/officeDocument/2006/math" xmlns:a14="http://schemas.microsoft.com/office/drawing/2010/main" xmlns:ma14="http://schemas.microsoft.com/office/mac/drawingml/2011/main" val="1"/>
             </a:ext>
           </a:extLst>
         </p:spPr>
@@ -29055,7 +29290,7 @@
           </a:ln>
           <a:extLst>
             <a:ext uri="{C572A759-6A51-4108-AA02-DFA0A04FC94B}">
-              <ma14:wrappingTextBoxFlag xmlns:ma14="http://schemas.microsoft.com/office/mac/drawingml/2011/main" xmlns:a14="http://schemas.microsoft.com/office/drawing/2010/main" xmlns:m="http://schemas.openxmlformats.org/officeDocument/2006/math" xmlns="" val="1"/>
+              <ma14:wrappingTextBoxFlag xmlns="" xmlns:m="http://schemas.openxmlformats.org/officeDocument/2006/math" xmlns:a14="http://schemas.microsoft.com/office/drawing/2010/main" xmlns:ma14="http://schemas.microsoft.com/office/mac/drawingml/2011/main" val="1"/>
             </a:ext>
           </a:extLst>
         </p:spPr>
@@ -29102,7 +29337,7 @@
           </a:ln>
           <a:extLst>
             <a:ext uri="{C572A759-6A51-4108-AA02-DFA0A04FC94B}">
-              <ma14:wrappingTextBoxFlag xmlns:ma14="http://schemas.microsoft.com/office/mac/drawingml/2011/main" xmlns:a14="http://schemas.microsoft.com/office/drawing/2010/main" xmlns:m="http://schemas.openxmlformats.org/officeDocument/2006/math" xmlns="" val="1"/>
+              <ma14:wrappingTextBoxFlag xmlns="" xmlns:m="http://schemas.openxmlformats.org/officeDocument/2006/math" xmlns:a14="http://schemas.microsoft.com/office/drawing/2010/main" xmlns:ma14="http://schemas.microsoft.com/office/mac/drawingml/2011/main" val="1"/>
             </a:ext>
           </a:extLst>
         </p:spPr>
@@ -29149,7 +29384,7 @@
           </a:ln>
           <a:extLst>
             <a:ext uri="{C572A759-6A51-4108-AA02-DFA0A04FC94B}">
-              <ma14:wrappingTextBoxFlag xmlns:ma14="http://schemas.microsoft.com/office/mac/drawingml/2011/main" xmlns:a14="http://schemas.microsoft.com/office/drawing/2010/main" xmlns:m="http://schemas.openxmlformats.org/officeDocument/2006/math" xmlns="" val="1"/>
+              <ma14:wrappingTextBoxFlag xmlns="" xmlns:m="http://schemas.openxmlformats.org/officeDocument/2006/math" xmlns:a14="http://schemas.microsoft.com/office/drawing/2010/main" xmlns:ma14="http://schemas.microsoft.com/office/mac/drawingml/2011/main" val="1"/>
             </a:ext>
           </a:extLst>
         </p:spPr>
@@ -29269,7 +29504,7 @@
           </a:ln>
           <a:extLst>
             <a:ext uri="{C572A759-6A51-4108-AA02-DFA0A04FC94B}">
-              <ma14:wrappingTextBoxFlag xmlns:ma14="http://schemas.microsoft.com/office/mac/drawingml/2011/main" xmlns:a14="http://schemas.microsoft.com/office/drawing/2010/main" xmlns:m="http://schemas.openxmlformats.org/officeDocument/2006/math" xmlns="" val="1"/>
+              <ma14:wrappingTextBoxFlag xmlns="" xmlns:m="http://schemas.openxmlformats.org/officeDocument/2006/math" xmlns:a14="http://schemas.microsoft.com/office/drawing/2010/main" xmlns:ma14="http://schemas.microsoft.com/office/mac/drawingml/2011/main" val="1"/>
             </a:ext>
           </a:extLst>
         </p:spPr>
@@ -29316,7 +29551,7 @@
           </a:ln>
           <a:extLst>
             <a:ext uri="{C572A759-6A51-4108-AA02-DFA0A04FC94B}">
-              <ma14:wrappingTextBoxFlag xmlns:ma14="http://schemas.microsoft.com/office/mac/drawingml/2011/main" xmlns:a14="http://schemas.microsoft.com/office/drawing/2010/main" xmlns:m="http://schemas.openxmlformats.org/officeDocument/2006/math" xmlns="" val="1"/>
+              <ma14:wrappingTextBoxFlag xmlns="" xmlns:m="http://schemas.openxmlformats.org/officeDocument/2006/math" xmlns:a14="http://schemas.microsoft.com/office/drawing/2010/main" xmlns:ma14="http://schemas.microsoft.com/office/mac/drawingml/2011/main" val="1"/>
             </a:ext>
           </a:extLst>
         </p:spPr>
@@ -29447,7 +29682,7 @@
           </a:ln>
           <a:extLst>
             <a:ext uri="{C572A759-6A51-4108-AA02-DFA0A04FC94B}">
-              <ma14:wrappingTextBoxFlag xmlns:ma14="http://schemas.microsoft.com/office/mac/drawingml/2011/main" xmlns:a14="http://schemas.microsoft.com/office/drawing/2010/main" xmlns:m="http://schemas.openxmlformats.org/officeDocument/2006/math" xmlns="" val="1"/>
+              <ma14:wrappingTextBoxFlag xmlns="" xmlns:m="http://schemas.openxmlformats.org/officeDocument/2006/math" xmlns:a14="http://schemas.microsoft.com/office/drawing/2010/main" xmlns:ma14="http://schemas.microsoft.com/office/mac/drawingml/2011/main" val="1"/>
             </a:ext>
           </a:extLst>
         </p:spPr>
@@ -29494,7 +29729,7 @@
           </a:ln>
           <a:extLst>
             <a:ext uri="{C572A759-6A51-4108-AA02-DFA0A04FC94B}">
-              <ma14:wrappingTextBoxFlag xmlns:ma14="http://schemas.microsoft.com/office/mac/drawingml/2011/main" xmlns:a14="http://schemas.microsoft.com/office/drawing/2010/main" xmlns:m="http://schemas.openxmlformats.org/officeDocument/2006/math" xmlns="" val="1"/>
+              <ma14:wrappingTextBoxFlag xmlns="" xmlns:m="http://schemas.openxmlformats.org/officeDocument/2006/math" xmlns:a14="http://schemas.microsoft.com/office/drawing/2010/main" xmlns:ma14="http://schemas.microsoft.com/office/mac/drawingml/2011/main" val="1"/>
             </a:ext>
           </a:extLst>
         </p:spPr>
@@ -29630,7 +29865,7 @@
           </a:ln>
           <a:extLst>
             <a:ext uri="{C572A759-6A51-4108-AA02-DFA0A04FC94B}">
-              <ma14:wrappingTextBoxFlag xmlns:ma14="http://schemas.microsoft.com/office/mac/drawingml/2011/main" xmlns:a14="http://schemas.microsoft.com/office/drawing/2010/main" xmlns:m="http://schemas.openxmlformats.org/officeDocument/2006/math" xmlns="" val="1"/>
+              <ma14:wrappingTextBoxFlag xmlns="" xmlns:m="http://schemas.openxmlformats.org/officeDocument/2006/math" xmlns:a14="http://schemas.microsoft.com/office/drawing/2010/main" xmlns:ma14="http://schemas.microsoft.com/office/mac/drawingml/2011/main" val="1"/>
             </a:ext>
           </a:extLst>
         </p:spPr>
@@ -29677,7 +29912,7 @@
           </a:ln>
           <a:extLst>
             <a:ext uri="{C572A759-6A51-4108-AA02-DFA0A04FC94B}">
-              <ma14:wrappingTextBoxFlag xmlns:ma14="http://schemas.microsoft.com/office/mac/drawingml/2011/main" xmlns:a14="http://schemas.microsoft.com/office/drawing/2010/main" xmlns:m="http://schemas.openxmlformats.org/officeDocument/2006/math" xmlns="" val="1"/>
+              <ma14:wrappingTextBoxFlag xmlns="" xmlns:m="http://schemas.openxmlformats.org/officeDocument/2006/math" xmlns:a14="http://schemas.microsoft.com/office/drawing/2010/main" xmlns:ma14="http://schemas.microsoft.com/office/mac/drawingml/2011/main" val="1"/>
             </a:ext>
           </a:extLst>
         </p:spPr>
@@ -29828,7 +30063,7 @@
           </a:ln>
           <a:extLst>
             <a:ext uri="{C572A759-6A51-4108-AA02-DFA0A04FC94B}">
-              <ma14:wrappingTextBoxFlag xmlns:ma14="http://schemas.microsoft.com/office/mac/drawingml/2011/main" xmlns:a14="http://schemas.microsoft.com/office/drawing/2010/main" xmlns:m="http://schemas.openxmlformats.org/officeDocument/2006/math" xmlns="" val="1"/>
+              <ma14:wrappingTextBoxFlag xmlns="" xmlns:m="http://schemas.openxmlformats.org/officeDocument/2006/math" xmlns:a14="http://schemas.microsoft.com/office/drawing/2010/main" xmlns:ma14="http://schemas.microsoft.com/office/mac/drawingml/2011/main" val="1"/>
             </a:ext>
           </a:extLst>
         </p:spPr>
@@ -29875,7 +30110,7 @@
           </a:ln>
           <a:extLst>
             <a:ext uri="{C572A759-6A51-4108-AA02-DFA0A04FC94B}">
-              <ma14:wrappingTextBoxFlag xmlns:ma14="http://schemas.microsoft.com/office/mac/drawingml/2011/main" xmlns:a14="http://schemas.microsoft.com/office/drawing/2010/main" xmlns:m="http://schemas.openxmlformats.org/officeDocument/2006/math" xmlns="" val="1"/>
+              <ma14:wrappingTextBoxFlag xmlns="" xmlns:m="http://schemas.openxmlformats.org/officeDocument/2006/math" xmlns:a14="http://schemas.microsoft.com/office/drawing/2010/main" xmlns:ma14="http://schemas.microsoft.com/office/mac/drawingml/2011/main" val="1"/>
             </a:ext>
           </a:extLst>
         </p:spPr>
@@ -29973,7 +30208,7 @@
           </a:ln>
           <a:extLst>
             <a:ext uri="{C572A759-6A51-4108-AA02-DFA0A04FC94B}">
-              <ma14:wrappingTextBoxFlag xmlns:ma14="http://schemas.microsoft.com/office/mac/drawingml/2011/main" xmlns:a14="http://schemas.microsoft.com/office/drawing/2010/main" xmlns:m="http://schemas.openxmlformats.org/officeDocument/2006/math" xmlns="" val="1"/>
+              <ma14:wrappingTextBoxFlag xmlns="" xmlns:m="http://schemas.openxmlformats.org/officeDocument/2006/math" xmlns:a14="http://schemas.microsoft.com/office/drawing/2010/main" xmlns:ma14="http://schemas.microsoft.com/office/mac/drawingml/2011/main" val="1"/>
             </a:ext>
           </a:extLst>
         </p:spPr>
@@ -30211,7 +30446,7 @@
           </a:ln>
           <a:extLst>
             <a:ext uri="{C572A759-6A51-4108-AA02-DFA0A04FC94B}">
-              <ma14:wrappingTextBoxFlag xmlns:ma14="http://schemas.microsoft.com/office/mac/drawingml/2011/main" xmlns:a14="http://schemas.microsoft.com/office/drawing/2010/main" xmlns:m="http://schemas.openxmlformats.org/officeDocument/2006/math" xmlns="" val="1"/>
+              <ma14:wrappingTextBoxFlag xmlns="" xmlns:m="http://schemas.openxmlformats.org/officeDocument/2006/math" xmlns:a14="http://schemas.microsoft.com/office/drawing/2010/main" xmlns:ma14="http://schemas.microsoft.com/office/mac/drawingml/2011/main" val="1"/>
             </a:ext>
           </a:extLst>
         </p:spPr>
@@ -30258,7 +30493,7 @@
           </a:ln>
           <a:extLst>
             <a:ext uri="{C572A759-6A51-4108-AA02-DFA0A04FC94B}">
-              <ma14:wrappingTextBoxFlag xmlns:ma14="http://schemas.microsoft.com/office/mac/drawingml/2011/main" xmlns:a14="http://schemas.microsoft.com/office/drawing/2010/main" xmlns:m="http://schemas.openxmlformats.org/officeDocument/2006/math" xmlns="" val="1"/>
+              <ma14:wrappingTextBoxFlag xmlns="" xmlns:m="http://schemas.openxmlformats.org/officeDocument/2006/math" xmlns:a14="http://schemas.microsoft.com/office/drawing/2010/main" xmlns:ma14="http://schemas.microsoft.com/office/mac/drawingml/2011/main" val="1"/>
             </a:ext>
           </a:extLst>
         </p:spPr>
@@ -30305,7 +30540,7 @@
           </a:ln>
           <a:extLst>
             <a:ext uri="{C572A759-6A51-4108-AA02-DFA0A04FC94B}">
-              <ma14:wrappingTextBoxFlag xmlns:ma14="http://schemas.microsoft.com/office/mac/drawingml/2011/main" xmlns:a14="http://schemas.microsoft.com/office/drawing/2010/main" xmlns:m="http://schemas.openxmlformats.org/officeDocument/2006/math" xmlns="" val="1"/>
+              <ma14:wrappingTextBoxFlag xmlns="" xmlns:m="http://schemas.openxmlformats.org/officeDocument/2006/math" xmlns:a14="http://schemas.microsoft.com/office/drawing/2010/main" xmlns:ma14="http://schemas.microsoft.com/office/mac/drawingml/2011/main" val="1"/>
             </a:ext>
           </a:extLst>
         </p:spPr>
@@ -30440,7 +30675,7 @@
           </a:ln>
           <a:extLst>
             <a:ext uri="{C572A759-6A51-4108-AA02-DFA0A04FC94B}">
-              <ma14:wrappingTextBoxFlag xmlns:ma14="http://schemas.microsoft.com/office/mac/drawingml/2011/main" xmlns:a14="http://schemas.microsoft.com/office/drawing/2010/main" xmlns:m="http://schemas.openxmlformats.org/officeDocument/2006/math" xmlns="" val="1"/>
+              <ma14:wrappingTextBoxFlag xmlns="" xmlns:m="http://schemas.openxmlformats.org/officeDocument/2006/math" xmlns:a14="http://schemas.microsoft.com/office/drawing/2010/main" xmlns:ma14="http://schemas.microsoft.com/office/mac/drawingml/2011/main" val="1"/>
             </a:ext>
           </a:extLst>
         </p:spPr>
@@ -30495,7 +30730,7 @@
           </a:ln>
           <a:extLst>
             <a:ext uri="{C572A759-6A51-4108-AA02-DFA0A04FC94B}">
-              <ma14:wrappingTextBoxFlag xmlns:ma14="http://schemas.microsoft.com/office/mac/drawingml/2011/main" xmlns:a14="http://schemas.microsoft.com/office/drawing/2010/main" xmlns:m="http://schemas.openxmlformats.org/officeDocument/2006/math" xmlns="" val="1"/>
+              <ma14:wrappingTextBoxFlag xmlns="" xmlns:m="http://schemas.openxmlformats.org/officeDocument/2006/math" xmlns:a14="http://schemas.microsoft.com/office/drawing/2010/main" xmlns:ma14="http://schemas.microsoft.com/office/mac/drawingml/2011/main" val="1"/>
             </a:ext>
           </a:extLst>
         </p:spPr>
@@ -30583,7 +30818,7 @@
           </a:ln>
           <a:extLst>
             <a:ext uri="{C572A759-6A51-4108-AA02-DFA0A04FC94B}">
-              <ma14:wrappingTextBoxFlag xmlns:ma14="http://schemas.microsoft.com/office/mac/drawingml/2011/main" xmlns:a14="http://schemas.microsoft.com/office/drawing/2010/main" xmlns:m="http://schemas.openxmlformats.org/officeDocument/2006/math" xmlns="" val="1"/>
+              <ma14:wrappingTextBoxFlag xmlns="" xmlns:m="http://schemas.openxmlformats.org/officeDocument/2006/math" xmlns:a14="http://schemas.microsoft.com/office/drawing/2010/main" xmlns:ma14="http://schemas.microsoft.com/office/mac/drawingml/2011/main" val="1"/>
             </a:ext>
           </a:extLst>
         </p:spPr>
@@ -30630,7 +30865,7 @@
           </a:ln>
           <a:extLst>
             <a:ext uri="{C572A759-6A51-4108-AA02-DFA0A04FC94B}">
-              <ma14:wrappingTextBoxFlag xmlns:ma14="http://schemas.microsoft.com/office/mac/drawingml/2011/main" xmlns:a14="http://schemas.microsoft.com/office/drawing/2010/main" xmlns:m="http://schemas.openxmlformats.org/officeDocument/2006/math" xmlns="" val="1"/>
+              <ma14:wrappingTextBoxFlag xmlns="" xmlns:m="http://schemas.openxmlformats.org/officeDocument/2006/math" xmlns:a14="http://schemas.microsoft.com/office/drawing/2010/main" xmlns:ma14="http://schemas.microsoft.com/office/mac/drawingml/2011/main" val="1"/>
             </a:ext>
           </a:extLst>
         </p:spPr>
@@ -30677,7 +30912,7 @@
           </a:ln>
           <a:extLst>
             <a:ext uri="{C572A759-6A51-4108-AA02-DFA0A04FC94B}">
-              <ma14:wrappingTextBoxFlag xmlns:ma14="http://schemas.microsoft.com/office/mac/drawingml/2011/main" xmlns:a14="http://schemas.microsoft.com/office/drawing/2010/main" xmlns:m="http://schemas.openxmlformats.org/officeDocument/2006/math" xmlns="" val="1"/>
+              <ma14:wrappingTextBoxFlag xmlns="" xmlns:m="http://schemas.openxmlformats.org/officeDocument/2006/math" xmlns:a14="http://schemas.microsoft.com/office/drawing/2010/main" xmlns:ma14="http://schemas.microsoft.com/office/mac/drawingml/2011/main" val="1"/>
             </a:ext>
           </a:extLst>
         </p:spPr>
@@ -30809,7 +31044,7 @@
           </a:ln>
           <a:extLst>
             <a:ext uri="{C572A759-6A51-4108-AA02-DFA0A04FC94B}">
-              <ma14:wrappingTextBoxFlag xmlns:ma14="http://schemas.microsoft.com/office/mac/drawingml/2011/main" xmlns:a14="http://schemas.microsoft.com/office/drawing/2010/main" xmlns:m="http://schemas.openxmlformats.org/officeDocument/2006/math" xmlns="" val="1"/>
+              <ma14:wrappingTextBoxFlag xmlns="" xmlns:m="http://schemas.openxmlformats.org/officeDocument/2006/math" xmlns:a14="http://schemas.microsoft.com/office/drawing/2010/main" xmlns:ma14="http://schemas.microsoft.com/office/mac/drawingml/2011/main" val="1"/>
             </a:ext>
           </a:extLst>
         </p:spPr>
@@ -30856,7 +31091,7 @@
           </a:ln>
           <a:extLst>
             <a:ext uri="{C572A759-6A51-4108-AA02-DFA0A04FC94B}">
-              <ma14:wrappingTextBoxFlag xmlns:ma14="http://schemas.microsoft.com/office/mac/drawingml/2011/main" xmlns:a14="http://schemas.microsoft.com/office/drawing/2010/main" xmlns:m="http://schemas.openxmlformats.org/officeDocument/2006/math" xmlns="" val="1"/>
+              <ma14:wrappingTextBoxFlag xmlns="" xmlns:m="http://schemas.openxmlformats.org/officeDocument/2006/math" xmlns:a14="http://schemas.microsoft.com/office/drawing/2010/main" xmlns:ma14="http://schemas.microsoft.com/office/mac/drawingml/2011/main" val="1"/>
             </a:ext>
           </a:extLst>
         </p:spPr>
@@ -31010,7 +31245,7 @@
           </a:ln>
           <a:extLst>
             <a:ext uri="{C572A759-6A51-4108-AA02-DFA0A04FC94B}">
-              <ma14:wrappingTextBoxFlag xmlns:ma14="http://schemas.microsoft.com/office/mac/drawingml/2011/main" xmlns:a14="http://schemas.microsoft.com/office/drawing/2010/main" xmlns:m="http://schemas.openxmlformats.org/officeDocument/2006/math" xmlns="" val="1"/>
+              <ma14:wrappingTextBoxFlag xmlns="" xmlns:m="http://schemas.openxmlformats.org/officeDocument/2006/math" xmlns:a14="http://schemas.microsoft.com/office/drawing/2010/main" xmlns:ma14="http://schemas.microsoft.com/office/mac/drawingml/2011/main" val="1"/>
             </a:ext>
           </a:extLst>
         </p:spPr>
@@ -31057,7 +31292,7 @@
           </a:ln>
           <a:extLst>
             <a:ext uri="{C572A759-6A51-4108-AA02-DFA0A04FC94B}">
-              <ma14:wrappingTextBoxFlag xmlns:ma14="http://schemas.microsoft.com/office/mac/drawingml/2011/main" xmlns:a14="http://schemas.microsoft.com/office/drawing/2010/main" xmlns:m="http://schemas.openxmlformats.org/officeDocument/2006/math" xmlns="" val="1"/>
+              <ma14:wrappingTextBoxFlag xmlns="" xmlns:m="http://schemas.openxmlformats.org/officeDocument/2006/math" xmlns:a14="http://schemas.microsoft.com/office/drawing/2010/main" xmlns:ma14="http://schemas.microsoft.com/office/mac/drawingml/2011/main" val="1"/>
             </a:ext>
           </a:extLst>
         </p:spPr>
@@ -31197,7 +31432,7 @@
           </a:ln>
           <a:extLst>
             <a:ext uri="{C572A759-6A51-4108-AA02-DFA0A04FC94B}">
-              <ma14:wrappingTextBoxFlag xmlns:ma14="http://schemas.microsoft.com/office/mac/drawingml/2011/main" xmlns:a14="http://schemas.microsoft.com/office/drawing/2010/main" xmlns:m="http://schemas.openxmlformats.org/officeDocument/2006/math" xmlns="" val="1"/>
+              <ma14:wrappingTextBoxFlag xmlns="" xmlns:m="http://schemas.openxmlformats.org/officeDocument/2006/math" xmlns:a14="http://schemas.microsoft.com/office/drawing/2010/main" xmlns:ma14="http://schemas.microsoft.com/office/mac/drawingml/2011/main" val="1"/>
             </a:ext>
           </a:extLst>
         </p:spPr>
@@ -31244,7 +31479,7 @@
           </a:ln>
           <a:extLst>
             <a:ext uri="{C572A759-6A51-4108-AA02-DFA0A04FC94B}">
-              <ma14:wrappingTextBoxFlag xmlns:ma14="http://schemas.microsoft.com/office/mac/drawingml/2011/main" xmlns:a14="http://schemas.microsoft.com/office/drawing/2010/main" xmlns:m="http://schemas.openxmlformats.org/officeDocument/2006/math" xmlns="" val="1"/>
+              <ma14:wrappingTextBoxFlag xmlns="" xmlns:m="http://schemas.openxmlformats.org/officeDocument/2006/math" xmlns:a14="http://schemas.microsoft.com/office/drawing/2010/main" xmlns:ma14="http://schemas.microsoft.com/office/mac/drawingml/2011/main" val="1"/>
             </a:ext>
           </a:extLst>
         </p:spPr>
@@ -31374,7 +31609,7 @@
           </a:ln>
           <a:extLst>
             <a:ext uri="{C572A759-6A51-4108-AA02-DFA0A04FC94B}">
-              <ma14:wrappingTextBoxFlag xmlns:ma14="http://schemas.microsoft.com/office/mac/drawingml/2011/main" xmlns:a14="http://schemas.microsoft.com/office/drawing/2010/main" xmlns:m="http://schemas.openxmlformats.org/officeDocument/2006/math" xmlns="" val="1"/>
+              <ma14:wrappingTextBoxFlag xmlns="" xmlns:m="http://schemas.openxmlformats.org/officeDocument/2006/math" xmlns:a14="http://schemas.microsoft.com/office/drawing/2010/main" xmlns:ma14="http://schemas.microsoft.com/office/mac/drawingml/2011/main" val="1"/>
             </a:ext>
           </a:extLst>
         </p:spPr>
@@ -31421,7 +31656,7 @@
           </a:ln>
           <a:extLst>
             <a:ext uri="{C572A759-6A51-4108-AA02-DFA0A04FC94B}">
-              <ma14:wrappingTextBoxFlag xmlns:ma14="http://schemas.microsoft.com/office/mac/drawingml/2011/main" xmlns:a14="http://schemas.microsoft.com/office/drawing/2010/main" xmlns:m="http://schemas.openxmlformats.org/officeDocument/2006/math" xmlns="" val="1"/>
+              <ma14:wrappingTextBoxFlag xmlns="" xmlns:m="http://schemas.openxmlformats.org/officeDocument/2006/math" xmlns:a14="http://schemas.microsoft.com/office/drawing/2010/main" xmlns:ma14="http://schemas.microsoft.com/office/mac/drawingml/2011/main" val="1"/>
             </a:ext>
           </a:extLst>
         </p:spPr>
@@ -31551,7 +31786,7 @@
           </a:ln>
           <a:extLst>
             <a:ext uri="{C572A759-6A51-4108-AA02-DFA0A04FC94B}">
-              <ma14:wrappingTextBoxFlag xmlns:ma14="http://schemas.microsoft.com/office/mac/drawingml/2011/main" xmlns:a14="http://schemas.microsoft.com/office/drawing/2010/main" xmlns:m="http://schemas.openxmlformats.org/officeDocument/2006/math" xmlns="" val="1"/>
+              <ma14:wrappingTextBoxFlag xmlns="" xmlns:m="http://schemas.openxmlformats.org/officeDocument/2006/math" xmlns:a14="http://schemas.microsoft.com/office/drawing/2010/main" xmlns:ma14="http://schemas.microsoft.com/office/mac/drawingml/2011/main" val="1"/>
             </a:ext>
           </a:extLst>
         </p:spPr>
@@ -31598,7 +31833,7 @@
           </a:ln>
           <a:extLst>
             <a:ext uri="{C572A759-6A51-4108-AA02-DFA0A04FC94B}">
-              <ma14:wrappingTextBoxFlag xmlns:ma14="http://schemas.microsoft.com/office/mac/drawingml/2011/main" xmlns:a14="http://schemas.microsoft.com/office/drawing/2010/main" xmlns:m="http://schemas.openxmlformats.org/officeDocument/2006/math" xmlns="" val="1"/>
+              <ma14:wrappingTextBoxFlag xmlns="" xmlns:m="http://schemas.openxmlformats.org/officeDocument/2006/math" xmlns:a14="http://schemas.microsoft.com/office/drawing/2010/main" xmlns:ma14="http://schemas.microsoft.com/office/mac/drawingml/2011/main" val="1"/>
             </a:ext>
           </a:extLst>
         </p:spPr>
@@ -31722,7 +31957,7 @@
           </a:ln>
           <a:extLst>
             <a:ext uri="{C572A759-6A51-4108-AA02-DFA0A04FC94B}">
-              <ma14:wrappingTextBoxFlag xmlns:ma14="http://schemas.microsoft.com/office/mac/drawingml/2011/main" xmlns:a14="http://schemas.microsoft.com/office/drawing/2010/main" xmlns:m="http://schemas.openxmlformats.org/officeDocument/2006/math" xmlns="" val="1"/>
+              <ma14:wrappingTextBoxFlag xmlns="" xmlns:m="http://schemas.openxmlformats.org/officeDocument/2006/math" xmlns:a14="http://schemas.microsoft.com/office/drawing/2010/main" xmlns:ma14="http://schemas.microsoft.com/office/mac/drawingml/2011/main" val="1"/>
             </a:ext>
           </a:extLst>
         </p:spPr>
@@ -31777,7 +32012,7 @@
           </a:ln>
           <a:extLst>
             <a:ext uri="{C572A759-6A51-4108-AA02-DFA0A04FC94B}">
-              <ma14:wrappingTextBoxFlag xmlns:ma14="http://schemas.microsoft.com/office/mac/drawingml/2011/main" xmlns:a14="http://schemas.microsoft.com/office/drawing/2010/main" xmlns:m="http://schemas.openxmlformats.org/officeDocument/2006/math" xmlns="" val="1"/>
+              <ma14:wrappingTextBoxFlag xmlns="" xmlns:m="http://schemas.openxmlformats.org/officeDocument/2006/math" xmlns:a14="http://schemas.microsoft.com/office/drawing/2010/main" xmlns:ma14="http://schemas.microsoft.com/office/mac/drawingml/2011/main" val="1"/>
             </a:ext>
           </a:extLst>
         </p:spPr>
@@ -31835,7 +32070,7 @@
           </a:ln>
           <a:extLst>
             <a:ext uri="{C572A759-6A51-4108-AA02-DFA0A04FC94B}">
-              <ma14:wrappingTextBoxFlag xmlns:ma14="http://schemas.microsoft.com/office/mac/drawingml/2011/main" xmlns:a14="http://schemas.microsoft.com/office/drawing/2010/main" xmlns:m="http://schemas.openxmlformats.org/officeDocument/2006/math" xmlns="" val="1"/>
+              <ma14:wrappingTextBoxFlag xmlns="" xmlns:m="http://schemas.openxmlformats.org/officeDocument/2006/math" xmlns:a14="http://schemas.microsoft.com/office/drawing/2010/main" xmlns:ma14="http://schemas.microsoft.com/office/mac/drawingml/2011/main" val="1"/>
             </a:ext>
           </a:extLst>
         </p:spPr>
@@ -31885,7 +32120,7 @@
           </a:ln>
           <a:extLst>
             <a:ext uri="{C572A759-6A51-4108-AA02-DFA0A04FC94B}">
-              <ma14:wrappingTextBoxFlag xmlns:ma14="http://schemas.microsoft.com/office/mac/drawingml/2011/main" xmlns:a14="http://schemas.microsoft.com/office/drawing/2010/main" xmlns:m="http://schemas.openxmlformats.org/officeDocument/2006/math" xmlns="" val="1"/>
+              <ma14:wrappingTextBoxFlag xmlns="" xmlns:m="http://schemas.openxmlformats.org/officeDocument/2006/math" xmlns:a14="http://schemas.microsoft.com/office/drawing/2010/main" xmlns:ma14="http://schemas.microsoft.com/office/mac/drawingml/2011/main" val="1"/>
             </a:ext>
           </a:extLst>
         </p:spPr>
@@ -31973,7 +32208,7 @@
           </a:ln>
           <a:extLst>
             <a:ext uri="{C572A759-6A51-4108-AA02-DFA0A04FC94B}">
-              <ma14:wrappingTextBoxFlag xmlns:ma14="http://schemas.microsoft.com/office/mac/drawingml/2011/main" xmlns:a14="http://schemas.microsoft.com/office/drawing/2010/main" xmlns:m="http://schemas.openxmlformats.org/officeDocument/2006/math" xmlns="" val="1"/>
+              <ma14:wrappingTextBoxFlag xmlns="" xmlns:m="http://schemas.openxmlformats.org/officeDocument/2006/math" xmlns:a14="http://schemas.microsoft.com/office/drawing/2010/main" xmlns:ma14="http://schemas.microsoft.com/office/mac/drawingml/2011/main" val="1"/>
             </a:ext>
           </a:extLst>
         </p:spPr>
@@ -32302,7 +32537,7 @@
           </a:ln>
           <a:extLst>
             <a:ext uri="{C572A759-6A51-4108-AA02-DFA0A04FC94B}">
-              <ma14:wrappingTextBoxFlag xmlns:ma14="http://schemas.microsoft.com/office/mac/drawingml/2011/main" xmlns:a14="http://schemas.microsoft.com/office/drawing/2010/main" xmlns:m="http://schemas.openxmlformats.org/officeDocument/2006/math" xmlns="" val="1"/>
+              <ma14:wrappingTextBoxFlag xmlns="" xmlns:m="http://schemas.openxmlformats.org/officeDocument/2006/math" xmlns:a14="http://schemas.microsoft.com/office/drawing/2010/main" xmlns:ma14="http://schemas.microsoft.com/office/mac/drawingml/2011/main" val="1"/>
             </a:ext>
           </a:extLst>
         </p:spPr>
@@ -32349,7 +32584,7 @@
           </a:ln>
           <a:extLst>
             <a:ext uri="{C572A759-6A51-4108-AA02-DFA0A04FC94B}">
-              <ma14:wrappingTextBoxFlag xmlns:ma14="http://schemas.microsoft.com/office/mac/drawingml/2011/main" xmlns:a14="http://schemas.microsoft.com/office/drawing/2010/main" xmlns:m="http://schemas.openxmlformats.org/officeDocument/2006/math" xmlns="" val="1"/>
+              <ma14:wrappingTextBoxFlag xmlns="" xmlns:m="http://schemas.openxmlformats.org/officeDocument/2006/math" xmlns:a14="http://schemas.microsoft.com/office/drawing/2010/main" xmlns:ma14="http://schemas.microsoft.com/office/mac/drawingml/2011/main" val="1"/>
             </a:ext>
           </a:extLst>
         </p:spPr>
@@ -32396,7 +32631,7 @@
           </a:ln>
           <a:extLst>
             <a:ext uri="{C572A759-6A51-4108-AA02-DFA0A04FC94B}">
-              <ma14:wrappingTextBoxFlag xmlns:ma14="http://schemas.microsoft.com/office/mac/drawingml/2011/main" xmlns:a14="http://schemas.microsoft.com/office/drawing/2010/main" xmlns:m="http://schemas.openxmlformats.org/officeDocument/2006/math" xmlns="" val="1"/>
+              <ma14:wrappingTextBoxFlag xmlns="" xmlns:m="http://schemas.openxmlformats.org/officeDocument/2006/math" xmlns:a14="http://schemas.microsoft.com/office/drawing/2010/main" xmlns:ma14="http://schemas.microsoft.com/office/mac/drawingml/2011/main" val="1"/>
             </a:ext>
           </a:extLst>
         </p:spPr>
@@ -32531,7 +32766,7 @@
           </a:ln>
           <a:extLst>
             <a:ext uri="{C572A759-6A51-4108-AA02-DFA0A04FC94B}">
-              <ma14:wrappingTextBoxFlag xmlns:ma14="http://schemas.microsoft.com/office/mac/drawingml/2011/main" xmlns:a14="http://schemas.microsoft.com/office/drawing/2010/main" xmlns:m="http://schemas.openxmlformats.org/officeDocument/2006/math" xmlns="" val="1"/>
+              <ma14:wrappingTextBoxFlag xmlns="" xmlns:m="http://schemas.openxmlformats.org/officeDocument/2006/math" xmlns:a14="http://schemas.microsoft.com/office/drawing/2010/main" xmlns:ma14="http://schemas.microsoft.com/office/mac/drawingml/2011/main" val="1"/>
             </a:ext>
           </a:extLst>
         </p:spPr>
@@ -32586,7 +32821,7 @@
           </a:ln>
           <a:extLst>
             <a:ext uri="{C572A759-6A51-4108-AA02-DFA0A04FC94B}">
-              <ma14:wrappingTextBoxFlag xmlns:ma14="http://schemas.microsoft.com/office/mac/drawingml/2011/main" xmlns:a14="http://schemas.microsoft.com/office/drawing/2010/main" xmlns:m="http://schemas.openxmlformats.org/officeDocument/2006/math" xmlns="" val="1"/>
+              <ma14:wrappingTextBoxFlag xmlns="" xmlns:m="http://schemas.openxmlformats.org/officeDocument/2006/math" xmlns:a14="http://schemas.microsoft.com/office/drawing/2010/main" xmlns:ma14="http://schemas.microsoft.com/office/mac/drawingml/2011/main" val="1"/>
             </a:ext>
           </a:extLst>
         </p:spPr>
@@ -32674,7 +32909,7 @@
           </a:ln>
           <a:extLst>
             <a:ext uri="{C572A759-6A51-4108-AA02-DFA0A04FC94B}">
-              <ma14:wrappingTextBoxFlag xmlns:ma14="http://schemas.microsoft.com/office/mac/drawingml/2011/main" xmlns:a14="http://schemas.microsoft.com/office/drawing/2010/main" xmlns:m="http://schemas.openxmlformats.org/officeDocument/2006/math" xmlns="" val="1"/>
+              <ma14:wrappingTextBoxFlag xmlns="" xmlns:m="http://schemas.openxmlformats.org/officeDocument/2006/math" xmlns:a14="http://schemas.microsoft.com/office/drawing/2010/main" xmlns:ma14="http://schemas.microsoft.com/office/mac/drawingml/2011/main" val="1"/>
             </a:ext>
           </a:extLst>
         </p:spPr>
@@ -32721,7 +32956,7 @@
           </a:ln>
           <a:extLst>
             <a:ext uri="{C572A759-6A51-4108-AA02-DFA0A04FC94B}">
-              <ma14:wrappingTextBoxFlag xmlns:ma14="http://schemas.microsoft.com/office/mac/drawingml/2011/main" xmlns:a14="http://schemas.microsoft.com/office/drawing/2010/main" xmlns:m="http://schemas.openxmlformats.org/officeDocument/2006/math" xmlns="" val="1"/>
+              <ma14:wrappingTextBoxFlag xmlns="" xmlns:m="http://schemas.openxmlformats.org/officeDocument/2006/math" xmlns:a14="http://schemas.microsoft.com/office/drawing/2010/main" xmlns:ma14="http://schemas.microsoft.com/office/mac/drawingml/2011/main" val="1"/>
             </a:ext>
           </a:extLst>
         </p:spPr>
@@ -32771,7 +33006,7 @@
           </a:ln>
           <a:extLst>
             <a:ext uri="{C572A759-6A51-4108-AA02-DFA0A04FC94B}">
-              <ma14:wrappingTextBoxFlag xmlns:ma14="http://schemas.microsoft.com/office/mac/drawingml/2011/main" xmlns:a14="http://schemas.microsoft.com/office/drawing/2010/main" xmlns:m="http://schemas.openxmlformats.org/officeDocument/2006/math" xmlns="" val="1"/>
+              <ma14:wrappingTextBoxFlag xmlns="" xmlns:m="http://schemas.openxmlformats.org/officeDocument/2006/math" xmlns:a14="http://schemas.microsoft.com/office/drawing/2010/main" xmlns:ma14="http://schemas.microsoft.com/office/mac/drawingml/2011/main" val="1"/>
             </a:ext>
           </a:extLst>
         </p:spPr>
@@ -32866,7 +33101,7 @@
           </a:ln>
           <a:extLst>
             <a:ext uri="{C572A759-6A51-4108-AA02-DFA0A04FC94B}">
-              <ma14:wrappingTextBoxFlag xmlns:ma14="http://schemas.microsoft.com/office/mac/drawingml/2011/main" xmlns:a14="http://schemas.microsoft.com/office/drawing/2010/main" xmlns:m="http://schemas.openxmlformats.org/officeDocument/2006/math" xmlns="" val="1"/>
+              <ma14:wrappingTextBoxFlag xmlns="" xmlns:m="http://schemas.openxmlformats.org/officeDocument/2006/math" xmlns:a14="http://schemas.microsoft.com/office/drawing/2010/main" xmlns:ma14="http://schemas.microsoft.com/office/mac/drawingml/2011/main" val="1"/>
             </a:ext>
           </a:extLst>
         </p:spPr>
@@ -32916,7 +33151,7 @@
           </a:ln>
           <a:extLst>
             <a:ext uri="{C572A759-6A51-4108-AA02-DFA0A04FC94B}">
-              <ma14:wrappingTextBoxFlag xmlns:ma14="http://schemas.microsoft.com/office/mac/drawingml/2011/main" xmlns:a14="http://schemas.microsoft.com/office/drawing/2010/main" xmlns:m="http://schemas.openxmlformats.org/officeDocument/2006/math" xmlns="" val="1"/>
+              <ma14:wrappingTextBoxFlag xmlns="" xmlns:m="http://schemas.openxmlformats.org/officeDocument/2006/math" xmlns:a14="http://schemas.microsoft.com/office/drawing/2010/main" xmlns:ma14="http://schemas.microsoft.com/office/mac/drawingml/2011/main" val="1"/>
             </a:ext>
           </a:extLst>
         </p:spPr>
@@ -33055,7 +33290,7 @@
           </a:ln>
           <a:extLst>
             <a:ext uri="{C572A759-6A51-4108-AA02-DFA0A04FC94B}">
-              <ma14:wrappingTextBoxFlag xmlns:ma14="http://schemas.microsoft.com/office/mac/drawingml/2011/main" xmlns:a14="http://schemas.microsoft.com/office/drawing/2010/main" xmlns:m="http://schemas.openxmlformats.org/officeDocument/2006/math" xmlns="" val="1"/>
+              <ma14:wrappingTextBoxFlag xmlns="" xmlns:m="http://schemas.openxmlformats.org/officeDocument/2006/math" xmlns:a14="http://schemas.microsoft.com/office/drawing/2010/main" xmlns:ma14="http://schemas.microsoft.com/office/mac/drawingml/2011/main" val="1"/>
             </a:ext>
           </a:extLst>
         </p:spPr>
@@ -33105,7 +33340,7 @@
           </a:ln>
           <a:extLst>
             <a:ext uri="{C572A759-6A51-4108-AA02-DFA0A04FC94B}">
-              <ma14:wrappingTextBoxFlag xmlns:ma14="http://schemas.microsoft.com/office/mac/drawingml/2011/main" xmlns:a14="http://schemas.microsoft.com/office/drawing/2010/main" xmlns:m="http://schemas.openxmlformats.org/officeDocument/2006/math" xmlns="" val="1"/>
+              <ma14:wrappingTextBoxFlag xmlns="" xmlns:m="http://schemas.openxmlformats.org/officeDocument/2006/math" xmlns:a14="http://schemas.microsoft.com/office/drawing/2010/main" xmlns:ma14="http://schemas.microsoft.com/office/mac/drawingml/2011/main" val="1"/>
             </a:ext>
           </a:extLst>
         </p:spPr>
@@ -33193,7 +33428,7 @@
           </a:ln>
           <a:extLst>
             <a:ext uri="{C572A759-6A51-4108-AA02-DFA0A04FC94B}">
-              <ma14:wrappingTextBoxFlag xmlns:ma14="http://schemas.microsoft.com/office/mac/drawingml/2011/main" xmlns:a14="http://schemas.microsoft.com/office/drawing/2010/main" xmlns:m="http://schemas.openxmlformats.org/officeDocument/2006/math" xmlns="" val="1"/>
+              <ma14:wrappingTextBoxFlag xmlns="" xmlns:m="http://schemas.openxmlformats.org/officeDocument/2006/math" xmlns:a14="http://schemas.microsoft.com/office/drawing/2010/main" xmlns:ma14="http://schemas.microsoft.com/office/mac/drawingml/2011/main" val="1"/>
             </a:ext>
           </a:extLst>
         </p:spPr>
@@ -33243,7 +33478,7 @@
           </a:ln>
           <a:extLst>
             <a:ext uri="{C572A759-6A51-4108-AA02-DFA0A04FC94B}">
-              <ma14:wrappingTextBoxFlag xmlns:ma14="http://schemas.microsoft.com/office/mac/drawingml/2011/main" xmlns:a14="http://schemas.microsoft.com/office/drawing/2010/main" xmlns:m="http://schemas.openxmlformats.org/officeDocument/2006/math" xmlns="" val="1"/>
+              <ma14:wrappingTextBoxFlag xmlns="" xmlns:m="http://schemas.openxmlformats.org/officeDocument/2006/math" xmlns:a14="http://schemas.microsoft.com/office/drawing/2010/main" xmlns:ma14="http://schemas.microsoft.com/office/mac/drawingml/2011/main" val="1"/>
             </a:ext>
           </a:extLst>
         </p:spPr>
@@ -33331,7 +33566,7 @@
           </a:ln>
           <a:extLst>
             <a:ext uri="{C572A759-6A51-4108-AA02-DFA0A04FC94B}">
-              <ma14:wrappingTextBoxFlag xmlns:ma14="http://schemas.microsoft.com/office/mac/drawingml/2011/main" xmlns:a14="http://schemas.microsoft.com/office/drawing/2010/main" xmlns:m="http://schemas.openxmlformats.org/officeDocument/2006/math" xmlns="" val="1"/>
+              <ma14:wrappingTextBoxFlag xmlns="" xmlns:m="http://schemas.openxmlformats.org/officeDocument/2006/math" xmlns:a14="http://schemas.microsoft.com/office/drawing/2010/main" xmlns:ma14="http://schemas.microsoft.com/office/mac/drawingml/2011/main" val="1"/>
             </a:ext>
           </a:extLst>
         </p:spPr>
@@ -33381,7 +33616,7 @@
           </a:ln>
           <a:extLst>
             <a:ext uri="{C572A759-6A51-4108-AA02-DFA0A04FC94B}">
-              <ma14:wrappingTextBoxFlag xmlns:ma14="http://schemas.microsoft.com/office/mac/drawingml/2011/main" xmlns:a14="http://schemas.microsoft.com/office/drawing/2010/main" xmlns:m="http://schemas.openxmlformats.org/officeDocument/2006/math" xmlns="" val="1"/>
+              <ma14:wrappingTextBoxFlag xmlns="" xmlns:m="http://schemas.openxmlformats.org/officeDocument/2006/math" xmlns:a14="http://schemas.microsoft.com/office/drawing/2010/main" xmlns:ma14="http://schemas.microsoft.com/office/mac/drawingml/2011/main" val="1"/>
             </a:ext>
           </a:extLst>
         </p:spPr>
@@ -33469,7 +33704,7 @@
           </a:ln>
           <a:extLst>
             <a:ext uri="{C572A759-6A51-4108-AA02-DFA0A04FC94B}">
-              <ma14:wrappingTextBoxFlag xmlns:ma14="http://schemas.microsoft.com/office/mac/drawingml/2011/main" xmlns:a14="http://schemas.microsoft.com/office/drawing/2010/main" xmlns:m="http://schemas.openxmlformats.org/officeDocument/2006/math" xmlns="" val="1"/>
+              <ma14:wrappingTextBoxFlag xmlns="" xmlns:m="http://schemas.openxmlformats.org/officeDocument/2006/math" xmlns:a14="http://schemas.microsoft.com/office/drawing/2010/main" xmlns:ma14="http://schemas.microsoft.com/office/mac/drawingml/2011/main" val="1"/>
             </a:ext>
           </a:extLst>
         </p:spPr>
@@ -33519,7 +33754,7 @@
           </a:ln>
           <a:extLst>
             <a:ext uri="{C572A759-6A51-4108-AA02-DFA0A04FC94B}">
-              <ma14:wrappingTextBoxFlag xmlns:ma14="http://schemas.microsoft.com/office/mac/drawingml/2011/main" xmlns:a14="http://schemas.microsoft.com/office/drawing/2010/main" xmlns:m="http://schemas.openxmlformats.org/officeDocument/2006/math" xmlns="" val="1"/>
+              <ma14:wrappingTextBoxFlag xmlns="" xmlns:m="http://schemas.openxmlformats.org/officeDocument/2006/math" xmlns:a14="http://schemas.microsoft.com/office/drawing/2010/main" xmlns:ma14="http://schemas.microsoft.com/office/mac/drawingml/2011/main" val="1"/>
             </a:ext>
           </a:extLst>
         </p:spPr>
@@ -33615,7 +33850,7 @@
           </a:ln>
           <a:extLst>
             <a:ext uri="{C572A759-6A51-4108-AA02-DFA0A04FC94B}">
-              <ma14:wrappingTextBoxFlag xmlns:ma14="http://schemas.microsoft.com/office/mac/drawingml/2011/main" xmlns:a14="http://schemas.microsoft.com/office/drawing/2010/main" xmlns:m="http://schemas.openxmlformats.org/officeDocument/2006/math" xmlns="" val="1"/>
+              <ma14:wrappingTextBoxFlag xmlns="" xmlns:m="http://schemas.openxmlformats.org/officeDocument/2006/math" xmlns:a14="http://schemas.microsoft.com/office/drawing/2010/main" xmlns:ma14="http://schemas.microsoft.com/office/mac/drawingml/2011/main" val="1"/>
             </a:ext>
           </a:extLst>
         </p:spPr>
@@ -33665,7 +33900,7 @@
           </a:ln>
           <a:extLst>
             <a:ext uri="{C572A759-6A51-4108-AA02-DFA0A04FC94B}">
-              <ma14:wrappingTextBoxFlag xmlns:ma14="http://schemas.microsoft.com/office/mac/drawingml/2011/main" xmlns:a14="http://schemas.microsoft.com/office/drawing/2010/main" xmlns:m="http://schemas.openxmlformats.org/officeDocument/2006/math" xmlns="" val="1"/>
+              <ma14:wrappingTextBoxFlag xmlns="" xmlns:m="http://schemas.openxmlformats.org/officeDocument/2006/math" xmlns:a14="http://schemas.microsoft.com/office/drawing/2010/main" xmlns:ma14="http://schemas.microsoft.com/office/mac/drawingml/2011/main" val="1"/>
             </a:ext>
           </a:extLst>
         </p:spPr>
